--- a/presentation/ELSA_Depression_Prediction.pptx
+++ b/presentation/ELSA_Depression_Prediction.pptx
@@ -11665,7 +11665,7 @@
                 </a:solidFill>
                 <a:latin typeface="Calibri"/>
               </a:rPr>
-              <a:t>3 arms × 5 configs × 4 models = 60 baseline experiments. Best config per arm then tuned via RandomizedSearchCV (50 iter, 5-fold).</a:t>
+              <a:t>3 arms × 5 configs × 4 models = 60 baseline experiments. Best config per arm then tuned via RandomizedSearchCV (30 iter, 5-fold).</a:t>
             </a:r>
           </a:p>
         </p:txBody>

--- a/presentation/ELSA_Depression_Prediction.pptx
+++ b/presentation/ELSA_Depression_Prediction.pptx
@@ -17,6 +17,8 @@
     <p:sldId id="265" r:id="rId16"/>
     <p:sldId id="266" r:id="rId17"/>
     <p:sldId id="267" r:id="rId18"/>
+    <p:sldId id="268" r:id="rId19"/>
+    <p:sldId id="269" r:id="rId20"/>
   </p:sldIdLst>
   <p:sldSz cx="12191695" cy="6858000" type="screen4x3"/>
   <p:notesSz cx="6858000" cy="9144000"/>
@@ -3451,7 +3453,7 @@
                 </a:solidFill>
                 <a:latin typeface="Calibri"/>
               </a:rPr>
-              <a:t>Beyond Depression History</a:t>
+              <a:t>What Drives the Predictions?</a:t>
             </a:r>
           </a:p>
         </p:txBody>
@@ -3486,14 +3488,14 @@
                 </a:solidFill>
                 <a:latin typeface="Calibri"/>
               </a:rPr>
-              <a:t>Even without prior CES-D, the model still predicts well</a:t>
+              <a:t>SHAP feature importance — Random Forest, W6+W7 full model</a:t>
             </a:r>
           </a:p>
         </p:txBody>
       </p:sp>
       <p:pic>
         <p:nvPicPr>
-          <p:cNvPr id="5" name="Picture 4" descr="leakage_sensitivity.png"/>
+          <p:cNvPr id="5" name="Picture 4" descr="shap_bar_rf.png"/>
           <p:cNvPicPr>
             <a:picLocks noChangeAspect="1"/>
           </p:cNvPicPr>
@@ -3508,7 +3510,7 @@
         <p:spPr>
           <a:xfrm>
             <a:off x="457200" y="1280160"/>
-            <a:ext cx="9179859" cy="3657600"/>
+            <a:ext cx="6003801" cy="4754880"/>
           </a:xfrm>
           <a:prstGeom prst="rect">
             <a:avLst/>
@@ -3545,7 +3547,7 @@
                 </a:solidFill>
                 <a:latin typeface="Calibri"/>
               </a:rPr>
-              <a:t>The leakage test</a:t>
+              <a:t>Top predictors (full model)</a:t>
             </a:r>
           </a:p>
         </p:txBody>
@@ -3559,7 +3561,7 @@
         <p:spPr>
           <a:xfrm>
             <a:off x="6858000" y="1691640"/>
-            <a:ext cx="5120640" cy="1828800"/>
+            <a:ext cx="5120640" cy="2286000"/>
           </a:xfrm>
           <a:prstGeom prst="rect">
             <a:avLst/>
@@ -3578,13 +3580,22 @@
               </a:spcAft>
             </a:pPr>
             <a:r>
-              <a:rPr sz="1400">
-                <a:solidFill>
-                  <a:srgbClr val="1F2D5C"/>
-                </a:solidFill>
-                <a:latin typeface="Calibri"/>
-              </a:rPr>
-              <a:t>• Strip every CES-D-related feature; refit</a:t>
+              <a:rPr sz="1400" b="1">
+                <a:solidFill>
+                  <a:srgbClr val="1F2D5C"/>
+                </a:solidFill>
+                <a:latin typeface="Calibri"/>
+              </a:rPr>
+              <a:t>Prior CES-D</a:t>
+            </a:r>
+            <a:r>
+              <a:rPr sz="1400" b="0">
+                <a:solidFill>
+                  <a:srgbClr val="1F2D5C"/>
+                </a:solidFill>
+                <a:latin typeface="Calibri"/>
+              </a:rPr>
+              <a:t>  state dependence dominates</a:t>
             </a:r>
           </a:p>
           <a:p>
@@ -3594,73 +3605,24 @@
               </a:spcAft>
             </a:pPr>
             <a:r>
-              <a:rPr sz="1400">
-                <a:solidFill>
-                  <a:srgbClr val="1F2D5C"/>
-                </a:solidFill>
-                <a:latin typeface="Calibri"/>
-              </a:rPr>
-              <a:t>• Tests: is the model just "depressed people stay depressed"?</a:t>
-            </a:r>
-          </a:p>
-        </p:txBody>
-      </p:sp>
-      <p:sp>
-        <p:nvSpPr>
-          <p:cNvPr id="8" name="TextBox 7"/>
-          <p:cNvSpPr txBox="1"/>
-          <p:nvPr/>
-        </p:nvSpPr>
-        <p:spPr>
-          <a:xfrm>
-            <a:off x="6858000" y="3108960"/>
-            <a:ext cx="5120640" cy="365760"/>
-          </a:xfrm>
-          <a:prstGeom prst="rect">
-            <a:avLst/>
-          </a:prstGeom>
-          <a:noFill/>
-        </p:spPr>
-        <p:txBody>
-          <a:bodyPr wrap="square" lIns="45720" rIns="45720">
-            <a:spAutoFit/>
-          </a:bodyPr>
-          <a:lstStyle/>
-          <a:p>
-            <a:pPr algn="l"/>
-            <a:r>
-              <a:rPr sz="1800" b="1">
-                <a:solidFill>
-                  <a:srgbClr val="E56B5C"/>
-                </a:solidFill>
-                <a:latin typeface="Calibri"/>
-              </a:rPr>
-              <a:t>What we found</a:t>
-            </a:r>
-          </a:p>
-        </p:txBody>
-      </p:sp>
-      <p:sp>
-        <p:nvSpPr>
-          <p:cNvPr id="9" name="TextBox 8"/>
-          <p:cNvSpPr txBox="1"/>
-          <p:nvPr/>
-        </p:nvSpPr>
-        <p:spPr>
-          <a:xfrm>
-            <a:off x="6858000" y="3520440"/>
-            <a:ext cx="5120640" cy="2286000"/>
-          </a:xfrm>
-          <a:prstGeom prst="rect">
-            <a:avLst/>
-          </a:prstGeom>
-          <a:noFill/>
-        </p:spPr>
-        <p:txBody>
-          <a:bodyPr wrap="square">
-            <a:spAutoFit/>
-          </a:bodyPr>
-          <a:lstStyle/>
+              <a:rPr sz="1400" b="1">
+                <a:solidFill>
+                  <a:srgbClr val="1F2D5C"/>
+                </a:solidFill>
+                <a:latin typeface="Calibri"/>
+              </a:rPr>
+              <a:t>Self-rated health</a:t>
+            </a:r>
+            <a:r>
+              <a:rPr sz="1400" b="0">
+                <a:solidFill>
+                  <a:srgbClr val="1F2D5C"/>
+                </a:solidFill>
+                <a:latin typeface="Calibri"/>
+              </a:rPr>
+              <a:t>  subjective vitality</a:t>
+            </a:r>
+          </a:p>
           <a:p>
             <a:pPr algn="l">
               <a:spcAft>
@@ -3668,22 +3630,22 @@
               </a:spcAft>
             </a:pPr>
             <a:r>
-              <a:rPr sz="1300" b="1">
-                <a:solidFill>
-                  <a:srgbClr val="1F2D5C"/>
-                </a:solidFill>
-                <a:latin typeface="Calibri"/>
-              </a:rPr>
-              <a:t>AUC 0.848 → 0.773</a:t>
-            </a:r>
-            <a:r>
-              <a:rPr sz="1300" b="0">
-                <a:solidFill>
-                  <a:srgbClr val="1F2D5C"/>
-                </a:solidFill>
-                <a:latin typeface="Calibri"/>
-              </a:rPr>
-              <a:t> (drop of 0.075)</a:t>
+              <a:rPr sz="1400" b="1">
+                <a:solidFill>
+                  <a:srgbClr val="1F2D5C"/>
+                </a:solidFill>
+                <a:latin typeface="Calibri"/>
+              </a:rPr>
+              <a:t>Mobility count</a:t>
+            </a:r>
+            <a:r>
+              <a:rPr sz="1400" b="0">
+                <a:solidFill>
+                  <a:srgbClr val="1F2D5C"/>
+                </a:solidFill>
+                <a:latin typeface="Calibri"/>
+              </a:rPr>
+              <a:t>  physical function decline</a:t>
             </a:r>
           </a:p>
           <a:p>
@@ -3693,13 +3655,22 @@
               </a:spcAft>
             </a:pPr>
             <a:r>
-              <a:rPr sz="1300">
-                <a:solidFill>
-                  <a:srgbClr val="1F2D5C"/>
-                </a:solidFill>
-                <a:latin typeface="Calibri"/>
-              </a:rPr>
-              <a:t>• Drop is real — prior depression matters</a:t>
+              <a:rPr sz="1400" b="1">
+                <a:solidFill>
+                  <a:srgbClr val="1F2D5C"/>
+                </a:solidFill>
+                <a:latin typeface="Calibri"/>
+              </a:rPr>
+              <a:t>CES-D change</a:t>
+            </a:r>
+            <a:r>
+              <a:rPr sz="1400" b="0">
+                <a:solidFill>
+                  <a:srgbClr val="1F2D5C"/>
+                </a:solidFill>
+                <a:latin typeface="Calibri"/>
+              </a:rPr>
+              <a:t>  worsening trajectory matters</a:t>
             </a:r>
           </a:p>
           <a:p>
@@ -3709,158 +3680,153 @@
               </a:spcAft>
             </a:pPr>
             <a:r>
-              <a:rPr sz="1300">
-                <a:solidFill>
-                  <a:srgbClr val="1F2D5C"/>
-                </a:solidFill>
-                <a:latin typeface="Calibri"/>
-              </a:rPr>
-              <a:t>• But 0.77 is still a clinically usable screening signal</a:t>
-            </a:r>
-          </a:p>
+              <a:rPr sz="1400" b="1">
+                <a:solidFill>
+                  <a:srgbClr val="1F2D5C"/>
+                </a:solidFill>
+                <a:latin typeface="Calibri"/>
+              </a:rPr>
+              <a:t>Financial difficulty</a:t>
+            </a:r>
+            <a:r>
+              <a:rPr sz="1400" b="0">
+                <a:solidFill>
+                  <a:srgbClr val="1F2D5C"/>
+                </a:solidFill>
+                <a:latin typeface="Calibri"/>
+              </a:rPr>
+              <a:t>  socioeconomic strain</a:t>
+            </a:r>
+          </a:p>
+        </p:txBody>
+      </p:sp>
+      <p:sp>
+        <p:nvSpPr>
+          <p:cNvPr id="8" name="TextBox 7"/>
+          <p:cNvSpPr txBox="1"/>
+          <p:nvPr/>
+        </p:nvSpPr>
+        <p:spPr>
+          <a:xfrm>
+            <a:off x="6858000" y="3840480"/>
+            <a:ext cx="5120640" cy="365760"/>
+          </a:xfrm>
+          <a:prstGeom prst="rect">
+            <a:avLst/>
+          </a:prstGeom>
+          <a:noFill/>
+        </p:spPr>
+        <p:txBody>
+          <a:bodyPr wrap="square" lIns="45720" rIns="45720">
+            <a:spAutoFit/>
+          </a:bodyPr>
+          <a:lstStyle/>
+          <a:p>
+            <a:pPr algn="l"/>
+            <a:r>
+              <a:rPr sz="1800" b="1">
+                <a:solidFill>
+                  <a:srgbClr val="E56B5C"/>
+                </a:solidFill>
+                <a:latin typeface="Calibri"/>
+              </a:rPr>
+              <a:t>What this shows</a:t>
+            </a:r>
+          </a:p>
+        </p:txBody>
+      </p:sp>
+      <p:sp>
+        <p:nvSpPr>
+          <p:cNvPr id="9" name="TextBox 8"/>
+          <p:cNvSpPr txBox="1"/>
+          <p:nvPr/>
+        </p:nvSpPr>
+        <p:spPr>
+          <a:xfrm>
+            <a:off x="6858000" y="4251960"/>
+            <a:ext cx="5120640" cy="2286000"/>
+          </a:xfrm>
+          <a:prstGeom prst="rect">
+            <a:avLst/>
+          </a:prstGeom>
+          <a:noFill/>
+        </p:spPr>
+        <p:txBody>
+          <a:bodyPr wrap="square">
+            <a:spAutoFit/>
+          </a:bodyPr>
+          <a:lstStyle/>
           <a:p>
             <a:pPr algn="l">
               <a:spcAft>
-                <a:spcPts val="500"/>
+                <a:spcPts val="400"/>
               </a:spcAft>
             </a:pPr>
             <a:r>
-              <a:rPr sz="1300" b="0">
-                <a:solidFill>
-                  <a:srgbClr val="1F2D5C"/>
-                </a:solidFill>
-                <a:latin typeface="Calibri"/>
-              </a:rPr>
-              <a:t>Achieved with </a:t>
-            </a:r>
-            <a:r>
-              <a:rPr sz="1300" b="1">
-                <a:solidFill>
-                  <a:srgbClr val="1F2D5C"/>
-                </a:solidFill>
-                <a:latin typeface="Calibri"/>
-              </a:rPr>
-              <a:t>no mental health features at all</a:t>
-            </a:r>
-          </a:p>
-        </p:txBody>
-      </p:sp>
-      <p:sp>
-        <p:nvSpPr>
-          <p:cNvPr id="10" name="Rectangle 9"/>
-          <p:cNvSpPr/>
-          <p:nvPr/>
-        </p:nvSpPr>
-        <p:spPr>
-          <a:xfrm>
-            <a:off x="457200" y="5532120"/>
-            <a:ext cx="11247120" cy="868680"/>
-          </a:xfrm>
-          <a:prstGeom prst="rect">
-            <a:avLst/>
-          </a:prstGeom>
-          <a:solidFill>
-            <a:srgbClr val="1F2D5C"/>
-          </a:solidFill>
-          <a:ln>
-            <a:noFill/>
-          </a:ln>
-        </p:spPr>
-        <p:style>
-          <a:lnRef idx="1">
-            <a:schemeClr val="accent1"/>
-          </a:lnRef>
-          <a:fillRef idx="3">
-            <a:schemeClr val="accent1"/>
-          </a:fillRef>
-          <a:effectRef idx="2">
-            <a:schemeClr val="accent1"/>
-          </a:effectRef>
-          <a:fontRef idx="minor">
-            <a:schemeClr val="lt1"/>
-          </a:fontRef>
-        </p:style>
-        <p:txBody>
-          <a:bodyPr rtlCol="0" anchor="ctr"/>
-          <a:lstStyle/>
-          <a:p>
-            <a:pPr algn="ctr"/>
-          </a:p>
-        </p:txBody>
-      </p:sp>
-      <p:sp>
-        <p:nvSpPr>
-          <p:cNvPr id="11" name="TextBox 10"/>
-          <p:cNvSpPr txBox="1"/>
-          <p:nvPr/>
-        </p:nvSpPr>
-        <p:spPr>
-          <a:xfrm>
-            <a:off x="640080" y="5623560"/>
-            <a:ext cx="10972800" cy="365760"/>
-          </a:xfrm>
-          <a:prstGeom prst="rect">
-            <a:avLst/>
-          </a:prstGeom>
-          <a:noFill/>
-        </p:spPr>
-        <p:txBody>
-          <a:bodyPr wrap="square" lIns="45720" rIns="45720">
-            <a:spAutoFit/>
-          </a:bodyPr>
-          <a:lstStyle/>
-          <a:p>
-            <a:pPr algn="l"/>
+              <a:rPr sz="1200" b="0">
+                <a:solidFill>
+                  <a:srgbClr val="1F2D5C"/>
+                </a:solidFill>
+                <a:latin typeface="Calibri"/>
+              </a:rPr>
+              <a:t>Late-life depression has a </a:t>
+            </a:r>
             <a:r>
               <a:rPr sz="1200" b="1">
                 <a:solidFill>
-                  <a:srgbClr val="E56B5C"/>
-                </a:solidFill>
-                <a:latin typeface="Calibri"/>
-              </a:rPr>
-              <a:t>Headline scientific finding</a:t>
-            </a:r>
-          </a:p>
-        </p:txBody>
-      </p:sp>
-      <p:sp>
-        <p:nvSpPr>
-          <p:cNvPr id="12" name="TextBox 11"/>
-          <p:cNvSpPr txBox="1"/>
-          <p:nvPr/>
-        </p:nvSpPr>
-        <p:spPr>
-          <a:xfrm>
-            <a:off x="640080" y="5943600"/>
-            <a:ext cx="10972800" cy="457200"/>
-          </a:xfrm>
-          <a:prstGeom prst="rect">
-            <a:avLst/>
-          </a:prstGeom>
-          <a:noFill/>
-        </p:spPr>
-        <p:txBody>
-          <a:bodyPr wrap="square" lIns="45720" rIns="45720">
-            <a:spAutoFit/>
-          </a:bodyPr>
-          <a:lstStyle/>
-          <a:p>
-            <a:pPr algn="l"/>
-            <a:r>
-              <a:rPr sz="1400" b="0">
-                <a:solidFill>
-                  <a:srgbClr val="FFFFFF"/>
-                </a:solidFill>
-                <a:latin typeface="Calibri"/>
-              </a:rPr>
-              <a:t>Depression risk leaves a measurable footprint in physical, functional, and economic data 2–4 years before symptoms emerge.</a:t>
-            </a:r>
-          </a:p>
-        </p:txBody>
-      </p:sp>
-      <p:sp>
-        <p:nvSpPr>
-          <p:cNvPr id="13" name="TextBox 12"/>
+                  <a:srgbClr val="1F2D5C"/>
+                </a:solidFill>
+                <a:latin typeface="Calibri"/>
+              </a:rPr>
+              <a:t>biopsychosocial</a:t>
+            </a:r>
+            <a:r>
+              <a:rPr sz="1200" b="0">
+                <a:solidFill>
+                  <a:srgbClr val="1F2D5C"/>
+                </a:solidFill>
+                <a:latin typeface="Calibri"/>
+              </a:rPr>
+              <a:t> signature</a:t>
+            </a:r>
+          </a:p>
+          <a:p>
+            <a:pPr algn="l">
+              <a:spcAft>
+                <a:spcPts val="400"/>
+              </a:spcAft>
+            </a:pPr>
+            <a:r>
+              <a:rPr sz="1200">
+                <a:solidFill>
+                  <a:srgbClr val="1F2D5C"/>
+                </a:solidFill>
+                <a:latin typeface="Calibri"/>
+              </a:rPr>
+              <a:t>• Physical, mental, and social signals all visible 2-4 yrs ahead</a:t>
+            </a:r>
+          </a:p>
+          <a:p>
+            <a:pPr algn="l">
+              <a:spcAft>
+                <a:spcPts val="400"/>
+              </a:spcAft>
+            </a:pPr>
+            <a:r>
+              <a:rPr sz="1200">
+                <a:solidFill>
+                  <a:srgbClr val="1F2D5C"/>
+                </a:solidFill>
+                <a:latin typeface="Calibri"/>
+              </a:rPr>
+              <a:t>• Aligns with established gerontological depression literature</a:t>
+            </a:r>
+          </a:p>
+        </p:txBody>
+      </p:sp>
+      <p:sp>
+        <p:nvSpPr>
+          <p:cNvPr id="10" name="TextBox 9"/>
           <p:cNvSpPr txBox="1"/>
           <p:nvPr/>
         </p:nvSpPr>
@@ -3895,7 +3861,7 @@
       </p:sp>
       <p:sp>
         <p:nvSpPr>
-          <p:cNvPr id="14" name="TextBox 13"/>
+          <p:cNvPr id="11" name="TextBox 10"/>
           <p:cNvSpPr txBox="1"/>
           <p:nvPr/>
         </p:nvSpPr>
@@ -3923,7 +3889,7 @@
                 </a:solidFill>
                 <a:latin typeface="Calibri"/>
               </a:rPr>
-              <a:t>10 / 12</a:t>
+              <a:t>10 / 14</a:t>
             </a:r>
           </a:p>
         </p:txBody>
@@ -4019,7 +3985,7 @@
                 </a:solidFill>
                 <a:latin typeface="Calibri"/>
               </a:rPr>
-              <a:t>Limitations</a:t>
+              <a:t>Robustness: Three Methods Agree</a:t>
             </a:r>
           </a:p>
         </p:txBody>
@@ -4054,7 +4020,7 @@
                 </a:solidFill>
                 <a:latin typeface="Calibri"/>
               </a:rPr>
-              <a:t>Where the model can and cannot be trusted</a:t>
+              <a:t>SHAP, LR coefficients, and LGBM gain converge on the same predictors</a:t>
             </a:r>
           </a:p>
         </p:txBody>
@@ -4083,162 +4049,57 @@
           <a:p>
             <a:pPr algn="l"/>
             <a:r>
-              <a:rPr sz="1800" b="1">
-                <a:solidFill>
-                  <a:srgbClr val="E56B5C"/>
-                </a:solidFill>
-                <a:latin typeface="Calibri"/>
-              </a:rPr>
-              <a:t>Methodological</a:t>
-            </a:r>
-          </a:p>
-        </p:txBody>
-      </p:sp>
-      <p:sp>
-        <p:nvSpPr>
-          <p:cNvPr id="6" name="TextBox 5"/>
-          <p:cNvSpPr txBox="1"/>
+              <a:rPr sz="1600" b="1">
+                <a:solidFill>
+                  <a:srgbClr val="186F82"/>
+                </a:solidFill>
+                <a:latin typeface="Calibri"/>
+              </a:rPr>
+              <a:t>Convergent feature ranking (W6+W7)</a:t>
+            </a:r>
+          </a:p>
+        </p:txBody>
+      </p:sp>
+      <p:sp>
+        <p:nvSpPr>
+          <p:cNvPr id="6" name="Rectangle 5"/>
+          <p:cNvSpPr/>
           <p:nvPr/>
         </p:nvSpPr>
         <p:spPr>
           <a:xfrm>
             <a:off x="457200" y="1691640"/>
-            <a:ext cx="5669280" cy="4114800"/>
-          </a:xfrm>
-          <a:prstGeom prst="rect">
-            <a:avLst/>
-          </a:prstGeom>
-          <a:noFill/>
-        </p:spPr>
-        <p:txBody>
-          <a:bodyPr wrap="square">
-            <a:spAutoFit/>
-          </a:bodyPr>
-          <a:lstStyle/>
-          <a:p>
-            <a:pPr algn="l">
-              <a:spcAft>
-                <a:spcPts val="600"/>
-              </a:spcAft>
-            </a:pPr>
-            <a:r>
-              <a:rPr sz="1400" b="1">
-                <a:solidFill>
-                  <a:srgbClr val="1F2D5C"/>
-                </a:solidFill>
-                <a:latin typeface="Calibri"/>
-              </a:rPr>
-              <a:t>Screening, not diagnosis</a:t>
-            </a:r>
-            <a:r>
-              <a:rPr sz="1400" b="0">
-                <a:solidFill>
-                  <a:srgbClr val="1F2D5C"/>
-                </a:solidFill>
-                <a:latin typeface="Calibri"/>
-              </a:rPr>
-              <a:t>  CES-D ≥ 3 flags symptoms, not MDD</a:t>
-            </a:r>
-          </a:p>
-          <a:p>
-            <a:pPr algn="l">
-              <a:spcAft>
-                <a:spcPts val="600"/>
-              </a:spcAft>
-            </a:pPr>
-            <a:r>
-              <a:rPr sz="1400" b="1">
-                <a:solidFill>
-                  <a:srgbClr val="1F2D5C"/>
-                </a:solidFill>
-                <a:latin typeface="Calibri"/>
-              </a:rPr>
-              <a:t>Observational</a:t>
-            </a:r>
-            <a:r>
-              <a:rPr sz="1400" b="0">
-                <a:solidFill>
-                  <a:srgbClr val="1F2D5C"/>
-                </a:solidFill>
-                <a:latin typeface="Calibri"/>
-              </a:rPr>
-              <a:t>  associations, not causal claims</a:t>
-            </a:r>
-          </a:p>
-          <a:p>
-            <a:pPr algn="l">
-              <a:spcAft>
-                <a:spcPts val="600"/>
-              </a:spcAft>
-            </a:pPr>
-            <a:r>
-              <a:rPr sz="1400" b="1">
-                <a:solidFill>
-                  <a:srgbClr val="1F2D5C"/>
-                </a:solidFill>
-                <a:latin typeface="Calibri"/>
-              </a:rPr>
-              <a:t>Attrition bias</a:t>
-            </a:r>
-            <a:r>
-              <a:rPr sz="1400" b="0">
-                <a:solidFill>
-                  <a:srgbClr val="1F2D5C"/>
-                </a:solidFill>
-                <a:latin typeface="Calibri"/>
-              </a:rPr>
-              <a:t>  ~30% of W6 sample dropped (likely sicker)</a:t>
-            </a:r>
-          </a:p>
-          <a:p>
-            <a:pPr algn="l">
-              <a:spcAft>
-                <a:spcPts val="600"/>
-              </a:spcAft>
-            </a:pPr>
-            <a:r>
-              <a:rPr sz="1400" b="1">
-                <a:solidFill>
-                  <a:srgbClr val="1F2D5C"/>
-                </a:solidFill>
-                <a:latin typeface="Calibri"/>
-              </a:rPr>
-              <a:t>State dependence</a:t>
-            </a:r>
-            <a:r>
-              <a:rPr sz="1400" b="0">
-                <a:solidFill>
-                  <a:srgbClr val="1F2D5C"/>
-                </a:solidFill>
-                <a:latin typeface="Calibri"/>
-              </a:rPr>
-              <a:t>  prior CES-D dominates the full model</a:t>
-            </a:r>
-          </a:p>
-          <a:p>
-            <a:pPr algn="l">
-              <a:spcAft>
-                <a:spcPts val="600"/>
-              </a:spcAft>
-            </a:pPr>
-            <a:r>
-              <a:rPr sz="1400" b="1">
-                <a:solidFill>
-                  <a:srgbClr val="1F2D5C"/>
-                </a:solidFill>
-                <a:latin typeface="Calibri"/>
-              </a:rPr>
-              <a:t>Imbalance</a:t>
-            </a:r>
-            <a:r>
-              <a:rPr sz="1400" b="0">
-                <a:solidFill>
-                  <a:srgbClr val="1F2D5C"/>
-                </a:solidFill>
-                <a:latin typeface="Calibri"/>
-              </a:rPr>
-              <a:t>  precision ≈ 49%; ~half of flagged are false +ve</a:t>
-            </a:r>
+            <a:ext cx="5669280" cy="411480"/>
+          </a:xfrm>
+          <a:prstGeom prst="rect">
+            <a:avLst/>
+          </a:prstGeom>
+          <a:solidFill>
+            <a:srgbClr val="1F2D5C"/>
+          </a:solidFill>
+          <a:ln>
+            <a:noFill/>
+          </a:ln>
+        </p:spPr>
+        <p:style>
+          <a:lnRef idx="1">
+            <a:schemeClr val="accent1"/>
+          </a:lnRef>
+          <a:fillRef idx="3">
+            <a:schemeClr val="accent1"/>
+          </a:fillRef>
+          <a:effectRef idx="2">
+            <a:schemeClr val="accent1"/>
+          </a:effectRef>
+          <a:fontRef idx="minor">
+            <a:schemeClr val="lt1"/>
+          </a:fontRef>
+        </p:style>
+        <p:txBody>
+          <a:bodyPr rtlCol="0" anchor="ctr"/>
+          <a:lstStyle/>
+          <a:p>
+            <a:pPr algn="ctr"/>
           </a:p>
         </p:txBody>
       </p:sp>
@@ -4250,8 +4111,8 @@
         </p:nvSpPr>
         <p:spPr>
           <a:xfrm>
-            <a:off x="6400800" y="1280160"/>
-            <a:ext cx="5486400" cy="365760"/>
+            <a:off x="640080" y="1764792"/>
+            <a:ext cx="2194560" cy="320040"/>
           </a:xfrm>
           <a:prstGeom prst="rect">
             <a:avLst/>
@@ -4266,13 +4127,13 @@
           <a:p>
             <a:pPr algn="l"/>
             <a:r>
-              <a:rPr sz="1800" b="1">
-                <a:solidFill>
-                  <a:srgbClr val="E0A32A"/>
-                </a:solidFill>
-                <a:latin typeface="Calibri"/>
-              </a:rPr>
-              <a:t>Generalisability</a:t>
+              <a:rPr sz="1100" b="1">
+                <a:solidFill>
+                  <a:srgbClr val="FFFFFF"/>
+                </a:solidFill>
+                <a:latin typeface="Calibri"/>
+              </a:rPr>
+              <a:t>Feature</a:t>
             </a:r>
           </a:p>
         </p:txBody>
@@ -4285,129 +4146,113 @@
         </p:nvSpPr>
         <p:spPr>
           <a:xfrm>
-            <a:off x="6400800" y="1691640"/>
-            <a:ext cx="5486400" cy="4114800"/>
-          </a:xfrm>
-          <a:prstGeom prst="rect">
-            <a:avLst/>
-          </a:prstGeom>
-          <a:noFill/>
-        </p:spPr>
-        <p:txBody>
-          <a:bodyPr wrap="square">
-            <a:spAutoFit/>
-          </a:bodyPr>
-          <a:lstStyle/>
-          <a:p>
-            <a:pPr algn="l">
-              <a:spcAft>
-                <a:spcPts val="600"/>
-              </a:spcAft>
-            </a:pPr>
-            <a:r>
-              <a:rPr sz="1400" b="0">
-                <a:solidFill>
-                  <a:srgbClr val="1F2D5C"/>
-                </a:solidFill>
-                <a:latin typeface="Calibri"/>
-              </a:rPr>
-              <a:t>Validated only on </a:t>
-            </a:r>
-            <a:r>
-              <a:rPr sz="1400" b="1">
-                <a:solidFill>
-                  <a:srgbClr val="1F2D5C"/>
-                </a:solidFill>
-                <a:latin typeface="Calibri"/>
-              </a:rPr>
-              <a:t>English population aged 50+</a:t>
-            </a:r>
-          </a:p>
-          <a:p>
-            <a:pPr algn="l">
-              <a:spcAft>
-                <a:spcPts val="600"/>
-              </a:spcAft>
-            </a:pPr>
-            <a:r>
-              <a:rPr sz="1400">
-                <a:solidFill>
-                  <a:srgbClr val="1F2D5C"/>
-                </a:solidFill>
-                <a:latin typeface="Calibri"/>
-              </a:rPr>
-              <a:t>• Excludes institutionalised and care-home residents</a:t>
-            </a:r>
-          </a:p>
-          <a:p>
-            <a:pPr algn="l">
-              <a:spcAft>
-                <a:spcPts val="600"/>
-              </a:spcAft>
-            </a:pPr>
-            <a:r>
-              <a:rPr sz="1400">
-                <a:solidFill>
-                  <a:srgbClr val="1F2D5C"/>
-                </a:solidFill>
-                <a:latin typeface="Calibri"/>
-              </a:rPr>
-              <a:t>• ELSA cohort effects (e.g. 1950s-born ≠ today's 50-year-olds)</a:t>
-            </a:r>
-          </a:p>
-          <a:p>
-            <a:pPr algn="l">
-              <a:spcAft>
-                <a:spcPts val="600"/>
-              </a:spcAft>
-            </a:pPr>
-            <a:r>
-              <a:rPr sz="1400" b="1">
-                <a:solidFill>
-                  <a:srgbClr val="1F2D5C"/>
-                </a:solidFill>
-                <a:latin typeface="Calibri"/>
-              </a:rPr>
-              <a:t>Fairness not yet evaluated</a:t>
-            </a:r>
-            <a:r>
-              <a:rPr sz="1400" b="0">
-                <a:solidFill>
-                  <a:srgbClr val="1F2D5C"/>
-                </a:solidFill>
-                <a:latin typeface="Calibri"/>
-              </a:rPr>
-              <a:t> across sex, ethnicity, SES</a:t>
-            </a:r>
-          </a:p>
-          <a:p>
-            <a:pPr algn="l">
-              <a:spcAft>
-                <a:spcPts val="600"/>
-              </a:spcAft>
-            </a:pPr>
-            <a:r>
-              <a:rPr sz="1400">
-                <a:solidFill>
-                  <a:srgbClr val="1F2D5C"/>
-                </a:solidFill>
-                <a:latin typeface="Calibri"/>
-              </a:rPr>
-              <a:t>• Threshold of 0.5 is naive — deployment must tune to capacity</a:t>
-            </a:r>
-          </a:p>
-        </p:txBody>
-      </p:sp>
-      <p:sp>
-        <p:nvSpPr>
-          <p:cNvPr id="9" name="Rectangle 8"/>
+            <a:off x="2880360" y="1764792"/>
+            <a:ext cx="960120" cy="320040"/>
+          </a:xfrm>
+          <a:prstGeom prst="rect">
+            <a:avLst/>
+          </a:prstGeom>
+          <a:noFill/>
+        </p:spPr>
+        <p:txBody>
+          <a:bodyPr wrap="square" lIns="45720" rIns="45720">
+            <a:spAutoFit/>
+          </a:bodyPr>
+          <a:lstStyle/>
+          <a:p>
+            <a:pPr algn="l"/>
+            <a:r>
+              <a:rPr sz="1100" b="1">
+                <a:solidFill>
+                  <a:srgbClr val="FFFFFF"/>
+                </a:solidFill>
+                <a:latin typeface="Calibri"/>
+              </a:rPr>
+              <a:t>SHAP rank</a:t>
+            </a:r>
+          </a:p>
+        </p:txBody>
+      </p:sp>
+      <p:sp>
+        <p:nvSpPr>
+          <p:cNvPr id="9" name="TextBox 8"/>
+          <p:cNvSpPr txBox="1"/>
+          <p:nvPr/>
+        </p:nvSpPr>
+        <p:spPr>
+          <a:xfrm>
+            <a:off x="3931920" y="1764792"/>
+            <a:ext cx="1097280" cy="320040"/>
+          </a:xfrm>
+          <a:prstGeom prst="rect">
+            <a:avLst/>
+          </a:prstGeom>
+          <a:noFill/>
+        </p:spPr>
+        <p:txBody>
+          <a:bodyPr wrap="square" lIns="45720" rIns="45720">
+            <a:spAutoFit/>
+          </a:bodyPr>
+          <a:lstStyle/>
+          <a:p>
+            <a:pPr algn="l"/>
+            <a:r>
+              <a:rPr sz="1100" b="1">
+                <a:solidFill>
+                  <a:srgbClr val="FFFFFF"/>
+                </a:solidFill>
+                <a:latin typeface="Calibri"/>
+              </a:rPr>
+              <a:t>LR coeff</a:t>
+            </a:r>
+          </a:p>
+        </p:txBody>
+      </p:sp>
+      <p:sp>
+        <p:nvSpPr>
+          <p:cNvPr id="10" name="TextBox 9"/>
+          <p:cNvSpPr txBox="1"/>
+          <p:nvPr/>
+        </p:nvSpPr>
+        <p:spPr>
+          <a:xfrm>
+            <a:off x="5120640" y="1764792"/>
+            <a:ext cx="1280160" cy="320040"/>
+          </a:xfrm>
+          <a:prstGeom prst="rect">
+            <a:avLst/>
+          </a:prstGeom>
+          <a:noFill/>
+        </p:spPr>
+        <p:txBody>
+          <a:bodyPr wrap="square" lIns="45720" rIns="45720">
+            <a:spAutoFit/>
+          </a:bodyPr>
+          <a:lstStyle/>
+          <a:p>
+            <a:pPr algn="l"/>
+            <a:r>
+              <a:rPr sz="1100" b="1">
+                <a:solidFill>
+                  <a:srgbClr val="FFFFFF"/>
+                </a:solidFill>
+                <a:latin typeface="Calibri"/>
+              </a:rPr>
+              <a:t>LGBM gain</a:t>
+            </a:r>
+          </a:p>
+        </p:txBody>
+      </p:sp>
+      <p:sp>
+        <p:nvSpPr>
+          <p:cNvPr id="11" name="Rectangle 10"/>
           <p:cNvSpPr/>
           <p:nvPr/>
         </p:nvSpPr>
         <p:spPr>
           <a:xfrm>
-            <a:off x="457200" y="5532120"/>
-            <a:ext cx="11247120" cy="868680"/>
+            <a:off x="457200" y="2103120"/>
+            <a:ext cx="5669280" cy="365760"/>
           </a:xfrm>
           <a:prstGeom prst="rect">
             <a:avLst/>
@@ -4443,14 +4288,14 @@
       </p:sp>
       <p:sp>
         <p:nvSpPr>
-          <p:cNvPr id="10" name="TextBox 9"/>
-          <p:cNvSpPr txBox="1"/>
-          <p:nvPr/>
-        </p:nvSpPr>
-        <p:spPr>
-          <a:xfrm>
-            <a:off x="640080" y="5623560"/>
-            <a:ext cx="10972800" cy="365760"/>
+          <p:cNvPr id="12" name="TextBox 11"/>
+          <p:cNvSpPr txBox="1"/>
+          <p:nvPr/>
+        </p:nvSpPr>
+        <p:spPr>
+          <a:xfrm>
+            <a:off x="640080" y="2176272"/>
+            <a:ext cx="2194560" cy="274320"/>
           </a:xfrm>
           <a:prstGeom prst="rect">
             <a:avLst/>
@@ -4465,27 +4310,1082 @@
           <a:p>
             <a:pPr algn="l"/>
             <a:r>
+              <a:rPr sz="1100" b="0">
+                <a:solidFill>
+                  <a:srgbClr val="1F2D5C"/>
+                </a:solidFill>
+                <a:latin typeface="Calibri"/>
+              </a:rPr>
+              <a:t>cesd_sc W7/W6</a:t>
+            </a:r>
+          </a:p>
+        </p:txBody>
+      </p:sp>
+      <p:sp>
+        <p:nvSpPr>
+          <p:cNvPr id="13" name="TextBox 12"/>
+          <p:cNvSpPr txBox="1"/>
+          <p:nvPr/>
+        </p:nvSpPr>
+        <p:spPr>
+          <a:xfrm>
+            <a:off x="2880360" y="2176272"/>
+            <a:ext cx="960120" cy="274320"/>
+          </a:xfrm>
+          <a:prstGeom prst="rect">
+            <a:avLst/>
+          </a:prstGeom>
+          <a:noFill/>
+        </p:spPr>
+        <p:txBody>
+          <a:bodyPr wrap="square" lIns="45720" rIns="45720">
+            <a:spAutoFit/>
+          </a:bodyPr>
+          <a:lstStyle/>
+          <a:p>
+            <a:pPr algn="l"/>
+            <a:r>
+              <a:rPr sz="1100" b="0">
+                <a:solidFill>
+                  <a:srgbClr val="1F2D5C"/>
+                </a:solidFill>
+                <a:latin typeface="Calibri"/>
+              </a:rPr>
+              <a:t>#1, #2</a:t>
+            </a:r>
+          </a:p>
+        </p:txBody>
+      </p:sp>
+      <p:sp>
+        <p:nvSpPr>
+          <p:cNvPr id="14" name="TextBox 13"/>
+          <p:cNvSpPr txBox="1"/>
+          <p:nvPr/>
+        </p:nvSpPr>
+        <p:spPr>
+          <a:xfrm>
+            <a:off x="3931920" y="2176272"/>
+            <a:ext cx="1097280" cy="274320"/>
+          </a:xfrm>
+          <a:prstGeom prst="rect">
+            <a:avLst/>
+          </a:prstGeom>
+          <a:noFill/>
+        </p:spPr>
+        <p:txBody>
+          <a:bodyPr wrap="square" lIns="45720" rIns="45720">
+            <a:spAutoFit/>
+          </a:bodyPr>
+          <a:lstStyle/>
+          <a:p>
+            <a:pPr algn="l"/>
+            <a:r>
+              <a:rPr sz="1100" b="0">
+                <a:solidFill>
+                  <a:srgbClr val="1F2D5C"/>
+                </a:solidFill>
+                <a:latin typeface="Calibri"/>
+              </a:rPr>
+              <a:t>+0.89 / +0.70</a:t>
+            </a:r>
+          </a:p>
+        </p:txBody>
+      </p:sp>
+      <p:sp>
+        <p:nvSpPr>
+          <p:cNvPr id="15" name="TextBox 14"/>
+          <p:cNvSpPr txBox="1"/>
+          <p:nvPr/>
+        </p:nvSpPr>
+        <p:spPr>
+          <a:xfrm>
+            <a:off x="5120640" y="2176272"/>
+            <a:ext cx="1280160" cy="274320"/>
+          </a:xfrm>
+          <a:prstGeom prst="rect">
+            <a:avLst/>
+          </a:prstGeom>
+          <a:noFill/>
+        </p:spPr>
+        <p:txBody>
+          <a:bodyPr wrap="square" lIns="45720" rIns="45720">
+            <a:spAutoFit/>
+          </a:bodyPr>
+          <a:lstStyle/>
+          <a:p>
+            <a:pPr algn="l"/>
+            <a:r>
+              <a:rPr sz="1100" b="0">
+                <a:solidFill>
+                  <a:srgbClr val="1F2D5C"/>
+                </a:solidFill>
+                <a:latin typeface="Calibri"/>
+              </a:rPr>
+              <a:t>Dominant</a:t>
+            </a:r>
+          </a:p>
+        </p:txBody>
+      </p:sp>
+      <p:sp>
+        <p:nvSpPr>
+          <p:cNvPr id="16" name="Rectangle 15"/>
+          <p:cNvSpPr/>
+          <p:nvPr/>
+        </p:nvSpPr>
+        <p:spPr>
+          <a:xfrm>
+            <a:off x="457200" y="2487168"/>
+            <a:ext cx="5669280" cy="365760"/>
+          </a:xfrm>
+          <a:prstGeom prst="rect">
+            <a:avLst/>
+          </a:prstGeom>
+          <a:solidFill>
+            <a:srgbClr val="FFFFFF"/>
+          </a:solidFill>
+          <a:ln>
+            <a:noFill/>
+          </a:ln>
+        </p:spPr>
+        <p:style>
+          <a:lnRef idx="1">
+            <a:schemeClr val="accent1"/>
+          </a:lnRef>
+          <a:fillRef idx="3">
+            <a:schemeClr val="accent1"/>
+          </a:fillRef>
+          <a:effectRef idx="2">
+            <a:schemeClr val="accent1"/>
+          </a:effectRef>
+          <a:fontRef idx="minor">
+            <a:schemeClr val="lt1"/>
+          </a:fontRef>
+        </p:style>
+        <p:txBody>
+          <a:bodyPr rtlCol="0" anchor="ctr"/>
+          <a:lstStyle/>
+          <a:p>
+            <a:pPr algn="ctr"/>
+          </a:p>
+        </p:txBody>
+      </p:sp>
+      <p:sp>
+        <p:nvSpPr>
+          <p:cNvPr id="17" name="TextBox 16"/>
+          <p:cNvSpPr txBox="1"/>
+          <p:nvPr/>
+        </p:nvSpPr>
+        <p:spPr>
+          <a:xfrm>
+            <a:off x="640080" y="2560320"/>
+            <a:ext cx="2194560" cy="274320"/>
+          </a:xfrm>
+          <a:prstGeom prst="rect">
+            <a:avLst/>
+          </a:prstGeom>
+          <a:noFill/>
+        </p:spPr>
+        <p:txBody>
+          <a:bodyPr wrap="square" lIns="45720" rIns="45720">
+            <a:spAutoFit/>
+          </a:bodyPr>
+          <a:lstStyle/>
+          <a:p>
+            <a:pPr algn="l"/>
+            <a:r>
+              <a:rPr sz="1100" b="0">
+                <a:solidFill>
+                  <a:srgbClr val="1F2D5C"/>
+                </a:solidFill>
+                <a:latin typeface="Calibri"/>
+              </a:rPr>
+              <a:t>Self-rated health</a:t>
+            </a:r>
+          </a:p>
+        </p:txBody>
+      </p:sp>
+      <p:sp>
+        <p:nvSpPr>
+          <p:cNvPr id="18" name="TextBox 17"/>
+          <p:cNvSpPr txBox="1"/>
+          <p:nvPr/>
+        </p:nvSpPr>
+        <p:spPr>
+          <a:xfrm>
+            <a:off x="2880360" y="2560320"/>
+            <a:ext cx="960120" cy="274320"/>
+          </a:xfrm>
+          <a:prstGeom prst="rect">
+            <a:avLst/>
+          </a:prstGeom>
+          <a:noFill/>
+        </p:spPr>
+        <p:txBody>
+          <a:bodyPr wrap="square" lIns="45720" rIns="45720">
+            <a:spAutoFit/>
+          </a:bodyPr>
+          <a:lstStyle/>
+          <a:p>
+            <a:pPr algn="l"/>
+            <a:r>
+              <a:rPr sz="1100" b="0">
+                <a:solidFill>
+                  <a:srgbClr val="1F2D5C"/>
+                </a:solidFill>
+                <a:latin typeface="Calibri"/>
+              </a:rPr>
+              <a:t>#3 – #5</a:t>
+            </a:r>
+          </a:p>
+        </p:txBody>
+      </p:sp>
+      <p:sp>
+        <p:nvSpPr>
+          <p:cNvPr id="19" name="TextBox 18"/>
+          <p:cNvSpPr txBox="1"/>
+          <p:nvPr/>
+        </p:nvSpPr>
+        <p:spPr>
+          <a:xfrm>
+            <a:off x="3931920" y="2560320"/>
+            <a:ext cx="1097280" cy="274320"/>
+          </a:xfrm>
+          <a:prstGeom prst="rect">
+            <a:avLst/>
+          </a:prstGeom>
+          <a:noFill/>
+        </p:spPr>
+        <p:txBody>
+          <a:bodyPr wrap="square" lIns="45720" rIns="45720">
+            <a:spAutoFit/>
+          </a:bodyPr>
+          <a:lstStyle/>
+          <a:p>
+            <a:pPr algn="l"/>
+            <a:r>
+              <a:rPr sz="1100" b="0">
+                <a:solidFill>
+                  <a:srgbClr val="1F2D5C"/>
+                </a:solidFill>
+                <a:latin typeface="Calibri"/>
+              </a:rPr>
+              <a:t>+ve</a:t>
+            </a:r>
+          </a:p>
+        </p:txBody>
+      </p:sp>
+      <p:sp>
+        <p:nvSpPr>
+          <p:cNvPr id="20" name="TextBox 19"/>
+          <p:cNvSpPr txBox="1"/>
+          <p:nvPr/>
+        </p:nvSpPr>
+        <p:spPr>
+          <a:xfrm>
+            <a:off x="5120640" y="2560320"/>
+            <a:ext cx="1280160" cy="274320"/>
+          </a:xfrm>
+          <a:prstGeom prst="rect">
+            <a:avLst/>
+          </a:prstGeom>
+          <a:noFill/>
+        </p:spPr>
+        <p:txBody>
+          <a:bodyPr wrap="square" lIns="45720" rIns="45720">
+            <a:spAutoFit/>
+          </a:bodyPr>
+          <a:lstStyle/>
+          <a:p>
+            <a:pPr algn="l"/>
+            <a:r>
+              <a:rPr sz="1100" b="0">
+                <a:solidFill>
+                  <a:srgbClr val="1F2D5C"/>
+                </a:solidFill>
+                <a:latin typeface="Calibri"/>
+              </a:rPr>
+              <a:t>Top 5</a:t>
+            </a:r>
+          </a:p>
+        </p:txBody>
+      </p:sp>
+      <p:sp>
+        <p:nvSpPr>
+          <p:cNvPr id="21" name="Rectangle 20"/>
+          <p:cNvSpPr/>
+          <p:nvPr/>
+        </p:nvSpPr>
+        <p:spPr>
+          <a:xfrm>
+            <a:off x="457200" y="2871215"/>
+            <a:ext cx="5669280" cy="365760"/>
+          </a:xfrm>
+          <a:prstGeom prst="rect">
+            <a:avLst/>
+          </a:prstGeom>
+          <a:solidFill>
+            <a:srgbClr val="F4F5F7"/>
+          </a:solidFill>
+          <a:ln>
+            <a:noFill/>
+          </a:ln>
+        </p:spPr>
+        <p:style>
+          <a:lnRef idx="1">
+            <a:schemeClr val="accent1"/>
+          </a:lnRef>
+          <a:fillRef idx="3">
+            <a:schemeClr val="accent1"/>
+          </a:fillRef>
+          <a:effectRef idx="2">
+            <a:schemeClr val="accent1"/>
+          </a:effectRef>
+          <a:fontRef idx="minor">
+            <a:schemeClr val="lt1"/>
+          </a:fontRef>
+        </p:style>
+        <p:txBody>
+          <a:bodyPr rtlCol="0" anchor="ctr"/>
+          <a:lstStyle/>
+          <a:p>
+            <a:pPr algn="ctr"/>
+          </a:p>
+        </p:txBody>
+      </p:sp>
+      <p:sp>
+        <p:nvSpPr>
+          <p:cNvPr id="22" name="TextBox 21"/>
+          <p:cNvSpPr txBox="1"/>
+          <p:nvPr/>
+        </p:nvSpPr>
+        <p:spPr>
+          <a:xfrm>
+            <a:off x="640080" y="2944367"/>
+            <a:ext cx="2194560" cy="274320"/>
+          </a:xfrm>
+          <a:prstGeom prst="rect">
+            <a:avLst/>
+          </a:prstGeom>
+          <a:noFill/>
+        </p:spPr>
+        <p:txBody>
+          <a:bodyPr wrap="square" lIns="45720" rIns="45720">
+            <a:spAutoFit/>
+          </a:bodyPr>
+          <a:lstStyle/>
+          <a:p>
+            <a:pPr algn="l"/>
+            <a:r>
+              <a:rPr sz="1100" b="0">
+                <a:solidFill>
+                  <a:srgbClr val="1F2D5C"/>
+                </a:solidFill>
+                <a:latin typeface="Calibri"/>
+              </a:rPr>
+              <a:t>Mobility count</a:t>
+            </a:r>
+          </a:p>
+        </p:txBody>
+      </p:sp>
+      <p:sp>
+        <p:nvSpPr>
+          <p:cNvPr id="23" name="TextBox 22"/>
+          <p:cNvSpPr txBox="1"/>
+          <p:nvPr/>
+        </p:nvSpPr>
+        <p:spPr>
+          <a:xfrm>
+            <a:off x="2880360" y="2944367"/>
+            <a:ext cx="960120" cy="274320"/>
+          </a:xfrm>
+          <a:prstGeom prst="rect">
+            <a:avLst/>
+          </a:prstGeom>
+          <a:noFill/>
+        </p:spPr>
+        <p:txBody>
+          <a:bodyPr wrap="square" lIns="45720" rIns="45720">
+            <a:spAutoFit/>
+          </a:bodyPr>
+          <a:lstStyle/>
+          <a:p>
+            <a:pPr algn="l"/>
+            <a:r>
+              <a:rPr sz="1100" b="0">
+                <a:solidFill>
+                  <a:srgbClr val="1F2D5C"/>
+                </a:solidFill>
+                <a:latin typeface="Calibri"/>
+              </a:rPr>
+              <a:t>#4 – #6</a:t>
+            </a:r>
+          </a:p>
+        </p:txBody>
+      </p:sp>
+      <p:sp>
+        <p:nvSpPr>
+          <p:cNvPr id="24" name="TextBox 23"/>
+          <p:cNvSpPr txBox="1"/>
+          <p:nvPr/>
+        </p:nvSpPr>
+        <p:spPr>
+          <a:xfrm>
+            <a:off x="3931920" y="2944367"/>
+            <a:ext cx="1097280" cy="274320"/>
+          </a:xfrm>
+          <a:prstGeom prst="rect">
+            <a:avLst/>
+          </a:prstGeom>
+          <a:noFill/>
+        </p:spPr>
+        <p:txBody>
+          <a:bodyPr wrap="square" lIns="45720" rIns="45720">
+            <a:spAutoFit/>
+          </a:bodyPr>
+          <a:lstStyle/>
+          <a:p>
+            <a:pPr algn="l"/>
+            <a:r>
+              <a:rPr sz="1100" b="0">
+                <a:solidFill>
+                  <a:srgbClr val="1F2D5C"/>
+                </a:solidFill>
+                <a:latin typeface="Calibri"/>
+              </a:rPr>
+              <a:t>−ve</a:t>
+            </a:r>
+          </a:p>
+        </p:txBody>
+      </p:sp>
+      <p:sp>
+        <p:nvSpPr>
+          <p:cNvPr id="25" name="TextBox 24"/>
+          <p:cNvSpPr txBox="1"/>
+          <p:nvPr/>
+        </p:nvSpPr>
+        <p:spPr>
+          <a:xfrm>
+            <a:off x="5120640" y="2944367"/>
+            <a:ext cx="1280160" cy="274320"/>
+          </a:xfrm>
+          <a:prstGeom prst="rect">
+            <a:avLst/>
+          </a:prstGeom>
+          <a:noFill/>
+        </p:spPr>
+        <p:txBody>
+          <a:bodyPr wrap="square" lIns="45720" rIns="45720">
+            <a:spAutoFit/>
+          </a:bodyPr>
+          <a:lstStyle/>
+          <a:p>
+            <a:pPr algn="l"/>
+            <a:r>
+              <a:rPr sz="1100" b="0">
+                <a:solidFill>
+                  <a:srgbClr val="1F2D5C"/>
+                </a:solidFill>
+                <a:latin typeface="Calibri"/>
+              </a:rPr>
+              <a:t>Top 5</a:t>
+            </a:r>
+          </a:p>
+        </p:txBody>
+      </p:sp>
+      <p:sp>
+        <p:nvSpPr>
+          <p:cNvPr id="26" name="Rectangle 25"/>
+          <p:cNvSpPr/>
+          <p:nvPr/>
+        </p:nvSpPr>
+        <p:spPr>
+          <a:xfrm>
+            <a:off x="457200" y="3255263"/>
+            <a:ext cx="5669280" cy="365760"/>
+          </a:xfrm>
+          <a:prstGeom prst="rect">
+            <a:avLst/>
+          </a:prstGeom>
+          <a:solidFill>
+            <a:srgbClr val="FFFFFF"/>
+          </a:solidFill>
+          <a:ln>
+            <a:noFill/>
+          </a:ln>
+        </p:spPr>
+        <p:style>
+          <a:lnRef idx="1">
+            <a:schemeClr val="accent1"/>
+          </a:lnRef>
+          <a:fillRef idx="3">
+            <a:schemeClr val="accent1"/>
+          </a:fillRef>
+          <a:effectRef idx="2">
+            <a:schemeClr val="accent1"/>
+          </a:effectRef>
+          <a:fontRef idx="minor">
+            <a:schemeClr val="lt1"/>
+          </a:fontRef>
+        </p:style>
+        <p:txBody>
+          <a:bodyPr rtlCol="0" anchor="ctr"/>
+          <a:lstStyle/>
+          <a:p>
+            <a:pPr algn="ctr"/>
+          </a:p>
+        </p:txBody>
+      </p:sp>
+      <p:sp>
+        <p:nvSpPr>
+          <p:cNvPr id="27" name="TextBox 26"/>
+          <p:cNvSpPr txBox="1"/>
+          <p:nvPr/>
+        </p:nvSpPr>
+        <p:spPr>
+          <a:xfrm>
+            <a:off x="640080" y="3328415"/>
+            <a:ext cx="2194560" cy="274320"/>
+          </a:xfrm>
+          <a:prstGeom prst="rect">
+            <a:avLst/>
+          </a:prstGeom>
+          <a:noFill/>
+        </p:spPr>
+        <p:txBody>
+          <a:bodyPr wrap="square" lIns="45720" rIns="45720">
+            <a:spAutoFit/>
+          </a:bodyPr>
+          <a:lstStyle/>
+          <a:p>
+            <a:pPr algn="l"/>
+            <a:r>
+              <a:rPr sz="1100" b="0">
+                <a:solidFill>
+                  <a:srgbClr val="1F2D5C"/>
+                </a:solidFill>
+                <a:latin typeface="Calibri"/>
+              </a:rPr>
+              <a:t>Financial diff.</a:t>
+            </a:r>
+          </a:p>
+        </p:txBody>
+      </p:sp>
+      <p:sp>
+        <p:nvSpPr>
+          <p:cNvPr id="28" name="TextBox 27"/>
+          <p:cNvSpPr txBox="1"/>
+          <p:nvPr/>
+        </p:nvSpPr>
+        <p:spPr>
+          <a:xfrm>
+            <a:off x="2880360" y="3328415"/>
+            <a:ext cx="960120" cy="274320"/>
+          </a:xfrm>
+          <a:prstGeom prst="rect">
+            <a:avLst/>
+          </a:prstGeom>
+          <a:noFill/>
+        </p:spPr>
+        <p:txBody>
+          <a:bodyPr wrap="square" lIns="45720" rIns="45720">
+            <a:spAutoFit/>
+          </a:bodyPr>
+          <a:lstStyle/>
+          <a:p>
+            <a:pPr algn="l"/>
+            <a:r>
+              <a:rPr sz="1100" b="0">
+                <a:solidFill>
+                  <a:srgbClr val="1F2D5C"/>
+                </a:solidFill>
+                <a:latin typeface="Calibri"/>
+              </a:rPr>
+              <a:t>#6 – #8</a:t>
+            </a:r>
+          </a:p>
+        </p:txBody>
+      </p:sp>
+      <p:sp>
+        <p:nvSpPr>
+          <p:cNvPr id="29" name="TextBox 28"/>
+          <p:cNvSpPr txBox="1"/>
+          <p:nvPr/>
+        </p:nvSpPr>
+        <p:spPr>
+          <a:xfrm>
+            <a:off x="3931920" y="3328415"/>
+            <a:ext cx="1097280" cy="274320"/>
+          </a:xfrm>
+          <a:prstGeom prst="rect">
+            <a:avLst/>
+          </a:prstGeom>
+          <a:noFill/>
+        </p:spPr>
+        <p:txBody>
+          <a:bodyPr wrap="square" lIns="45720" rIns="45720">
+            <a:spAutoFit/>
+          </a:bodyPr>
+          <a:lstStyle/>
+          <a:p>
+            <a:pPr algn="l"/>
+            <a:r>
+              <a:rPr sz="1100" b="0">
+                <a:solidFill>
+                  <a:srgbClr val="1F2D5C"/>
+                </a:solidFill>
+                <a:latin typeface="Calibri"/>
+              </a:rPr>
+              <a:t>+0.32</a:t>
+            </a:r>
+          </a:p>
+        </p:txBody>
+      </p:sp>
+      <p:sp>
+        <p:nvSpPr>
+          <p:cNvPr id="30" name="TextBox 29"/>
+          <p:cNvSpPr txBox="1"/>
+          <p:nvPr/>
+        </p:nvSpPr>
+        <p:spPr>
+          <a:xfrm>
+            <a:off x="5120640" y="3328415"/>
+            <a:ext cx="1280160" cy="274320"/>
+          </a:xfrm>
+          <a:prstGeom prst="rect">
+            <a:avLst/>
+          </a:prstGeom>
+          <a:noFill/>
+        </p:spPr>
+        <p:txBody>
+          <a:bodyPr wrap="square" lIns="45720" rIns="45720">
+            <a:spAutoFit/>
+          </a:bodyPr>
+          <a:lstStyle/>
+          <a:p>
+            <a:pPr algn="l"/>
+            <a:r>
+              <a:rPr sz="1100" b="0">
+                <a:solidFill>
+                  <a:srgbClr val="1F2D5C"/>
+                </a:solidFill>
+                <a:latin typeface="Calibri"/>
+              </a:rPr>
+              <a:t>Mid-tier</a:t>
+            </a:r>
+          </a:p>
+        </p:txBody>
+      </p:sp>
+      <p:sp>
+        <p:nvSpPr>
+          <p:cNvPr id="31" name="Rectangle 30"/>
+          <p:cNvSpPr/>
+          <p:nvPr/>
+        </p:nvSpPr>
+        <p:spPr>
+          <a:xfrm>
+            <a:off x="457200" y="3639311"/>
+            <a:ext cx="5669280" cy="365760"/>
+          </a:xfrm>
+          <a:prstGeom prst="rect">
+            <a:avLst/>
+          </a:prstGeom>
+          <a:solidFill>
+            <a:srgbClr val="F4F5F7"/>
+          </a:solidFill>
+          <a:ln>
+            <a:noFill/>
+          </a:ln>
+        </p:spPr>
+        <p:style>
+          <a:lnRef idx="1">
+            <a:schemeClr val="accent1"/>
+          </a:lnRef>
+          <a:fillRef idx="3">
+            <a:schemeClr val="accent1"/>
+          </a:fillRef>
+          <a:effectRef idx="2">
+            <a:schemeClr val="accent1"/>
+          </a:effectRef>
+          <a:fontRef idx="minor">
+            <a:schemeClr val="lt1"/>
+          </a:fontRef>
+        </p:style>
+        <p:txBody>
+          <a:bodyPr rtlCol="0" anchor="ctr"/>
+          <a:lstStyle/>
+          <a:p>
+            <a:pPr algn="ctr"/>
+          </a:p>
+        </p:txBody>
+      </p:sp>
+      <p:sp>
+        <p:nvSpPr>
+          <p:cNvPr id="32" name="TextBox 31"/>
+          <p:cNvSpPr txBox="1"/>
+          <p:nvPr/>
+        </p:nvSpPr>
+        <p:spPr>
+          <a:xfrm>
+            <a:off x="640080" y="3712463"/>
+            <a:ext cx="2194560" cy="274320"/>
+          </a:xfrm>
+          <a:prstGeom prst="rect">
+            <a:avLst/>
+          </a:prstGeom>
+          <a:noFill/>
+        </p:spPr>
+        <p:txBody>
+          <a:bodyPr wrap="square" lIns="45720" rIns="45720">
+            <a:spAutoFit/>
+          </a:bodyPr>
+          <a:lstStyle/>
+          <a:p>
+            <a:pPr algn="l"/>
+            <a:r>
+              <a:rPr sz="1100" b="0">
+                <a:solidFill>
+                  <a:srgbClr val="1F2D5C"/>
+                </a:solidFill>
+                <a:latin typeface="Calibri"/>
+              </a:rPr>
+              <a:t>Wealth (totwq5)</a:t>
+            </a:r>
+          </a:p>
+        </p:txBody>
+      </p:sp>
+      <p:sp>
+        <p:nvSpPr>
+          <p:cNvPr id="33" name="TextBox 32"/>
+          <p:cNvSpPr txBox="1"/>
+          <p:nvPr/>
+        </p:nvSpPr>
+        <p:spPr>
+          <a:xfrm>
+            <a:off x="2880360" y="3712463"/>
+            <a:ext cx="960120" cy="274320"/>
+          </a:xfrm>
+          <a:prstGeom prst="rect">
+            <a:avLst/>
+          </a:prstGeom>
+          <a:noFill/>
+        </p:spPr>
+        <p:txBody>
+          <a:bodyPr wrap="square" lIns="45720" rIns="45720">
+            <a:spAutoFit/>
+          </a:bodyPr>
+          <a:lstStyle/>
+          <a:p>
+            <a:pPr algn="l"/>
+            <a:r>
+              <a:rPr sz="1100" b="0">
+                <a:solidFill>
+                  <a:srgbClr val="1F2D5C"/>
+                </a:solidFill>
+                <a:latin typeface="Calibri"/>
+              </a:rPr>
+              <a:t>#8</a:t>
+            </a:r>
+          </a:p>
+        </p:txBody>
+      </p:sp>
+      <p:sp>
+        <p:nvSpPr>
+          <p:cNvPr id="34" name="TextBox 33"/>
+          <p:cNvSpPr txBox="1"/>
+          <p:nvPr/>
+        </p:nvSpPr>
+        <p:spPr>
+          <a:xfrm>
+            <a:off x="3931920" y="3712463"/>
+            <a:ext cx="1097280" cy="274320"/>
+          </a:xfrm>
+          <a:prstGeom prst="rect">
+            <a:avLst/>
+          </a:prstGeom>
+          <a:noFill/>
+        </p:spPr>
+        <p:txBody>
+          <a:bodyPr wrap="square" lIns="45720" rIns="45720">
+            <a:spAutoFit/>
+          </a:bodyPr>
+          <a:lstStyle/>
+          <a:p>
+            <a:pPr algn="l"/>
+            <a:r>
+              <a:rPr sz="1100" b="0">
+                <a:solidFill>
+                  <a:srgbClr val="1F2D5C"/>
+                </a:solidFill>
+                <a:latin typeface="Calibri"/>
+              </a:rPr>
+              <a:t>−0.34</a:t>
+            </a:r>
+          </a:p>
+        </p:txBody>
+      </p:sp>
+      <p:sp>
+        <p:nvSpPr>
+          <p:cNvPr id="35" name="TextBox 34"/>
+          <p:cNvSpPr txBox="1"/>
+          <p:nvPr/>
+        </p:nvSpPr>
+        <p:spPr>
+          <a:xfrm>
+            <a:off x="5120640" y="3712463"/>
+            <a:ext cx="1280160" cy="274320"/>
+          </a:xfrm>
+          <a:prstGeom prst="rect">
+            <a:avLst/>
+          </a:prstGeom>
+          <a:noFill/>
+        </p:spPr>
+        <p:txBody>
+          <a:bodyPr wrap="square" lIns="45720" rIns="45720">
+            <a:spAutoFit/>
+          </a:bodyPr>
+          <a:lstStyle/>
+          <a:p>
+            <a:pPr algn="l"/>
+            <a:r>
+              <a:rPr sz="1100" b="0">
+                <a:solidFill>
+                  <a:srgbClr val="1F2D5C"/>
+                </a:solidFill>
+                <a:latin typeface="Calibri"/>
+              </a:rPr>
+              <a:t>Mid-tier</a:t>
+            </a:r>
+          </a:p>
+        </p:txBody>
+      </p:sp>
+      <p:sp>
+        <p:nvSpPr>
+          <p:cNvPr id="36" name="Rectangle 35"/>
+          <p:cNvSpPr/>
+          <p:nvPr/>
+        </p:nvSpPr>
+        <p:spPr>
+          <a:xfrm>
+            <a:off x="457200" y="4023360"/>
+            <a:ext cx="5669280" cy="365760"/>
+          </a:xfrm>
+          <a:prstGeom prst="rect">
+            <a:avLst/>
+          </a:prstGeom>
+          <a:solidFill>
+            <a:srgbClr val="FFFFFF"/>
+          </a:solidFill>
+          <a:ln>
+            <a:noFill/>
+          </a:ln>
+        </p:spPr>
+        <p:style>
+          <a:lnRef idx="1">
+            <a:schemeClr val="accent1"/>
+          </a:lnRef>
+          <a:fillRef idx="3">
+            <a:schemeClr val="accent1"/>
+          </a:fillRef>
+          <a:effectRef idx="2">
+            <a:schemeClr val="accent1"/>
+          </a:effectRef>
+          <a:fontRef idx="minor">
+            <a:schemeClr val="lt1"/>
+          </a:fontRef>
+        </p:style>
+        <p:txBody>
+          <a:bodyPr rtlCol="0" anchor="ctr"/>
+          <a:lstStyle/>
+          <a:p>
+            <a:pPr algn="ctr"/>
+          </a:p>
+        </p:txBody>
+      </p:sp>
+      <p:sp>
+        <p:nvSpPr>
+          <p:cNvPr id="37" name="TextBox 36"/>
+          <p:cNvSpPr txBox="1"/>
+          <p:nvPr/>
+        </p:nvSpPr>
+        <p:spPr>
+          <a:xfrm>
+            <a:off x="640080" y="4096512"/>
+            <a:ext cx="2194560" cy="274320"/>
+          </a:xfrm>
+          <a:prstGeom prst="rect">
+            <a:avLst/>
+          </a:prstGeom>
+          <a:noFill/>
+        </p:spPr>
+        <p:txBody>
+          <a:bodyPr wrap="square" lIns="45720" rIns="45720">
+            <a:spAutoFit/>
+          </a:bodyPr>
+          <a:lstStyle/>
+          <a:p>
+            <a:pPr algn="l"/>
+            <a:r>
+              <a:rPr sz="1100" b="0">
+                <a:solidFill>
+                  <a:srgbClr val="1F2D5C"/>
+                </a:solidFill>
+                <a:latin typeface="Calibri"/>
+              </a:rPr>
+              <a:t>Sex (female)</a:t>
+            </a:r>
+          </a:p>
+        </p:txBody>
+      </p:sp>
+      <p:sp>
+        <p:nvSpPr>
+          <p:cNvPr id="38" name="TextBox 37"/>
+          <p:cNvSpPr txBox="1"/>
+          <p:nvPr/>
+        </p:nvSpPr>
+        <p:spPr>
+          <a:xfrm>
+            <a:off x="2880360" y="4096512"/>
+            <a:ext cx="960120" cy="274320"/>
+          </a:xfrm>
+          <a:prstGeom prst="rect">
+            <a:avLst/>
+          </a:prstGeom>
+          <a:noFill/>
+        </p:spPr>
+        <p:txBody>
+          <a:bodyPr wrap="square" lIns="45720" rIns="45720">
+            <a:spAutoFit/>
+          </a:bodyPr>
+          <a:lstStyle/>
+          <a:p>
+            <a:pPr algn="l"/>
+            <a:r>
+              <a:rPr sz="1100" b="0">
+                <a:solidFill>
+                  <a:srgbClr val="1F2D5C"/>
+                </a:solidFill>
+                <a:latin typeface="Calibri"/>
+              </a:rPr>
+              <a:t>#9 – #10</a:t>
+            </a:r>
+          </a:p>
+        </p:txBody>
+      </p:sp>
+      <p:sp>
+        <p:nvSpPr>
+          <p:cNvPr id="39" name="TextBox 38"/>
+          <p:cNvSpPr txBox="1"/>
+          <p:nvPr/>
+        </p:nvSpPr>
+        <p:spPr>
+          <a:xfrm>
+            <a:off x="3931920" y="4096512"/>
+            <a:ext cx="1097280" cy="274320"/>
+          </a:xfrm>
+          <a:prstGeom prst="rect">
+            <a:avLst/>
+          </a:prstGeom>
+          <a:noFill/>
+        </p:spPr>
+        <p:txBody>
+          <a:bodyPr wrap="square" lIns="45720" rIns="45720">
+            <a:spAutoFit/>
+          </a:bodyPr>
+          <a:lstStyle/>
+          <a:p>
+            <a:pPr algn="l"/>
+            <a:r>
+              <a:rPr sz="1100" b="0">
+                <a:solidFill>
+                  <a:srgbClr val="1F2D5C"/>
+                </a:solidFill>
+                <a:latin typeface="Calibri"/>
+              </a:rPr>
+              <a:t>+0.27</a:t>
+            </a:r>
+          </a:p>
+        </p:txBody>
+      </p:sp>
+      <p:sp>
+        <p:nvSpPr>
+          <p:cNvPr id="40" name="TextBox 39"/>
+          <p:cNvSpPr txBox="1"/>
+          <p:nvPr/>
+        </p:nvSpPr>
+        <p:spPr>
+          <a:xfrm>
+            <a:off x="5120640" y="4096512"/>
+            <a:ext cx="1280160" cy="274320"/>
+          </a:xfrm>
+          <a:prstGeom prst="rect">
+            <a:avLst/>
+          </a:prstGeom>
+          <a:noFill/>
+        </p:spPr>
+        <p:txBody>
+          <a:bodyPr wrap="square" lIns="45720" rIns="45720">
+            <a:spAutoFit/>
+          </a:bodyPr>
+          <a:lstStyle/>
+          <a:p>
+            <a:pPr algn="l"/>
+            <a:r>
+              <a:rPr sz="1100" b="0">
+                <a:solidFill>
+                  <a:srgbClr val="1F2D5C"/>
+                </a:solidFill>
+                <a:latin typeface="Calibri"/>
+              </a:rPr>
+              <a:t>Mid-tier</a:t>
+            </a:r>
+          </a:p>
+        </p:txBody>
+      </p:sp>
+      <p:sp>
+        <p:nvSpPr>
+          <p:cNvPr id="41" name="TextBox 40"/>
+          <p:cNvSpPr txBox="1"/>
+          <p:nvPr/>
+        </p:nvSpPr>
+        <p:spPr>
+          <a:xfrm>
+            <a:off x="457200" y="4617720"/>
+            <a:ext cx="5669280" cy="365760"/>
+          </a:xfrm>
+          <a:prstGeom prst="rect">
+            <a:avLst/>
+          </a:prstGeom>
+          <a:noFill/>
+        </p:spPr>
+        <p:txBody>
+          <a:bodyPr wrap="square" lIns="45720" rIns="45720">
+            <a:spAutoFit/>
+          </a:bodyPr>
+          <a:lstStyle/>
+          <a:p>
+            <a:pPr algn="l"/>
+            <a:r>
               <a:rPr sz="1200" b="1">
                 <a:solidFill>
-                  <a:srgbClr val="1F2D5C"/>
-                </a:solidFill>
-                <a:latin typeface="Calibri"/>
-              </a:rPr>
-              <a:t>Transparency</a:t>
-            </a:r>
-          </a:p>
-        </p:txBody>
-      </p:sp>
-      <p:sp>
-        <p:nvSpPr>
-          <p:cNvPr id="11" name="TextBox 10"/>
-          <p:cNvSpPr txBox="1"/>
-          <p:nvPr/>
-        </p:nvSpPr>
-        <p:spPr>
-          <a:xfrm>
-            <a:off x="640080" y="5916168"/>
-            <a:ext cx="10972800" cy="457200"/>
+                  <a:srgbClr val="E56B5C"/>
+                </a:solidFill>
+                <a:latin typeface="Calibri"/>
+              </a:rPr>
+              <a:t>Three independent methods. Same ranking.</a:t>
+            </a:r>
+          </a:p>
+        </p:txBody>
+      </p:sp>
+      <p:sp>
+        <p:nvSpPr>
+          <p:cNvPr id="42" name="TextBox 41"/>
+          <p:cNvSpPr txBox="1"/>
+          <p:nvPr/>
+        </p:nvSpPr>
+        <p:spPr>
+          <a:xfrm>
+            <a:off x="6400800" y="1280160"/>
+            <a:ext cx="5486400" cy="365760"/>
           </a:xfrm>
           <a:prstGeom prst="rect">
             <a:avLst/>
@@ -4500,20 +5400,755 @@
           <a:p>
             <a:pPr algn="l"/>
             <a:r>
+              <a:rPr sz="1600" b="1">
+                <a:solidFill>
+                  <a:srgbClr val="E0A32A"/>
+                </a:solidFill>
+                <a:latin typeface="Calibri"/>
+              </a:rPr>
+              <a:t>Leave-one-domain-out AUC drop</a:t>
+            </a:r>
+          </a:p>
+        </p:txBody>
+      </p:sp>
+      <p:sp>
+        <p:nvSpPr>
+          <p:cNvPr id="43" name="Rectangle 42"/>
+          <p:cNvSpPr/>
+          <p:nvPr/>
+        </p:nvSpPr>
+        <p:spPr>
+          <a:xfrm>
+            <a:off x="6400800" y="1691640"/>
+            <a:ext cx="5486400" cy="320040"/>
+          </a:xfrm>
+          <a:prstGeom prst="rect">
+            <a:avLst/>
+          </a:prstGeom>
+          <a:solidFill>
+            <a:srgbClr val="F4F5F7"/>
+          </a:solidFill>
+          <a:ln>
+            <a:noFill/>
+          </a:ln>
+        </p:spPr>
+        <p:style>
+          <a:lnRef idx="1">
+            <a:schemeClr val="accent1"/>
+          </a:lnRef>
+          <a:fillRef idx="3">
+            <a:schemeClr val="accent1"/>
+          </a:fillRef>
+          <a:effectRef idx="2">
+            <a:schemeClr val="accent1"/>
+          </a:effectRef>
+          <a:fontRef idx="minor">
+            <a:schemeClr val="lt1"/>
+          </a:fontRef>
+        </p:style>
+        <p:txBody>
+          <a:bodyPr rtlCol="0" anchor="ctr"/>
+          <a:lstStyle/>
+          <a:p>
+            <a:pPr algn="ctr"/>
+          </a:p>
+        </p:txBody>
+      </p:sp>
+      <p:sp>
+        <p:nvSpPr>
+          <p:cNvPr id="44" name="TextBox 43"/>
+          <p:cNvSpPr txBox="1"/>
+          <p:nvPr/>
+        </p:nvSpPr>
+        <p:spPr>
+          <a:xfrm>
+            <a:off x="6446520" y="1737360"/>
+            <a:ext cx="3840480" cy="274320"/>
+          </a:xfrm>
+          <a:prstGeom prst="rect">
+            <a:avLst/>
+          </a:prstGeom>
+          <a:noFill/>
+        </p:spPr>
+        <p:txBody>
+          <a:bodyPr wrap="square" lIns="45720" rIns="45720">
+            <a:spAutoFit/>
+          </a:bodyPr>
+          <a:lstStyle/>
+          <a:p>
+            <a:pPr algn="l"/>
+            <a:r>
+              <a:rPr sz="1200" b="1">
+                <a:solidFill>
+                  <a:srgbClr val="E56B5C"/>
+                </a:solidFill>
+                <a:latin typeface="Calibri"/>
+              </a:rPr>
+              <a:t>Prior depression</a:t>
+            </a:r>
+          </a:p>
+        </p:txBody>
+      </p:sp>
+      <p:sp>
+        <p:nvSpPr>
+          <p:cNvPr id="45" name="TextBox 44"/>
+          <p:cNvSpPr txBox="1"/>
+          <p:nvPr/>
+        </p:nvSpPr>
+        <p:spPr>
+          <a:xfrm>
+            <a:off x="10332720" y="1737360"/>
+            <a:ext cx="1463040" cy="274320"/>
+          </a:xfrm>
+          <a:prstGeom prst="rect">
+            <a:avLst/>
+          </a:prstGeom>
+          <a:noFill/>
+        </p:spPr>
+        <p:txBody>
+          <a:bodyPr wrap="square" lIns="45720" rIns="45720">
+            <a:spAutoFit/>
+          </a:bodyPr>
+          <a:lstStyle/>
+          <a:p>
+            <a:pPr algn="r"/>
+            <a:r>
+              <a:rPr sz="1200" b="1">
+                <a:solidFill>
+                  <a:srgbClr val="E56B5C"/>
+                </a:solidFill>
+                <a:latin typeface="Calibri"/>
+              </a:rPr>
+              <a:t>−0.077</a:t>
+            </a:r>
+          </a:p>
+        </p:txBody>
+      </p:sp>
+      <p:sp>
+        <p:nvSpPr>
+          <p:cNvPr id="46" name="TextBox 45"/>
+          <p:cNvSpPr txBox="1"/>
+          <p:nvPr/>
+        </p:nvSpPr>
+        <p:spPr>
+          <a:xfrm>
+            <a:off x="6446520" y="2066544"/>
+            <a:ext cx="3840480" cy="274320"/>
+          </a:xfrm>
+          <a:prstGeom prst="rect">
+            <a:avLst/>
+          </a:prstGeom>
+          <a:noFill/>
+        </p:spPr>
+        <p:txBody>
+          <a:bodyPr wrap="square" lIns="45720" rIns="45720">
+            <a:spAutoFit/>
+          </a:bodyPr>
+          <a:lstStyle/>
+          <a:p>
+            <a:pPr algn="l"/>
+            <a:r>
               <a:rPr sz="1200" b="0">
                 <a:solidFill>
                   <a:srgbClr val="555C66"/>
                 </a:solidFill>
                 <a:latin typeface="Calibri"/>
               </a:rPr>
-              <a:t>These limitations were noted explicitly in the GitHub PR review process and accepted as documented constraints, not silent gaps.</a:t>
-            </a:r>
-          </a:p>
-        </p:txBody>
-      </p:sp>
-      <p:sp>
-        <p:nvSpPr>
-          <p:cNvPr id="12" name="TextBox 11"/>
+              <a:t>Self-rated health</a:t>
+            </a:r>
+          </a:p>
+        </p:txBody>
+      </p:sp>
+      <p:sp>
+        <p:nvSpPr>
+          <p:cNvPr id="47" name="TextBox 46"/>
+          <p:cNvSpPr txBox="1"/>
+          <p:nvPr/>
+        </p:nvSpPr>
+        <p:spPr>
+          <a:xfrm>
+            <a:off x="10332720" y="2066544"/>
+            <a:ext cx="1463040" cy="274320"/>
+          </a:xfrm>
+          <a:prstGeom prst="rect">
+            <a:avLst/>
+          </a:prstGeom>
+          <a:noFill/>
+        </p:spPr>
+        <p:txBody>
+          <a:bodyPr wrap="square" lIns="45720" rIns="45720">
+            <a:spAutoFit/>
+          </a:bodyPr>
+          <a:lstStyle/>
+          <a:p>
+            <a:pPr algn="r"/>
+            <a:r>
+              <a:rPr sz="1200" b="0">
+                <a:solidFill>
+                  <a:srgbClr val="555C66"/>
+                </a:solidFill>
+                <a:latin typeface="Calibri"/>
+              </a:rPr>
+              <a:t>−0.005</a:t>
+            </a:r>
+          </a:p>
+        </p:txBody>
+      </p:sp>
+      <p:sp>
+        <p:nvSpPr>
+          <p:cNvPr id="48" name="TextBox 47"/>
+          <p:cNvSpPr txBox="1"/>
+          <p:nvPr/>
+        </p:nvSpPr>
+        <p:spPr>
+          <a:xfrm>
+            <a:off x="6446520" y="2395728"/>
+            <a:ext cx="3840480" cy="274320"/>
+          </a:xfrm>
+          <a:prstGeom prst="rect">
+            <a:avLst/>
+          </a:prstGeom>
+          <a:noFill/>
+        </p:spPr>
+        <p:txBody>
+          <a:bodyPr wrap="square" lIns="45720" rIns="45720">
+            <a:spAutoFit/>
+          </a:bodyPr>
+          <a:lstStyle/>
+          <a:p>
+            <a:pPr algn="l"/>
+            <a:r>
+              <a:rPr sz="1200" b="0">
+                <a:solidFill>
+                  <a:srgbClr val="555C66"/>
+                </a:solidFill>
+                <a:latin typeface="Calibri"/>
+              </a:rPr>
+              <a:t>Chronic conditions</a:t>
+            </a:r>
+          </a:p>
+        </p:txBody>
+      </p:sp>
+      <p:sp>
+        <p:nvSpPr>
+          <p:cNvPr id="49" name="TextBox 48"/>
+          <p:cNvSpPr txBox="1"/>
+          <p:nvPr/>
+        </p:nvSpPr>
+        <p:spPr>
+          <a:xfrm>
+            <a:off x="10332720" y="2395728"/>
+            <a:ext cx="1463040" cy="274320"/>
+          </a:xfrm>
+          <a:prstGeom prst="rect">
+            <a:avLst/>
+          </a:prstGeom>
+          <a:noFill/>
+        </p:spPr>
+        <p:txBody>
+          <a:bodyPr wrap="square" lIns="45720" rIns="45720">
+            <a:spAutoFit/>
+          </a:bodyPr>
+          <a:lstStyle/>
+          <a:p>
+            <a:pPr algn="r"/>
+            <a:r>
+              <a:rPr sz="1200" b="0">
+                <a:solidFill>
+                  <a:srgbClr val="555C66"/>
+                </a:solidFill>
+                <a:latin typeface="Calibri"/>
+              </a:rPr>
+              <a:t>≈0.000</a:t>
+            </a:r>
+          </a:p>
+        </p:txBody>
+      </p:sp>
+      <p:sp>
+        <p:nvSpPr>
+          <p:cNvPr id="50" name="TextBox 49"/>
+          <p:cNvSpPr txBox="1"/>
+          <p:nvPr/>
+        </p:nvSpPr>
+        <p:spPr>
+          <a:xfrm>
+            <a:off x="6446520" y="2724912"/>
+            <a:ext cx="3840480" cy="274320"/>
+          </a:xfrm>
+          <a:prstGeom prst="rect">
+            <a:avLst/>
+          </a:prstGeom>
+          <a:noFill/>
+        </p:spPr>
+        <p:txBody>
+          <a:bodyPr wrap="square" lIns="45720" rIns="45720">
+            <a:spAutoFit/>
+          </a:bodyPr>
+          <a:lstStyle/>
+          <a:p>
+            <a:pPr algn="l"/>
+            <a:r>
+              <a:rPr sz="1200" b="0">
+                <a:solidFill>
+                  <a:srgbClr val="555C66"/>
+                </a:solidFill>
+                <a:latin typeface="Calibri"/>
+              </a:rPr>
+              <a:t>Mobility / function</a:t>
+            </a:r>
+          </a:p>
+        </p:txBody>
+      </p:sp>
+      <p:sp>
+        <p:nvSpPr>
+          <p:cNvPr id="51" name="TextBox 50"/>
+          <p:cNvSpPr txBox="1"/>
+          <p:nvPr/>
+        </p:nvSpPr>
+        <p:spPr>
+          <a:xfrm>
+            <a:off x="10332720" y="2724912"/>
+            <a:ext cx="1463040" cy="274320"/>
+          </a:xfrm>
+          <a:prstGeom prst="rect">
+            <a:avLst/>
+          </a:prstGeom>
+          <a:noFill/>
+        </p:spPr>
+        <p:txBody>
+          <a:bodyPr wrap="square" lIns="45720" rIns="45720">
+            <a:spAutoFit/>
+          </a:bodyPr>
+          <a:lstStyle/>
+          <a:p>
+            <a:pPr algn="r"/>
+            <a:r>
+              <a:rPr sz="1200" b="0">
+                <a:solidFill>
+                  <a:srgbClr val="555C66"/>
+                </a:solidFill>
+                <a:latin typeface="Calibri"/>
+              </a:rPr>
+              <a:t>≈0.000</a:t>
+            </a:r>
+          </a:p>
+        </p:txBody>
+      </p:sp>
+      <p:sp>
+        <p:nvSpPr>
+          <p:cNvPr id="52" name="TextBox 51"/>
+          <p:cNvSpPr txBox="1"/>
+          <p:nvPr/>
+        </p:nvSpPr>
+        <p:spPr>
+          <a:xfrm>
+            <a:off x="6446520" y="3054096"/>
+            <a:ext cx="3840480" cy="274320"/>
+          </a:xfrm>
+          <a:prstGeom prst="rect">
+            <a:avLst/>
+          </a:prstGeom>
+          <a:noFill/>
+        </p:spPr>
+        <p:txBody>
+          <a:bodyPr wrap="square" lIns="45720" rIns="45720">
+            <a:spAutoFit/>
+          </a:bodyPr>
+          <a:lstStyle/>
+          <a:p>
+            <a:pPr algn="l"/>
+            <a:r>
+              <a:rPr sz="1200" b="0">
+                <a:solidFill>
+                  <a:srgbClr val="555C66"/>
+                </a:solidFill>
+                <a:latin typeface="Calibri"/>
+              </a:rPr>
+              <a:t>Cognition</a:t>
+            </a:r>
+          </a:p>
+        </p:txBody>
+      </p:sp>
+      <p:sp>
+        <p:nvSpPr>
+          <p:cNvPr id="53" name="TextBox 52"/>
+          <p:cNvSpPr txBox="1"/>
+          <p:nvPr/>
+        </p:nvSpPr>
+        <p:spPr>
+          <a:xfrm>
+            <a:off x="10332720" y="3054096"/>
+            <a:ext cx="1463040" cy="274320"/>
+          </a:xfrm>
+          <a:prstGeom prst="rect">
+            <a:avLst/>
+          </a:prstGeom>
+          <a:noFill/>
+        </p:spPr>
+        <p:txBody>
+          <a:bodyPr wrap="square" lIns="45720" rIns="45720">
+            <a:spAutoFit/>
+          </a:bodyPr>
+          <a:lstStyle/>
+          <a:p>
+            <a:pPr algn="r"/>
+            <a:r>
+              <a:rPr sz="1200" b="0">
+                <a:solidFill>
+                  <a:srgbClr val="555C66"/>
+                </a:solidFill>
+                <a:latin typeface="Calibri"/>
+              </a:rPr>
+              <a:t>≈0.000</a:t>
+            </a:r>
+          </a:p>
+        </p:txBody>
+      </p:sp>
+      <p:sp>
+        <p:nvSpPr>
+          <p:cNvPr id="54" name="TextBox 53"/>
+          <p:cNvSpPr txBox="1"/>
+          <p:nvPr/>
+        </p:nvSpPr>
+        <p:spPr>
+          <a:xfrm>
+            <a:off x="6446520" y="3383279"/>
+            <a:ext cx="3840480" cy="274320"/>
+          </a:xfrm>
+          <a:prstGeom prst="rect">
+            <a:avLst/>
+          </a:prstGeom>
+          <a:noFill/>
+        </p:spPr>
+        <p:txBody>
+          <a:bodyPr wrap="square" lIns="45720" rIns="45720">
+            <a:spAutoFit/>
+          </a:bodyPr>
+          <a:lstStyle/>
+          <a:p>
+            <a:pPr algn="l"/>
+            <a:r>
+              <a:rPr sz="1200" b="0">
+                <a:solidFill>
+                  <a:srgbClr val="555C66"/>
+                </a:solidFill>
+                <a:latin typeface="Calibri"/>
+              </a:rPr>
+              <a:t>Socioeconomic</a:t>
+            </a:r>
+          </a:p>
+        </p:txBody>
+      </p:sp>
+      <p:sp>
+        <p:nvSpPr>
+          <p:cNvPr id="55" name="TextBox 54"/>
+          <p:cNvSpPr txBox="1"/>
+          <p:nvPr/>
+        </p:nvSpPr>
+        <p:spPr>
+          <a:xfrm>
+            <a:off x="10332720" y="3383279"/>
+            <a:ext cx="1463040" cy="274320"/>
+          </a:xfrm>
+          <a:prstGeom prst="rect">
+            <a:avLst/>
+          </a:prstGeom>
+          <a:noFill/>
+        </p:spPr>
+        <p:txBody>
+          <a:bodyPr wrap="square" lIns="45720" rIns="45720">
+            <a:spAutoFit/>
+          </a:bodyPr>
+          <a:lstStyle/>
+          <a:p>
+            <a:pPr algn="r"/>
+            <a:r>
+              <a:rPr sz="1200" b="0">
+                <a:solidFill>
+                  <a:srgbClr val="555C66"/>
+                </a:solidFill>
+                <a:latin typeface="Calibri"/>
+              </a:rPr>
+              <a:t>≈0.000</a:t>
+            </a:r>
+          </a:p>
+        </p:txBody>
+      </p:sp>
+      <p:sp>
+        <p:nvSpPr>
+          <p:cNvPr id="56" name="TextBox 55"/>
+          <p:cNvSpPr txBox="1"/>
+          <p:nvPr/>
+        </p:nvSpPr>
+        <p:spPr>
+          <a:xfrm>
+            <a:off x="6446520" y="3712464"/>
+            <a:ext cx="3840480" cy="274320"/>
+          </a:xfrm>
+          <a:prstGeom prst="rect">
+            <a:avLst/>
+          </a:prstGeom>
+          <a:noFill/>
+        </p:spPr>
+        <p:txBody>
+          <a:bodyPr wrap="square" lIns="45720" rIns="45720">
+            <a:spAutoFit/>
+          </a:bodyPr>
+          <a:lstStyle/>
+          <a:p>
+            <a:pPr algn="l"/>
+            <a:r>
+              <a:rPr sz="1200" b="0">
+                <a:solidFill>
+                  <a:srgbClr val="555C66"/>
+                </a:solidFill>
+                <a:latin typeface="Calibri"/>
+              </a:rPr>
+              <a:t>Lifestyle / digital</a:t>
+            </a:r>
+          </a:p>
+        </p:txBody>
+      </p:sp>
+      <p:sp>
+        <p:nvSpPr>
+          <p:cNvPr id="57" name="TextBox 56"/>
+          <p:cNvSpPr txBox="1"/>
+          <p:nvPr/>
+        </p:nvSpPr>
+        <p:spPr>
+          <a:xfrm>
+            <a:off x="10332720" y="3712464"/>
+            <a:ext cx="1463040" cy="274320"/>
+          </a:xfrm>
+          <a:prstGeom prst="rect">
+            <a:avLst/>
+          </a:prstGeom>
+          <a:noFill/>
+        </p:spPr>
+        <p:txBody>
+          <a:bodyPr wrap="square" lIns="45720" rIns="45720">
+            <a:spAutoFit/>
+          </a:bodyPr>
+          <a:lstStyle/>
+          <a:p>
+            <a:pPr algn="r"/>
+            <a:r>
+              <a:rPr sz="1200" b="0">
+                <a:solidFill>
+                  <a:srgbClr val="555C66"/>
+                </a:solidFill>
+                <a:latin typeface="Calibri"/>
+              </a:rPr>
+              <a:t>≈0.000</a:t>
+            </a:r>
+          </a:p>
+        </p:txBody>
+      </p:sp>
+      <p:sp>
+        <p:nvSpPr>
+          <p:cNvPr id="58" name="TextBox 57"/>
+          <p:cNvSpPr txBox="1"/>
+          <p:nvPr/>
+        </p:nvSpPr>
+        <p:spPr>
+          <a:xfrm>
+            <a:off x="6400800" y="4114800"/>
+            <a:ext cx="5486400" cy="365760"/>
+          </a:xfrm>
+          <a:prstGeom prst="rect">
+            <a:avLst/>
+          </a:prstGeom>
+          <a:noFill/>
+        </p:spPr>
+        <p:txBody>
+          <a:bodyPr wrap="square" lIns="45720" rIns="45720">
+            <a:spAutoFit/>
+          </a:bodyPr>
+          <a:lstStyle/>
+          <a:p>
+            <a:pPr algn="l"/>
+            <a:r>
+              <a:rPr sz="1200" b="1">
+                <a:solidFill>
+                  <a:srgbClr val="1F2D5C"/>
+                </a:solidFill>
+                <a:latin typeface="Calibri"/>
+              </a:rPr>
+              <a:t>Why near-zero for everything else?</a:t>
+            </a:r>
+          </a:p>
+        </p:txBody>
+      </p:sp>
+      <p:sp>
+        <p:nvSpPr>
+          <p:cNvPr id="59" name="TextBox 58"/>
+          <p:cNvSpPr txBox="1"/>
+          <p:nvPr/>
+        </p:nvSpPr>
+        <p:spPr>
+          <a:xfrm>
+            <a:off x="6400800" y="4434840"/>
+            <a:ext cx="5486400" cy="1097280"/>
+          </a:xfrm>
+          <a:prstGeom prst="rect">
+            <a:avLst/>
+          </a:prstGeom>
+          <a:noFill/>
+        </p:spPr>
+        <p:txBody>
+          <a:bodyPr wrap="square">
+            <a:spAutoFit/>
+          </a:bodyPr>
+          <a:lstStyle/>
+          <a:p>
+            <a:pPr algn="l">
+              <a:spcAft>
+                <a:spcPts val="300"/>
+              </a:spcAft>
+            </a:pPr>
+            <a:r>
+              <a:rPr sz="1100" b="0">
+                <a:solidFill>
+                  <a:srgbClr val="1F2D5C"/>
+                </a:solidFill>
+                <a:latin typeface="Calibri"/>
+              </a:rPr>
+              <a:t>Health, mobility, finance share </a:t>
+            </a:r>
+            <a:r>
+              <a:rPr sz="1100" b="1">
+                <a:solidFill>
+                  <a:srgbClr val="1F2D5C"/>
+                </a:solidFill>
+                <a:latin typeface="Calibri"/>
+              </a:rPr>
+              <a:t>|r| ≈ 0.4–0.5</a:t>
+            </a:r>
+          </a:p>
+          <a:p>
+            <a:pPr algn="l">
+              <a:spcAft>
+                <a:spcPts val="300"/>
+              </a:spcAft>
+            </a:pPr>
+            <a:r>
+              <a:rPr sz="1100">
+                <a:solidFill>
+                  <a:srgbClr val="1F2D5C"/>
+                </a:solidFill>
+                <a:latin typeface="Calibri"/>
+              </a:rPr>
+              <a:t>• Remove one domain  →  model reconstructs from neighbours</a:t>
+            </a:r>
+          </a:p>
+          <a:p>
+            <a:pPr algn="l">
+              <a:spcAft>
+                <a:spcPts val="300"/>
+              </a:spcAft>
+            </a:pPr>
+            <a:r>
+              <a:rPr sz="1100" b="0">
+                <a:solidFill>
+                  <a:srgbClr val="1F2D5C"/>
+                </a:solidFill>
+                <a:latin typeface="Calibri"/>
+              </a:rPr>
+              <a:t>Signal is </a:t>
+            </a:r>
+            <a:r>
+              <a:rPr sz="1100" b="1">
+                <a:solidFill>
+                  <a:srgbClr val="1F2D5C"/>
+                </a:solidFill>
+                <a:latin typeface="Calibri"/>
+              </a:rPr>
+              <a:t>robust, not redundant</a:t>
+            </a:r>
+          </a:p>
+        </p:txBody>
+      </p:sp>
+      <p:sp>
+        <p:nvSpPr>
+          <p:cNvPr id="60" name="Rectangle 59"/>
+          <p:cNvSpPr/>
+          <p:nvPr/>
+        </p:nvSpPr>
+        <p:spPr>
+          <a:xfrm>
+            <a:off x="457200" y="5943600"/>
+            <a:ext cx="11247120" cy="457200"/>
+          </a:xfrm>
+          <a:prstGeom prst="rect">
+            <a:avLst/>
+          </a:prstGeom>
+          <a:solidFill>
+            <a:srgbClr val="1F2D5C"/>
+          </a:solidFill>
+          <a:ln>
+            <a:noFill/>
+          </a:ln>
+        </p:spPr>
+        <p:style>
+          <a:lnRef idx="1">
+            <a:schemeClr val="accent1"/>
+          </a:lnRef>
+          <a:fillRef idx="3">
+            <a:schemeClr val="accent1"/>
+          </a:fillRef>
+          <a:effectRef idx="2">
+            <a:schemeClr val="accent1"/>
+          </a:effectRef>
+          <a:fontRef idx="minor">
+            <a:schemeClr val="lt1"/>
+          </a:fontRef>
+        </p:style>
+        <p:txBody>
+          <a:bodyPr rtlCol="0" anchor="ctr"/>
+          <a:lstStyle/>
+          <a:p>
+            <a:pPr algn="ctr"/>
+          </a:p>
+        </p:txBody>
+      </p:sp>
+      <p:sp>
+        <p:nvSpPr>
+          <p:cNvPr id="61" name="TextBox 60"/>
+          <p:cNvSpPr txBox="1"/>
+          <p:nvPr/>
+        </p:nvSpPr>
+        <p:spPr>
+          <a:xfrm>
+            <a:off x="640080" y="5989320"/>
+            <a:ext cx="10972800" cy="411480"/>
+          </a:xfrm>
+          <a:prstGeom prst="rect">
+            <a:avLst/>
+          </a:prstGeom>
+          <a:noFill/>
+        </p:spPr>
+        <p:txBody>
+          <a:bodyPr wrap="square" lIns="45720" rIns="45720">
+            <a:spAutoFit/>
+          </a:bodyPr>
+          <a:lstStyle/>
+          <a:p>
+            <a:pPr algn="l"/>
+            <a:r>
+              <a:rPr sz="1200" b="1">
+                <a:solidFill>
+                  <a:srgbClr val="FFFFFF"/>
+                </a:solidFill>
+                <a:latin typeface="Calibri"/>
+              </a:rPr>
+              <a:t>RQ3 holds: the same biopsychosocial predictors emerge under SHAP, LR coefficients, LGBM gain, and ablation — the finding is not a SHAP artefact.</a:t>
+            </a:r>
+          </a:p>
+        </p:txBody>
+      </p:sp>
+      <p:sp>
+        <p:nvSpPr>
+          <p:cNvPr id="62" name="TextBox 61"/>
           <p:cNvSpPr txBox="1"/>
           <p:nvPr/>
         </p:nvSpPr>
@@ -4548,7 +6183,7 @@
       </p:sp>
       <p:sp>
         <p:nvSpPr>
-          <p:cNvPr id="13" name="TextBox 12"/>
+          <p:cNvPr id="63" name="TextBox 62"/>
           <p:cNvSpPr txBox="1"/>
           <p:nvPr/>
         </p:nvSpPr>
@@ -4576,7 +6211,7 @@
                 </a:solidFill>
                 <a:latin typeface="Calibri"/>
               </a:rPr>
-              <a:t>11 / 12</a:t>
+              <a:t>11 / 14</a:t>
             </a:r>
           </a:p>
         </p:txBody>
@@ -4672,7 +6307,7 @@
                 </a:solidFill>
                 <a:latin typeface="Calibri"/>
               </a:rPr>
-              <a:t>Future Directions and Conclusion</a:t>
+              <a:t>Beyond Depression History</a:t>
             </a:r>
           </a:p>
         </p:txBody>
@@ -4707,21 +6342,45 @@
                 </a:solidFill>
                 <a:latin typeface="Calibri"/>
               </a:rPr>
-              <a:t>From a coursework prototype to a clinical research roadmap</a:t>
-            </a:r>
-          </a:p>
-        </p:txBody>
-      </p:sp>
-      <p:sp>
-        <p:nvSpPr>
-          <p:cNvPr id="5" name="TextBox 4"/>
-          <p:cNvSpPr txBox="1"/>
-          <p:nvPr/>
-        </p:nvSpPr>
+              <a:t>Even without prior CES-D, the model still predicts well</a:t>
+            </a:r>
+          </a:p>
+        </p:txBody>
+      </p:sp>
+      <p:pic>
+        <p:nvPicPr>
+          <p:cNvPr id="5" name="Picture 4" descr="leakage_sensitivity.png"/>
+          <p:cNvPicPr>
+            <a:picLocks noChangeAspect="1"/>
+          </p:cNvPicPr>
+          <p:nvPr/>
+        </p:nvPicPr>
+        <p:blipFill>
+          <a:blip r:embed="rId2"/>
+          <a:stretch>
+            <a:fillRect/>
+          </a:stretch>
+        </p:blipFill>
         <p:spPr>
           <a:xfrm>
             <a:off x="457200" y="1280160"/>
-            <a:ext cx="5669280" cy="365760"/>
+            <a:ext cx="9179859" cy="3657600"/>
+          </a:xfrm>
+          <a:prstGeom prst="rect">
+            <a:avLst/>
+          </a:prstGeom>
+        </p:spPr>
+      </p:pic>
+      <p:sp>
+        <p:nvSpPr>
+          <p:cNvPr id="6" name="TextBox 5"/>
+          <p:cNvSpPr txBox="1"/>
+          <p:nvPr/>
+        </p:nvSpPr>
+        <p:spPr>
+          <a:xfrm>
+            <a:off x="6858000" y="1280160"/>
+            <a:ext cx="5120640" cy="365760"/>
           </a:xfrm>
           <a:prstGeom prst="rect">
             <a:avLst/>
@@ -4742,21 +6401,21 @@
                 </a:solidFill>
                 <a:latin typeface="Calibri"/>
               </a:rPr>
-              <a:t>Future directions</a:t>
-            </a:r>
-          </a:p>
-        </p:txBody>
-      </p:sp>
-      <p:sp>
-        <p:nvSpPr>
-          <p:cNvPr id="6" name="TextBox 5"/>
-          <p:cNvSpPr txBox="1"/>
-          <p:nvPr/>
-        </p:nvSpPr>
-        <p:spPr>
-          <a:xfrm>
-            <a:off x="457200" y="1691640"/>
-            <a:ext cx="5669280" cy="4114800"/>
+              <a:t>The leakage test</a:t>
+            </a:r>
+          </a:p>
+        </p:txBody>
+      </p:sp>
+      <p:sp>
+        <p:nvSpPr>
+          <p:cNvPr id="7" name="TextBox 6"/>
+          <p:cNvSpPr txBox="1"/>
+          <p:nvPr/>
+        </p:nvSpPr>
+        <p:spPr>
+          <a:xfrm>
+            <a:off x="6858000" y="1691640"/>
+            <a:ext cx="5120640" cy="1828800"/>
           </a:xfrm>
           <a:prstGeom prst="rect">
             <a:avLst/>
@@ -4775,22 +6434,13 @@
               </a:spcAft>
             </a:pPr>
             <a:r>
-              <a:rPr sz="1300" b="1">
-                <a:solidFill>
-                  <a:srgbClr val="1F2D5C"/>
-                </a:solidFill>
-                <a:latin typeface="Calibri"/>
-              </a:rPr>
-              <a:t>Incident-only model</a:t>
-            </a:r>
-            <a:r>
-              <a:rPr sz="1300" b="0">
-                <a:solidFill>
-                  <a:srgbClr val="1F2D5C"/>
-                </a:solidFill>
-                <a:latin typeface="Calibri"/>
-              </a:rPr>
-              <a:t>  exclude already-depressed at baseline</a:t>
+              <a:rPr sz="1400">
+                <a:solidFill>
+                  <a:srgbClr val="1F2D5C"/>
+                </a:solidFill>
+                <a:latin typeface="Calibri"/>
+              </a:rPr>
+              <a:t>• Strip every CES-D-related feature; refit</a:t>
             </a:r>
           </a:p>
           <a:p>
@@ -4800,24 +6450,73 @@
               </a:spcAft>
             </a:pPr>
             <a:r>
-              <a:rPr sz="1300" b="1">
-                <a:solidFill>
-                  <a:srgbClr val="1F2D5C"/>
-                </a:solidFill>
-                <a:latin typeface="Calibri"/>
-              </a:rPr>
-              <a:t>External validation</a:t>
-            </a:r>
-            <a:r>
-              <a:rPr sz="1300" b="0">
-                <a:solidFill>
-                  <a:srgbClr val="1F2D5C"/>
-                </a:solidFill>
-                <a:latin typeface="Calibri"/>
-              </a:rPr>
-              <a:t>  HRS (US), SHARE (EU), TILDA (Ireland)</a:t>
-            </a:r>
-          </a:p>
+              <a:rPr sz="1400">
+                <a:solidFill>
+                  <a:srgbClr val="1F2D5C"/>
+                </a:solidFill>
+                <a:latin typeface="Calibri"/>
+              </a:rPr>
+              <a:t>• Tests: is the model just "depressed people stay depressed"?</a:t>
+            </a:r>
+          </a:p>
+        </p:txBody>
+      </p:sp>
+      <p:sp>
+        <p:nvSpPr>
+          <p:cNvPr id="8" name="TextBox 7"/>
+          <p:cNvSpPr txBox="1"/>
+          <p:nvPr/>
+        </p:nvSpPr>
+        <p:spPr>
+          <a:xfrm>
+            <a:off x="6858000" y="3108960"/>
+            <a:ext cx="5120640" cy="365760"/>
+          </a:xfrm>
+          <a:prstGeom prst="rect">
+            <a:avLst/>
+          </a:prstGeom>
+          <a:noFill/>
+        </p:spPr>
+        <p:txBody>
+          <a:bodyPr wrap="square" lIns="45720" rIns="45720">
+            <a:spAutoFit/>
+          </a:bodyPr>
+          <a:lstStyle/>
+          <a:p>
+            <a:pPr algn="l"/>
+            <a:r>
+              <a:rPr sz="1800" b="1">
+                <a:solidFill>
+                  <a:srgbClr val="E56B5C"/>
+                </a:solidFill>
+                <a:latin typeface="Calibri"/>
+              </a:rPr>
+              <a:t>What we found</a:t>
+            </a:r>
+          </a:p>
+        </p:txBody>
+      </p:sp>
+      <p:sp>
+        <p:nvSpPr>
+          <p:cNvPr id="9" name="TextBox 8"/>
+          <p:cNvSpPr txBox="1"/>
+          <p:nvPr/>
+        </p:nvSpPr>
+        <p:spPr>
+          <a:xfrm>
+            <a:off x="6858000" y="3520440"/>
+            <a:ext cx="5120640" cy="2286000"/>
+          </a:xfrm>
+          <a:prstGeom prst="rect">
+            <a:avLst/>
+          </a:prstGeom>
+          <a:noFill/>
+        </p:spPr>
+        <p:txBody>
+          <a:bodyPr wrap="square">
+            <a:spAutoFit/>
+          </a:bodyPr>
+          <a:lstStyle/>
           <a:p>
             <a:pPr algn="l">
               <a:spcAft>
@@ -4831,7 +6530,7 @@
                 </a:solidFill>
                 <a:latin typeface="Calibri"/>
               </a:rPr>
-              <a:t>Biomarkers</a:t>
+              <a:t>AUC 0.848 → 0.773</a:t>
             </a:r>
             <a:r>
               <a:rPr sz="1300" b="0">
@@ -4840,7 +6539,7 @@
                 </a:solidFill>
                 <a:latin typeface="Calibri"/>
               </a:rPr>
-              <a:t>  add ELSA nurse-visit blood data</a:t>
+              <a:t> (drop of 0.075)</a:t>
             </a:r>
           </a:p>
           <a:p>
@@ -4850,22 +6549,13 @@
               </a:spcAft>
             </a:pPr>
             <a:r>
-              <a:rPr sz="1300" b="1">
-                <a:solidFill>
-                  <a:srgbClr val="1F2D5C"/>
-                </a:solidFill>
-                <a:latin typeface="Calibri"/>
-              </a:rPr>
-              <a:t>Trajectory models</a:t>
-            </a:r>
-            <a:r>
-              <a:rPr sz="1300" b="0">
-                <a:solidFill>
-                  <a:srgbClr val="1F2D5C"/>
-                </a:solidFill>
-                <a:latin typeface="Calibri"/>
-              </a:rPr>
-              <a:t>  RNNs across many waves</a:t>
+              <a:rPr sz="1300">
+                <a:solidFill>
+                  <a:srgbClr val="1F2D5C"/>
+                </a:solidFill>
+                <a:latin typeface="Calibri"/>
+              </a:rPr>
+              <a:t>• Drop is real — prior depression matters</a:t>
             </a:r>
           </a:p>
           <a:p>
@@ -4875,22 +6565,13 @@
               </a:spcAft>
             </a:pPr>
             <a:r>
-              <a:rPr sz="1300" b="1">
-                <a:solidFill>
-                  <a:srgbClr val="1F2D5C"/>
-                </a:solidFill>
-                <a:latin typeface="Calibri"/>
-              </a:rPr>
-              <a:t>Fairness audit</a:t>
-            </a:r>
-            <a:r>
-              <a:rPr sz="1300" b="0">
-                <a:solidFill>
-                  <a:srgbClr val="1F2D5C"/>
-                </a:solidFill>
-                <a:latin typeface="Calibri"/>
-              </a:rPr>
-              <a:t>  calibration across subgroups</a:t>
+              <a:rPr sz="1300">
+                <a:solidFill>
+                  <a:srgbClr val="1F2D5C"/>
+                </a:solidFill>
+                <a:latin typeface="Calibri"/>
+              </a:rPr>
+              <a:t>• But 0.77 is still a clinically usable screening signal</a:t>
             </a:r>
           </a:p>
           <a:p>
@@ -4900,185 +6581,36 @@
               </a:spcAft>
             </a:pPr>
             <a:r>
+              <a:rPr sz="1300" b="0">
+                <a:solidFill>
+                  <a:srgbClr val="1F2D5C"/>
+                </a:solidFill>
+                <a:latin typeface="Calibri"/>
+              </a:rPr>
+              <a:t>Achieved with </a:t>
+            </a:r>
+            <a:r>
               <a:rPr sz="1300" b="1">
                 <a:solidFill>
                   <a:srgbClr val="1F2D5C"/>
                 </a:solidFill>
                 <a:latin typeface="Calibri"/>
               </a:rPr>
-              <a:t>Cost-effectiveness</a:t>
-            </a:r>
-            <a:r>
-              <a:rPr sz="1300" b="0">
-                <a:solidFill>
-                  <a:srgbClr val="1F2D5C"/>
-                </a:solidFill>
-                <a:latin typeface="Calibri"/>
-              </a:rPr>
-              <a:t>  QALY analysis with intervention data</a:t>
-            </a:r>
-          </a:p>
-        </p:txBody>
-      </p:sp>
-      <p:sp>
-        <p:nvSpPr>
-          <p:cNvPr id="7" name="TextBox 6"/>
-          <p:cNvSpPr txBox="1"/>
-          <p:nvPr/>
-        </p:nvSpPr>
-        <p:spPr>
-          <a:xfrm>
-            <a:off x="6400800" y="1280160"/>
-            <a:ext cx="5486400" cy="365760"/>
-          </a:xfrm>
-          <a:prstGeom prst="rect">
-            <a:avLst/>
-          </a:prstGeom>
-          <a:noFill/>
-        </p:spPr>
-        <p:txBody>
-          <a:bodyPr wrap="square" lIns="45720" rIns="45720">
-            <a:spAutoFit/>
-          </a:bodyPr>
-          <a:lstStyle/>
-          <a:p>
-            <a:pPr algn="l"/>
-            <a:r>
-              <a:rPr sz="1800" b="1">
-                <a:solidFill>
-                  <a:srgbClr val="E56B5C"/>
-                </a:solidFill>
-                <a:latin typeface="Calibri"/>
-              </a:rPr>
-              <a:t>Take-home messages</a:t>
-            </a:r>
-          </a:p>
-        </p:txBody>
-      </p:sp>
-      <p:sp>
-        <p:nvSpPr>
-          <p:cNvPr id="8" name="TextBox 7"/>
-          <p:cNvSpPr txBox="1"/>
-          <p:nvPr/>
-        </p:nvSpPr>
-        <p:spPr>
-          <a:xfrm>
-            <a:off x="6400800" y="1691640"/>
-            <a:ext cx="5486400" cy="4114800"/>
-          </a:xfrm>
-          <a:prstGeom prst="rect">
-            <a:avLst/>
-          </a:prstGeom>
-          <a:noFill/>
-        </p:spPr>
-        <p:txBody>
-          <a:bodyPr wrap="square">
-            <a:spAutoFit/>
-          </a:bodyPr>
-          <a:lstStyle/>
-          <a:p>
-            <a:pPr algn="l">
-              <a:spcAft>
-                <a:spcPts val="500"/>
-              </a:spcAft>
-            </a:pPr>
-            <a:r>
-              <a:rPr sz="1300" b="1">
-                <a:solidFill>
-                  <a:srgbClr val="1F2D5C"/>
-                </a:solidFill>
-                <a:latin typeface="Calibri"/>
-              </a:rPr>
-              <a:t>RQ1</a:t>
-            </a:r>
-            <a:r>
-              <a:rPr sz="1300" b="0">
-                <a:solidFill>
-                  <a:srgbClr val="1F2D5C"/>
-                </a:solidFill>
-                <a:latin typeface="Calibri"/>
-              </a:rPr>
-              <a:t>  AUC 0.85 = clinically useful early prediction</a:t>
-            </a:r>
-          </a:p>
-          <a:p>
-            <a:pPr algn="l">
-              <a:spcAft>
-                <a:spcPts val="500"/>
-              </a:spcAft>
-            </a:pPr>
-            <a:r>
-              <a:rPr sz="1300" b="1">
-                <a:solidFill>
-                  <a:srgbClr val="1F2D5C"/>
-                </a:solidFill>
-                <a:latin typeface="Calibri"/>
-              </a:rPr>
-              <a:t>RQ2</a:t>
-            </a:r>
-            <a:r>
-              <a:rPr sz="1300" b="0">
-                <a:solidFill>
-                  <a:srgbClr val="1F2D5C"/>
-                </a:solidFill>
-                <a:latin typeface="Calibri"/>
-              </a:rPr>
-              <a:t>  Two waves &gt; one, but recent snapshot ≈ combined</a:t>
-            </a:r>
-          </a:p>
-          <a:p>
-            <a:pPr algn="l">
-              <a:spcAft>
-                <a:spcPts val="500"/>
-              </a:spcAft>
-            </a:pPr>
-            <a:r>
-              <a:rPr sz="1300" b="1">
-                <a:solidFill>
-                  <a:srgbClr val="1F2D5C"/>
-                </a:solidFill>
-                <a:latin typeface="Calibri"/>
-              </a:rPr>
-              <a:t>RQ3</a:t>
-            </a:r>
-            <a:r>
-              <a:rPr sz="1300" b="0">
-                <a:solidFill>
-                  <a:srgbClr val="1F2D5C"/>
-                </a:solidFill>
-                <a:latin typeface="Calibri"/>
-              </a:rPr>
-              <a:t>  Non-mental-health features carry independent signal</a:t>
-            </a:r>
-          </a:p>
-          <a:p>
-            <a:pPr algn="l">
-              <a:spcAft>
-                <a:spcPts val="500"/>
-              </a:spcAft>
-            </a:pPr>
-            <a:r>
-              <a:rPr sz="1300">
-                <a:solidFill>
-                  <a:srgbClr val="1F2D5C"/>
-                </a:solidFill>
-                <a:latin typeface="Calibri"/>
-              </a:rPr>
-              <a:t>• Routine over-50 health-check data could feed this model today</a:t>
-            </a:r>
-          </a:p>
-        </p:txBody>
-      </p:sp>
-      <p:sp>
-        <p:nvSpPr>
-          <p:cNvPr id="9" name="Rectangle 8"/>
+              <a:t>no mental health features at all</a:t>
+            </a:r>
+          </a:p>
+        </p:txBody>
+      </p:sp>
+      <p:sp>
+        <p:nvSpPr>
+          <p:cNvPr id="10" name="Rectangle 9"/>
           <p:cNvSpPr/>
           <p:nvPr/>
         </p:nvSpPr>
         <p:spPr>
           <a:xfrm>
-            <a:off x="457200" y="5394960"/>
-            <a:ext cx="11247120" cy="1005840"/>
+            <a:off x="457200" y="5532120"/>
+            <a:ext cx="11247120" cy="868680"/>
           </a:xfrm>
           <a:prstGeom prst="rect">
             <a:avLst/>
@@ -5114,6 +6646,1330 @@
       </p:sp>
       <p:sp>
         <p:nvSpPr>
+          <p:cNvPr id="11" name="TextBox 10"/>
+          <p:cNvSpPr txBox="1"/>
+          <p:nvPr/>
+        </p:nvSpPr>
+        <p:spPr>
+          <a:xfrm>
+            <a:off x="640080" y="5623560"/>
+            <a:ext cx="10972800" cy="365760"/>
+          </a:xfrm>
+          <a:prstGeom prst="rect">
+            <a:avLst/>
+          </a:prstGeom>
+          <a:noFill/>
+        </p:spPr>
+        <p:txBody>
+          <a:bodyPr wrap="square" lIns="45720" rIns="45720">
+            <a:spAutoFit/>
+          </a:bodyPr>
+          <a:lstStyle/>
+          <a:p>
+            <a:pPr algn="l"/>
+            <a:r>
+              <a:rPr sz="1200" b="1">
+                <a:solidFill>
+                  <a:srgbClr val="E56B5C"/>
+                </a:solidFill>
+                <a:latin typeface="Calibri"/>
+              </a:rPr>
+              <a:t>Headline scientific finding</a:t>
+            </a:r>
+          </a:p>
+        </p:txBody>
+      </p:sp>
+      <p:sp>
+        <p:nvSpPr>
+          <p:cNvPr id="12" name="TextBox 11"/>
+          <p:cNvSpPr txBox="1"/>
+          <p:nvPr/>
+        </p:nvSpPr>
+        <p:spPr>
+          <a:xfrm>
+            <a:off x="640080" y="5943600"/>
+            <a:ext cx="10972800" cy="457200"/>
+          </a:xfrm>
+          <a:prstGeom prst="rect">
+            <a:avLst/>
+          </a:prstGeom>
+          <a:noFill/>
+        </p:spPr>
+        <p:txBody>
+          <a:bodyPr wrap="square" lIns="45720" rIns="45720">
+            <a:spAutoFit/>
+          </a:bodyPr>
+          <a:lstStyle/>
+          <a:p>
+            <a:pPr algn="l"/>
+            <a:r>
+              <a:rPr sz="1400" b="0">
+                <a:solidFill>
+                  <a:srgbClr val="FFFFFF"/>
+                </a:solidFill>
+                <a:latin typeface="Calibri"/>
+              </a:rPr>
+              <a:t>Depression risk leaves a measurable footprint in physical, functional, and economic data 2–4 years before symptoms emerge.</a:t>
+            </a:r>
+          </a:p>
+        </p:txBody>
+      </p:sp>
+      <p:sp>
+        <p:nvSpPr>
+          <p:cNvPr id="13" name="TextBox 12"/>
+          <p:cNvSpPr txBox="1"/>
+          <p:nvPr/>
+        </p:nvSpPr>
+        <p:spPr>
+          <a:xfrm>
+            <a:off x="457200" y="6492240"/>
+            <a:ext cx="7315200" cy="274320"/>
+          </a:xfrm>
+          <a:prstGeom prst="rect">
+            <a:avLst/>
+          </a:prstGeom>
+          <a:noFill/>
+        </p:spPr>
+        <p:txBody>
+          <a:bodyPr wrap="square" lIns="45720" rIns="45720">
+            <a:spAutoFit/>
+          </a:bodyPr>
+          <a:lstStyle/>
+          <a:p>
+            <a:pPr algn="l"/>
+            <a:r>
+              <a:rPr sz="1000" b="0">
+                <a:solidFill>
+                  <a:srgbClr val="555C66"/>
+                </a:solidFill>
+                <a:latin typeface="Calibri"/>
+              </a:rPr>
+              <a:t>ELSA Depression Prediction  |  AI &amp; Healthcare  |  University of Surrey  2025/26</a:t>
+            </a:r>
+          </a:p>
+        </p:txBody>
+      </p:sp>
+      <p:sp>
+        <p:nvSpPr>
+          <p:cNvPr id="14" name="TextBox 13"/>
+          <p:cNvSpPr txBox="1"/>
+          <p:nvPr/>
+        </p:nvSpPr>
+        <p:spPr>
+          <a:xfrm>
+            <a:off x="10515600" y="6492240"/>
+            <a:ext cx="1371600" cy="274320"/>
+          </a:xfrm>
+          <a:prstGeom prst="rect">
+            <a:avLst/>
+          </a:prstGeom>
+          <a:noFill/>
+        </p:spPr>
+        <p:txBody>
+          <a:bodyPr wrap="square" lIns="45720" rIns="45720">
+            <a:spAutoFit/>
+          </a:bodyPr>
+          <a:lstStyle/>
+          <a:p>
+            <a:pPr algn="r"/>
+            <a:r>
+              <a:rPr sz="1000" b="0">
+                <a:solidFill>
+                  <a:srgbClr val="555C66"/>
+                </a:solidFill>
+                <a:latin typeface="Calibri"/>
+              </a:rPr>
+              <a:t>12 / 14</a:t>
+            </a:r>
+          </a:p>
+        </p:txBody>
+      </p:sp>
+    </p:spTree>
+  </p:cSld>
+  <p:clrMapOvr>
+    <a:masterClrMapping/>
+  </p:clrMapOvr>
+</p:sld>
+</file>
+
+<file path=ppt/slides/slide13.xml><?xml version="1.0" encoding="utf-8"?>
+<p:sld xmlns:a="http://schemas.openxmlformats.org/drawingml/2006/main" xmlns:p="http://schemas.openxmlformats.org/presentationml/2006/main" xmlns:r="http://schemas.openxmlformats.org/officeDocument/2006/relationships">
+  <p:cSld>
+    <p:spTree>
+      <p:nvGrpSpPr>
+        <p:cNvPr id="1" name=""/>
+        <p:cNvGrpSpPr/>
+        <p:nvPr/>
+      </p:nvGrpSpPr>
+      <p:grpSpPr/>
+      <p:sp>
+        <p:nvSpPr>
+          <p:cNvPr id="2" name="Rectangle 1"/>
+          <p:cNvSpPr/>
+          <p:nvPr/>
+        </p:nvSpPr>
+        <p:spPr>
+          <a:xfrm>
+            <a:off x="0" y="0"/>
+            <a:ext cx="12191695" cy="109728"/>
+          </a:xfrm>
+          <a:prstGeom prst="rect">
+            <a:avLst/>
+          </a:prstGeom>
+          <a:solidFill>
+            <a:srgbClr val="1F2D5C"/>
+          </a:solidFill>
+          <a:ln>
+            <a:noFill/>
+          </a:ln>
+        </p:spPr>
+        <p:style>
+          <a:lnRef idx="1">
+            <a:schemeClr val="accent1"/>
+          </a:lnRef>
+          <a:fillRef idx="3">
+            <a:schemeClr val="accent1"/>
+          </a:fillRef>
+          <a:effectRef idx="2">
+            <a:schemeClr val="accent1"/>
+          </a:effectRef>
+          <a:fontRef idx="minor">
+            <a:schemeClr val="lt1"/>
+          </a:fontRef>
+        </p:style>
+        <p:txBody>
+          <a:bodyPr rtlCol="0" anchor="ctr"/>
+          <a:lstStyle/>
+          <a:p>
+            <a:pPr algn="ctr"/>
+          </a:p>
+        </p:txBody>
+      </p:sp>
+      <p:sp>
+        <p:nvSpPr>
+          <p:cNvPr id="3" name="TextBox 2"/>
+          <p:cNvSpPr txBox="1"/>
+          <p:nvPr/>
+        </p:nvSpPr>
+        <p:spPr>
+          <a:xfrm>
+            <a:off x="457200" y="182880"/>
+            <a:ext cx="11430000" cy="640080"/>
+          </a:xfrm>
+          <a:prstGeom prst="rect">
+            <a:avLst/>
+          </a:prstGeom>
+          <a:noFill/>
+        </p:spPr>
+        <p:txBody>
+          <a:bodyPr wrap="square" lIns="45720" rIns="45720">
+            <a:spAutoFit/>
+          </a:bodyPr>
+          <a:lstStyle/>
+          <a:p>
+            <a:pPr algn="l"/>
+            <a:r>
+              <a:rPr sz="3000" b="1">
+                <a:solidFill>
+                  <a:srgbClr val="1F2D5C"/>
+                </a:solidFill>
+                <a:latin typeface="Calibri"/>
+              </a:rPr>
+              <a:t>Limitations</a:t>
+            </a:r>
+          </a:p>
+        </p:txBody>
+      </p:sp>
+      <p:sp>
+        <p:nvSpPr>
+          <p:cNvPr id="4" name="TextBox 3"/>
+          <p:cNvSpPr txBox="1"/>
+          <p:nvPr/>
+        </p:nvSpPr>
+        <p:spPr>
+          <a:xfrm>
+            <a:off x="457200" y="713232"/>
+            <a:ext cx="11430000" cy="365760"/>
+          </a:xfrm>
+          <a:prstGeom prst="rect">
+            <a:avLst/>
+          </a:prstGeom>
+          <a:noFill/>
+        </p:spPr>
+        <p:txBody>
+          <a:bodyPr wrap="square" lIns="45720" rIns="45720">
+            <a:spAutoFit/>
+          </a:bodyPr>
+          <a:lstStyle/>
+          <a:p>
+            <a:pPr algn="l"/>
+            <a:r>
+              <a:rPr sz="1500" b="0">
+                <a:solidFill>
+                  <a:srgbClr val="555C66"/>
+                </a:solidFill>
+                <a:latin typeface="Calibri"/>
+              </a:rPr>
+              <a:t>Where the model can and cannot be trusted</a:t>
+            </a:r>
+          </a:p>
+        </p:txBody>
+      </p:sp>
+      <p:sp>
+        <p:nvSpPr>
+          <p:cNvPr id="5" name="TextBox 4"/>
+          <p:cNvSpPr txBox="1"/>
+          <p:nvPr/>
+        </p:nvSpPr>
+        <p:spPr>
+          <a:xfrm>
+            <a:off x="457200" y="1280160"/>
+            <a:ext cx="5669280" cy="365760"/>
+          </a:xfrm>
+          <a:prstGeom prst="rect">
+            <a:avLst/>
+          </a:prstGeom>
+          <a:noFill/>
+        </p:spPr>
+        <p:txBody>
+          <a:bodyPr wrap="square" lIns="45720" rIns="45720">
+            <a:spAutoFit/>
+          </a:bodyPr>
+          <a:lstStyle/>
+          <a:p>
+            <a:pPr algn="l"/>
+            <a:r>
+              <a:rPr sz="1800" b="1">
+                <a:solidFill>
+                  <a:srgbClr val="E56B5C"/>
+                </a:solidFill>
+                <a:latin typeface="Calibri"/>
+              </a:rPr>
+              <a:t>Methodological</a:t>
+            </a:r>
+          </a:p>
+        </p:txBody>
+      </p:sp>
+      <p:sp>
+        <p:nvSpPr>
+          <p:cNvPr id="6" name="TextBox 5"/>
+          <p:cNvSpPr txBox="1"/>
+          <p:nvPr/>
+        </p:nvSpPr>
+        <p:spPr>
+          <a:xfrm>
+            <a:off x="457200" y="1691640"/>
+            <a:ext cx="5669280" cy="4114800"/>
+          </a:xfrm>
+          <a:prstGeom prst="rect">
+            <a:avLst/>
+          </a:prstGeom>
+          <a:noFill/>
+        </p:spPr>
+        <p:txBody>
+          <a:bodyPr wrap="square">
+            <a:spAutoFit/>
+          </a:bodyPr>
+          <a:lstStyle/>
+          <a:p>
+            <a:pPr algn="l">
+              <a:spcAft>
+                <a:spcPts val="600"/>
+              </a:spcAft>
+            </a:pPr>
+            <a:r>
+              <a:rPr sz="1400" b="1">
+                <a:solidFill>
+                  <a:srgbClr val="1F2D5C"/>
+                </a:solidFill>
+                <a:latin typeface="Calibri"/>
+              </a:rPr>
+              <a:t>Screening, not diagnosis</a:t>
+            </a:r>
+            <a:r>
+              <a:rPr sz="1400" b="0">
+                <a:solidFill>
+                  <a:srgbClr val="1F2D5C"/>
+                </a:solidFill>
+                <a:latin typeface="Calibri"/>
+              </a:rPr>
+              <a:t>  CES-D ≥ 3 flags symptoms, not MDD</a:t>
+            </a:r>
+          </a:p>
+          <a:p>
+            <a:pPr algn="l">
+              <a:spcAft>
+                <a:spcPts val="600"/>
+              </a:spcAft>
+            </a:pPr>
+            <a:r>
+              <a:rPr sz="1400" b="1">
+                <a:solidFill>
+                  <a:srgbClr val="1F2D5C"/>
+                </a:solidFill>
+                <a:latin typeface="Calibri"/>
+              </a:rPr>
+              <a:t>Observational</a:t>
+            </a:r>
+            <a:r>
+              <a:rPr sz="1400" b="0">
+                <a:solidFill>
+                  <a:srgbClr val="1F2D5C"/>
+                </a:solidFill>
+                <a:latin typeface="Calibri"/>
+              </a:rPr>
+              <a:t>  associations, not causal claims</a:t>
+            </a:r>
+          </a:p>
+          <a:p>
+            <a:pPr algn="l">
+              <a:spcAft>
+                <a:spcPts val="600"/>
+              </a:spcAft>
+            </a:pPr>
+            <a:r>
+              <a:rPr sz="1400" b="1">
+                <a:solidFill>
+                  <a:srgbClr val="1F2D5C"/>
+                </a:solidFill>
+                <a:latin typeface="Calibri"/>
+              </a:rPr>
+              <a:t>Attrition bias</a:t>
+            </a:r>
+            <a:r>
+              <a:rPr sz="1400" b="0">
+                <a:solidFill>
+                  <a:srgbClr val="1F2D5C"/>
+                </a:solidFill>
+                <a:latin typeface="Calibri"/>
+              </a:rPr>
+              <a:t>  ~30% of W6 sample dropped (likely sicker)</a:t>
+            </a:r>
+          </a:p>
+          <a:p>
+            <a:pPr algn="l">
+              <a:spcAft>
+                <a:spcPts val="600"/>
+              </a:spcAft>
+            </a:pPr>
+            <a:r>
+              <a:rPr sz="1400" b="1">
+                <a:solidFill>
+                  <a:srgbClr val="1F2D5C"/>
+                </a:solidFill>
+                <a:latin typeface="Calibri"/>
+              </a:rPr>
+              <a:t>State dependence</a:t>
+            </a:r>
+            <a:r>
+              <a:rPr sz="1400" b="0">
+                <a:solidFill>
+                  <a:srgbClr val="1F2D5C"/>
+                </a:solidFill>
+                <a:latin typeface="Calibri"/>
+              </a:rPr>
+              <a:t>  prior CES-D dominates the full model</a:t>
+            </a:r>
+          </a:p>
+          <a:p>
+            <a:pPr algn="l">
+              <a:spcAft>
+                <a:spcPts val="600"/>
+              </a:spcAft>
+            </a:pPr>
+            <a:r>
+              <a:rPr sz="1400" b="1">
+                <a:solidFill>
+                  <a:srgbClr val="1F2D5C"/>
+                </a:solidFill>
+                <a:latin typeface="Calibri"/>
+              </a:rPr>
+              <a:t>Imbalance</a:t>
+            </a:r>
+            <a:r>
+              <a:rPr sz="1400" b="0">
+                <a:solidFill>
+                  <a:srgbClr val="1F2D5C"/>
+                </a:solidFill>
+                <a:latin typeface="Calibri"/>
+              </a:rPr>
+              <a:t>  precision ≈ 49%; ~half of flagged are false +ve</a:t>
+            </a:r>
+          </a:p>
+        </p:txBody>
+      </p:sp>
+      <p:sp>
+        <p:nvSpPr>
+          <p:cNvPr id="7" name="TextBox 6"/>
+          <p:cNvSpPr txBox="1"/>
+          <p:nvPr/>
+        </p:nvSpPr>
+        <p:spPr>
+          <a:xfrm>
+            <a:off x="6400800" y="1280160"/>
+            <a:ext cx="5486400" cy="365760"/>
+          </a:xfrm>
+          <a:prstGeom prst="rect">
+            <a:avLst/>
+          </a:prstGeom>
+          <a:noFill/>
+        </p:spPr>
+        <p:txBody>
+          <a:bodyPr wrap="square" lIns="45720" rIns="45720">
+            <a:spAutoFit/>
+          </a:bodyPr>
+          <a:lstStyle/>
+          <a:p>
+            <a:pPr algn="l"/>
+            <a:r>
+              <a:rPr sz="1800" b="1">
+                <a:solidFill>
+                  <a:srgbClr val="E0A32A"/>
+                </a:solidFill>
+                <a:latin typeface="Calibri"/>
+              </a:rPr>
+              <a:t>Generalisability</a:t>
+            </a:r>
+          </a:p>
+        </p:txBody>
+      </p:sp>
+      <p:sp>
+        <p:nvSpPr>
+          <p:cNvPr id="8" name="TextBox 7"/>
+          <p:cNvSpPr txBox="1"/>
+          <p:nvPr/>
+        </p:nvSpPr>
+        <p:spPr>
+          <a:xfrm>
+            <a:off x="6400800" y="1691640"/>
+            <a:ext cx="5486400" cy="4114800"/>
+          </a:xfrm>
+          <a:prstGeom prst="rect">
+            <a:avLst/>
+          </a:prstGeom>
+          <a:noFill/>
+        </p:spPr>
+        <p:txBody>
+          <a:bodyPr wrap="square">
+            <a:spAutoFit/>
+          </a:bodyPr>
+          <a:lstStyle/>
+          <a:p>
+            <a:pPr algn="l">
+              <a:spcAft>
+                <a:spcPts val="600"/>
+              </a:spcAft>
+            </a:pPr>
+            <a:r>
+              <a:rPr sz="1400" b="0">
+                <a:solidFill>
+                  <a:srgbClr val="1F2D5C"/>
+                </a:solidFill>
+                <a:latin typeface="Calibri"/>
+              </a:rPr>
+              <a:t>Validated only on </a:t>
+            </a:r>
+            <a:r>
+              <a:rPr sz="1400" b="1">
+                <a:solidFill>
+                  <a:srgbClr val="1F2D5C"/>
+                </a:solidFill>
+                <a:latin typeface="Calibri"/>
+              </a:rPr>
+              <a:t>English population aged 50+</a:t>
+            </a:r>
+          </a:p>
+          <a:p>
+            <a:pPr algn="l">
+              <a:spcAft>
+                <a:spcPts val="600"/>
+              </a:spcAft>
+            </a:pPr>
+            <a:r>
+              <a:rPr sz="1400">
+                <a:solidFill>
+                  <a:srgbClr val="1F2D5C"/>
+                </a:solidFill>
+                <a:latin typeface="Calibri"/>
+              </a:rPr>
+              <a:t>• Excludes institutionalised and care-home residents</a:t>
+            </a:r>
+          </a:p>
+          <a:p>
+            <a:pPr algn="l">
+              <a:spcAft>
+                <a:spcPts val="600"/>
+              </a:spcAft>
+            </a:pPr>
+            <a:r>
+              <a:rPr sz="1400">
+                <a:solidFill>
+                  <a:srgbClr val="1F2D5C"/>
+                </a:solidFill>
+                <a:latin typeface="Calibri"/>
+              </a:rPr>
+              <a:t>• ELSA cohort effects (e.g. 1950s-born ≠ today's 50-year-olds)</a:t>
+            </a:r>
+          </a:p>
+          <a:p>
+            <a:pPr algn="l">
+              <a:spcAft>
+                <a:spcPts val="600"/>
+              </a:spcAft>
+            </a:pPr>
+            <a:r>
+              <a:rPr sz="1400" b="1">
+                <a:solidFill>
+                  <a:srgbClr val="1F2D5C"/>
+                </a:solidFill>
+                <a:latin typeface="Calibri"/>
+              </a:rPr>
+              <a:t>Fairness not yet evaluated</a:t>
+            </a:r>
+            <a:r>
+              <a:rPr sz="1400" b="0">
+                <a:solidFill>
+                  <a:srgbClr val="1F2D5C"/>
+                </a:solidFill>
+                <a:latin typeface="Calibri"/>
+              </a:rPr>
+              <a:t> across sex, ethnicity, SES</a:t>
+            </a:r>
+          </a:p>
+          <a:p>
+            <a:pPr algn="l">
+              <a:spcAft>
+                <a:spcPts val="600"/>
+              </a:spcAft>
+            </a:pPr>
+            <a:r>
+              <a:rPr sz="1400">
+                <a:solidFill>
+                  <a:srgbClr val="1F2D5C"/>
+                </a:solidFill>
+                <a:latin typeface="Calibri"/>
+              </a:rPr>
+              <a:t>• Threshold of 0.5 is naive — deployment must tune to capacity</a:t>
+            </a:r>
+          </a:p>
+        </p:txBody>
+      </p:sp>
+      <p:sp>
+        <p:nvSpPr>
+          <p:cNvPr id="9" name="Rectangle 8"/>
+          <p:cNvSpPr/>
+          <p:nvPr/>
+        </p:nvSpPr>
+        <p:spPr>
+          <a:xfrm>
+            <a:off x="457200" y="5532120"/>
+            <a:ext cx="11247120" cy="868680"/>
+          </a:xfrm>
+          <a:prstGeom prst="rect">
+            <a:avLst/>
+          </a:prstGeom>
+          <a:solidFill>
+            <a:srgbClr val="F4F5F7"/>
+          </a:solidFill>
+          <a:ln>
+            <a:noFill/>
+          </a:ln>
+        </p:spPr>
+        <p:style>
+          <a:lnRef idx="1">
+            <a:schemeClr val="accent1"/>
+          </a:lnRef>
+          <a:fillRef idx="3">
+            <a:schemeClr val="accent1"/>
+          </a:fillRef>
+          <a:effectRef idx="2">
+            <a:schemeClr val="accent1"/>
+          </a:effectRef>
+          <a:fontRef idx="minor">
+            <a:schemeClr val="lt1"/>
+          </a:fontRef>
+        </p:style>
+        <p:txBody>
+          <a:bodyPr rtlCol="0" anchor="ctr"/>
+          <a:lstStyle/>
+          <a:p>
+            <a:pPr algn="ctr"/>
+          </a:p>
+        </p:txBody>
+      </p:sp>
+      <p:sp>
+        <p:nvSpPr>
+          <p:cNvPr id="10" name="TextBox 9"/>
+          <p:cNvSpPr txBox="1"/>
+          <p:nvPr/>
+        </p:nvSpPr>
+        <p:spPr>
+          <a:xfrm>
+            <a:off x="640080" y="5623560"/>
+            <a:ext cx="10972800" cy="365760"/>
+          </a:xfrm>
+          <a:prstGeom prst="rect">
+            <a:avLst/>
+          </a:prstGeom>
+          <a:noFill/>
+        </p:spPr>
+        <p:txBody>
+          <a:bodyPr wrap="square" lIns="45720" rIns="45720">
+            <a:spAutoFit/>
+          </a:bodyPr>
+          <a:lstStyle/>
+          <a:p>
+            <a:pPr algn="l"/>
+            <a:r>
+              <a:rPr sz="1200" b="1">
+                <a:solidFill>
+                  <a:srgbClr val="1F2D5C"/>
+                </a:solidFill>
+                <a:latin typeface="Calibri"/>
+              </a:rPr>
+              <a:t>Transparency</a:t>
+            </a:r>
+          </a:p>
+        </p:txBody>
+      </p:sp>
+      <p:sp>
+        <p:nvSpPr>
+          <p:cNvPr id="11" name="TextBox 10"/>
+          <p:cNvSpPr txBox="1"/>
+          <p:nvPr/>
+        </p:nvSpPr>
+        <p:spPr>
+          <a:xfrm>
+            <a:off x="640080" y="5916168"/>
+            <a:ext cx="10972800" cy="457200"/>
+          </a:xfrm>
+          <a:prstGeom prst="rect">
+            <a:avLst/>
+          </a:prstGeom>
+          <a:noFill/>
+        </p:spPr>
+        <p:txBody>
+          <a:bodyPr wrap="square" lIns="45720" rIns="45720">
+            <a:spAutoFit/>
+          </a:bodyPr>
+          <a:lstStyle/>
+          <a:p>
+            <a:pPr algn="l"/>
+            <a:r>
+              <a:rPr sz="1200" b="0">
+                <a:solidFill>
+                  <a:srgbClr val="555C66"/>
+                </a:solidFill>
+                <a:latin typeface="Calibri"/>
+              </a:rPr>
+              <a:t>These limitations were noted explicitly in the GitHub PR review process and accepted as documented constraints, not silent gaps.</a:t>
+            </a:r>
+          </a:p>
+        </p:txBody>
+      </p:sp>
+      <p:sp>
+        <p:nvSpPr>
+          <p:cNvPr id="12" name="TextBox 11"/>
+          <p:cNvSpPr txBox="1"/>
+          <p:nvPr/>
+        </p:nvSpPr>
+        <p:spPr>
+          <a:xfrm>
+            <a:off x="457200" y="6492240"/>
+            <a:ext cx="7315200" cy="274320"/>
+          </a:xfrm>
+          <a:prstGeom prst="rect">
+            <a:avLst/>
+          </a:prstGeom>
+          <a:noFill/>
+        </p:spPr>
+        <p:txBody>
+          <a:bodyPr wrap="square" lIns="45720" rIns="45720">
+            <a:spAutoFit/>
+          </a:bodyPr>
+          <a:lstStyle/>
+          <a:p>
+            <a:pPr algn="l"/>
+            <a:r>
+              <a:rPr sz="1000" b="0">
+                <a:solidFill>
+                  <a:srgbClr val="555C66"/>
+                </a:solidFill>
+                <a:latin typeface="Calibri"/>
+              </a:rPr>
+              <a:t>ELSA Depression Prediction  |  AI &amp; Healthcare  |  University of Surrey  2025/26</a:t>
+            </a:r>
+          </a:p>
+        </p:txBody>
+      </p:sp>
+      <p:sp>
+        <p:nvSpPr>
+          <p:cNvPr id="13" name="TextBox 12"/>
+          <p:cNvSpPr txBox="1"/>
+          <p:nvPr/>
+        </p:nvSpPr>
+        <p:spPr>
+          <a:xfrm>
+            <a:off x="10515600" y="6492240"/>
+            <a:ext cx="1371600" cy="274320"/>
+          </a:xfrm>
+          <a:prstGeom prst="rect">
+            <a:avLst/>
+          </a:prstGeom>
+          <a:noFill/>
+        </p:spPr>
+        <p:txBody>
+          <a:bodyPr wrap="square" lIns="45720" rIns="45720">
+            <a:spAutoFit/>
+          </a:bodyPr>
+          <a:lstStyle/>
+          <a:p>
+            <a:pPr algn="r"/>
+            <a:r>
+              <a:rPr sz="1000" b="0">
+                <a:solidFill>
+                  <a:srgbClr val="555C66"/>
+                </a:solidFill>
+                <a:latin typeface="Calibri"/>
+              </a:rPr>
+              <a:t>13 / 14</a:t>
+            </a:r>
+          </a:p>
+        </p:txBody>
+      </p:sp>
+    </p:spTree>
+  </p:cSld>
+  <p:clrMapOvr>
+    <a:masterClrMapping/>
+  </p:clrMapOvr>
+</p:sld>
+</file>
+
+<file path=ppt/slides/slide14.xml><?xml version="1.0" encoding="utf-8"?>
+<p:sld xmlns:a="http://schemas.openxmlformats.org/drawingml/2006/main" xmlns:p="http://schemas.openxmlformats.org/presentationml/2006/main" xmlns:r="http://schemas.openxmlformats.org/officeDocument/2006/relationships">
+  <p:cSld>
+    <p:spTree>
+      <p:nvGrpSpPr>
+        <p:cNvPr id="1" name=""/>
+        <p:cNvGrpSpPr/>
+        <p:nvPr/>
+      </p:nvGrpSpPr>
+      <p:grpSpPr/>
+      <p:sp>
+        <p:nvSpPr>
+          <p:cNvPr id="2" name="Rectangle 1"/>
+          <p:cNvSpPr/>
+          <p:nvPr/>
+        </p:nvSpPr>
+        <p:spPr>
+          <a:xfrm>
+            <a:off x="0" y="0"/>
+            <a:ext cx="12191695" cy="109728"/>
+          </a:xfrm>
+          <a:prstGeom prst="rect">
+            <a:avLst/>
+          </a:prstGeom>
+          <a:solidFill>
+            <a:srgbClr val="1F2D5C"/>
+          </a:solidFill>
+          <a:ln>
+            <a:noFill/>
+          </a:ln>
+        </p:spPr>
+        <p:style>
+          <a:lnRef idx="1">
+            <a:schemeClr val="accent1"/>
+          </a:lnRef>
+          <a:fillRef idx="3">
+            <a:schemeClr val="accent1"/>
+          </a:fillRef>
+          <a:effectRef idx="2">
+            <a:schemeClr val="accent1"/>
+          </a:effectRef>
+          <a:fontRef idx="minor">
+            <a:schemeClr val="lt1"/>
+          </a:fontRef>
+        </p:style>
+        <p:txBody>
+          <a:bodyPr rtlCol="0" anchor="ctr"/>
+          <a:lstStyle/>
+          <a:p>
+            <a:pPr algn="ctr"/>
+          </a:p>
+        </p:txBody>
+      </p:sp>
+      <p:sp>
+        <p:nvSpPr>
+          <p:cNvPr id="3" name="TextBox 2"/>
+          <p:cNvSpPr txBox="1"/>
+          <p:nvPr/>
+        </p:nvSpPr>
+        <p:spPr>
+          <a:xfrm>
+            <a:off x="457200" y="182880"/>
+            <a:ext cx="11430000" cy="640080"/>
+          </a:xfrm>
+          <a:prstGeom prst="rect">
+            <a:avLst/>
+          </a:prstGeom>
+          <a:noFill/>
+        </p:spPr>
+        <p:txBody>
+          <a:bodyPr wrap="square" lIns="45720" rIns="45720">
+            <a:spAutoFit/>
+          </a:bodyPr>
+          <a:lstStyle/>
+          <a:p>
+            <a:pPr algn="l"/>
+            <a:r>
+              <a:rPr sz="3000" b="1">
+                <a:solidFill>
+                  <a:srgbClr val="1F2D5C"/>
+                </a:solidFill>
+                <a:latin typeface="Calibri"/>
+              </a:rPr>
+              <a:t>Future Directions and Conclusion</a:t>
+            </a:r>
+          </a:p>
+        </p:txBody>
+      </p:sp>
+      <p:sp>
+        <p:nvSpPr>
+          <p:cNvPr id="4" name="TextBox 3"/>
+          <p:cNvSpPr txBox="1"/>
+          <p:nvPr/>
+        </p:nvSpPr>
+        <p:spPr>
+          <a:xfrm>
+            <a:off x="457200" y="713232"/>
+            <a:ext cx="11430000" cy="365760"/>
+          </a:xfrm>
+          <a:prstGeom prst="rect">
+            <a:avLst/>
+          </a:prstGeom>
+          <a:noFill/>
+        </p:spPr>
+        <p:txBody>
+          <a:bodyPr wrap="square" lIns="45720" rIns="45720">
+            <a:spAutoFit/>
+          </a:bodyPr>
+          <a:lstStyle/>
+          <a:p>
+            <a:pPr algn="l"/>
+            <a:r>
+              <a:rPr sz="1500" b="0">
+                <a:solidFill>
+                  <a:srgbClr val="555C66"/>
+                </a:solidFill>
+                <a:latin typeface="Calibri"/>
+              </a:rPr>
+              <a:t>From a coursework prototype to a clinical research roadmap</a:t>
+            </a:r>
+          </a:p>
+        </p:txBody>
+      </p:sp>
+      <p:sp>
+        <p:nvSpPr>
+          <p:cNvPr id="5" name="TextBox 4"/>
+          <p:cNvSpPr txBox="1"/>
+          <p:nvPr/>
+        </p:nvSpPr>
+        <p:spPr>
+          <a:xfrm>
+            <a:off x="457200" y="1280160"/>
+            <a:ext cx="5669280" cy="365760"/>
+          </a:xfrm>
+          <a:prstGeom prst="rect">
+            <a:avLst/>
+          </a:prstGeom>
+          <a:noFill/>
+        </p:spPr>
+        <p:txBody>
+          <a:bodyPr wrap="square" lIns="45720" rIns="45720">
+            <a:spAutoFit/>
+          </a:bodyPr>
+          <a:lstStyle/>
+          <a:p>
+            <a:pPr algn="l"/>
+            <a:r>
+              <a:rPr sz="1800" b="1">
+                <a:solidFill>
+                  <a:srgbClr val="186F82"/>
+                </a:solidFill>
+                <a:latin typeface="Calibri"/>
+              </a:rPr>
+              <a:t>Future directions</a:t>
+            </a:r>
+          </a:p>
+        </p:txBody>
+      </p:sp>
+      <p:sp>
+        <p:nvSpPr>
+          <p:cNvPr id="6" name="TextBox 5"/>
+          <p:cNvSpPr txBox="1"/>
+          <p:nvPr/>
+        </p:nvSpPr>
+        <p:spPr>
+          <a:xfrm>
+            <a:off x="457200" y="1691640"/>
+            <a:ext cx="5669280" cy="4114800"/>
+          </a:xfrm>
+          <a:prstGeom prst="rect">
+            <a:avLst/>
+          </a:prstGeom>
+          <a:noFill/>
+        </p:spPr>
+        <p:txBody>
+          <a:bodyPr wrap="square">
+            <a:spAutoFit/>
+          </a:bodyPr>
+          <a:lstStyle/>
+          <a:p>
+            <a:pPr algn="l">
+              <a:spcAft>
+                <a:spcPts val="500"/>
+              </a:spcAft>
+            </a:pPr>
+            <a:r>
+              <a:rPr sz="1300" b="1">
+                <a:solidFill>
+                  <a:srgbClr val="1F2D5C"/>
+                </a:solidFill>
+                <a:latin typeface="Calibri"/>
+              </a:rPr>
+              <a:t>Incident-only model</a:t>
+            </a:r>
+            <a:r>
+              <a:rPr sz="1300" b="0">
+                <a:solidFill>
+                  <a:srgbClr val="1F2D5C"/>
+                </a:solidFill>
+                <a:latin typeface="Calibri"/>
+              </a:rPr>
+              <a:t>  exclude already-depressed at baseline</a:t>
+            </a:r>
+          </a:p>
+          <a:p>
+            <a:pPr algn="l">
+              <a:spcAft>
+                <a:spcPts val="500"/>
+              </a:spcAft>
+            </a:pPr>
+            <a:r>
+              <a:rPr sz="1300" b="1">
+                <a:solidFill>
+                  <a:srgbClr val="1F2D5C"/>
+                </a:solidFill>
+                <a:latin typeface="Calibri"/>
+              </a:rPr>
+              <a:t>External validation</a:t>
+            </a:r>
+            <a:r>
+              <a:rPr sz="1300" b="0">
+                <a:solidFill>
+                  <a:srgbClr val="1F2D5C"/>
+                </a:solidFill>
+                <a:latin typeface="Calibri"/>
+              </a:rPr>
+              <a:t>  HRS (US), SHARE (EU), TILDA (Ireland)</a:t>
+            </a:r>
+          </a:p>
+          <a:p>
+            <a:pPr algn="l">
+              <a:spcAft>
+                <a:spcPts val="500"/>
+              </a:spcAft>
+            </a:pPr>
+            <a:r>
+              <a:rPr sz="1300" b="1">
+                <a:solidFill>
+                  <a:srgbClr val="1F2D5C"/>
+                </a:solidFill>
+                <a:latin typeface="Calibri"/>
+              </a:rPr>
+              <a:t>Biomarkers</a:t>
+            </a:r>
+            <a:r>
+              <a:rPr sz="1300" b="0">
+                <a:solidFill>
+                  <a:srgbClr val="1F2D5C"/>
+                </a:solidFill>
+                <a:latin typeface="Calibri"/>
+              </a:rPr>
+              <a:t>  add ELSA nurse-visit blood data</a:t>
+            </a:r>
+          </a:p>
+          <a:p>
+            <a:pPr algn="l">
+              <a:spcAft>
+                <a:spcPts val="500"/>
+              </a:spcAft>
+            </a:pPr>
+            <a:r>
+              <a:rPr sz="1300" b="1">
+                <a:solidFill>
+                  <a:srgbClr val="1F2D5C"/>
+                </a:solidFill>
+                <a:latin typeface="Calibri"/>
+              </a:rPr>
+              <a:t>Trajectory models</a:t>
+            </a:r>
+            <a:r>
+              <a:rPr sz="1300" b="0">
+                <a:solidFill>
+                  <a:srgbClr val="1F2D5C"/>
+                </a:solidFill>
+                <a:latin typeface="Calibri"/>
+              </a:rPr>
+              <a:t>  RNNs across many waves</a:t>
+            </a:r>
+          </a:p>
+          <a:p>
+            <a:pPr algn="l">
+              <a:spcAft>
+                <a:spcPts val="500"/>
+              </a:spcAft>
+            </a:pPr>
+            <a:r>
+              <a:rPr sz="1300" b="1">
+                <a:solidFill>
+                  <a:srgbClr val="1F2D5C"/>
+                </a:solidFill>
+                <a:latin typeface="Calibri"/>
+              </a:rPr>
+              <a:t>Fairness audit</a:t>
+            </a:r>
+            <a:r>
+              <a:rPr sz="1300" b="0">
+                <a:solidFill>
+                  <a:srgbClr val="1F2D5C"/>
+                </a:solidFill>
+                <a:latin typeface="Calibri"/>
+              </a:rPr>
+              <a:t>  calibration across subgroups</a:t>
+            </a:r>
+          </a:p>
+          <a:p>
+            <a:pPr algn="l">
+              <a:spcAft>
+                <a:spcPts val="500"/>
+              </a:spcAft>
+            </a:pPr>
+            <a:r>
+              <a:rPr sz="1300" b="1">
+                <a:solidFill>
+                  <a:srgbClr val="1F2D5C"/>
+                </a:solidFill>
+                <a:latin typeface="Calibri"/>
+              </a:rPr>
+              <a:t>Cost-effectiveness</a:t>
+            </a:r>
+            <a:r>
+              <a:rPr sz="1300" b="0">
+                <a:solidFill>
+                  <a:srgbClr val="1F2D5C"/>
+                </a:solidFill>
+                <a:latin typeface="Calibri"/>
+              </a:rPr>
+              <a:t>  QALY analysis with intervention data</a:t>
+            </a:r>
+          </a:p>
+        </p:txBody>
+      </p:sp>
+      <p:sp>
+        <p:nvSpPr>
+          <p:cNvPr id="7" name="TextBox 6"/>
+          <p:cNvSpPr txBox="1"/>
+          <p:nvPr/>
+        </p:nvSpPr>
+        <p:spPr>
+          <a:xfrm>
+            <a:off x="6400800" y="1280160"/>
+            <a:ext cx="5486400" cy="365760"/>
+          </a:xfrm>
+          <a:prstGeom prst="rect">
+            <a:avLst/>
+          </a:prstGeom>
+          <a:noFill/>
+        </p:spPr>
+        <p:txBody>
+          <a:bodyPr wrap="square" lIns="45720" rIns="45720">
+            <a:spAutoFit/>
+          </a:bodyPr>
+          <a:lstStyle/>
+          <a:p>
+            <a:pPr algn="l"/>
+            <a:r>
+              <a:rPr sz="1800" b="1">
+                <a:solidFill>
+                  <a:srgbClr val="E56B5C"/>
+                </a:solidFill>
+                <a:latin typeface="Calibri"/>
+              </a:rPr>
+              <a:t>Take-home messages</a:t>
+            </a:r>
+          </a:p>
+        </p:txBody>
+      </p:sp>
+      <p:sp>
+        <p:nvSpPr>
+          <p:cNvPr id="8" name="TextBox 7"/>
+          <p:cNvSpPr txBox="1"/>
+          <p:nvPr/>
+        </p:nvSpPr>
+        <p:spPr>
+          <a:xfrm>
+            <a:off x="6400800" y="1691640"/>
+            <a:ext cx="5486400" cy="4114800"/>
+          </a:xfrm>
+          <a:prstGeom prst="rect">
+            <a:avLst/>
+          </a:prstGeom>
+          <a:noFill/>
+        </p:spPr>
+        <p:txBody>
+          <a:bodyPr wrap="square">
+            <a:spAutoFit/>
+          </a:bodyPr>
+          <a:lstStyle/>
+          <a:p>
+            <a:pPr algn="l">
+              <a:spcAft>
+                <a:spcPts val="500"/>
+              </a:spcAft>
+            </a:pPr>
+            <a:r>
+              <a:rPr sz="1300" b="1">
+                <a:solidFill>
+                  <a:srgbClr val="1F2D5C"/>
+                </a:solidFill>
+                <a:latin typeface="Calibri"/>
+              </a:rPr>
+              <a:t>RQ1</a:t>
+            </a:r>
+            <a:r>
+              <a:rPr sz="1300" b="0">
+                <a:solidFill>
+                  <a:srgbClr val="1F2D5C"/>
+                </a:solidFill>
+                <a:latin typeface="Calibri"/>
+              </a:rPr>
+              <a:t>  AUC 0.85 = clinically useful early prediction</a:t>
+            </a:r>
+          </a:p>
+          <a:p>
+            <a:pPr algn="l">
+              <a:spcAft>
+                <a:spcPts val="500"/>
+              </a:spcAft>
+            </a:pPr>
+            <a:r>
+              <a:rPr sz="1300" b="1">
+                <a:solidFill>
+                  <a:srgbClr val="1F2D5C"/>
+                </a:solidFill>
+                <a:latin typeface="Calibri"/>
+              </a:rPr>
+              <a:t>RQ2</a:t>
+            </a:r>
+            <a:r>
+              <a:rPr sz="1300" b="0">
+                <a:solidFill>
+                  <a:srgbClr val="1F2D5C"/>
+                </a:solidFill>
+                <a:latin typeface="Calibri"/>
+              </a:rPr>
+              <a:t>  Two waves &gt; one, but recent snapshot ≈ combined</a:t>
+            </a:r>
+          </a:p>
+          <a:p>
+            <a:pPr algn="l">
+              <a:spcAft>
+                <a:spcPts val="500"/>
+              </a:spcAft>
+            </a:pPr>
+            <a:r>
+              <a:rPr sz="1300" b="1">
+                <a:solidFill>
+                  <a:srgbClr val="1F2D5C"/>
+                </a:solidFill>
+                <a:latin typeface="Calibri"/>
+              </a:rPr>
+              <a:t>RQ3</a:t>
+            </a:r>
+            <a:r>
+              <a:rPr sz="1300" b="0">
+                <a:solidFill>
+                  <a:srgbClr val="1F2D5C"/>
+                </a:solidFill>
+                <a:latin typeface="Calibri"/>
+              </a:rPr>
+              <a:t>  Non-mental-health features carry independent signal</a:t>
+            </a:r>
+          </a:p>
+          <a:p>
+            <a:pPr algn="l">
+              <a:spcAft>
+                <a:spcPts val="500"/>
+              </a:spcAft>
+            </a:pPr>
+            <a:r>
+              <a:rPr sz="1300">
+                <a:solidFill>
+                  <a:srgbClr val="1F2D5C"/>
+                </a:solidFill>
+                <a:latin typeface="Calibri"/>
+              </a:rPr>
+              <a:t>• Routine over-50 health-check data could feed this model today</a:t>
+            </a:r>
+          </a:p>
+        </p:txBody>
+      </p:sp>
+      <p:sp>
+        <p:nvSpPr>
+          <p:cNvPr id="9" name="Rectangle 8"/>
+          <p:cNvSpPr/>
+          <p:nvPr/>
+        </p:nvSpPr>
+        <p:spPr>
+          <a:xfrm>
+            <a:off x="457200" y="5394960"/>
+            <a:ext cx="11247120" cy="1005840"/>
+          </a:xfrm>
+          <a:prstGeom prst="rect">
+            <a:avLst/>
+          </a:prstGeom>
+          <a:solidFill>
+            <a:srgbClr val="1F2D5C"/>
+          </a:solidFill>
+          <a:ln>
+            <a:noFill/>
+          </a:ln>
+        </p:spPr>
+        <p:style>
+          <a:lnRef idx="1">
+            <a:schemeClr val="accent1"/>
+          </a:lnRef>
+          <a:fillRef idx="3">
+            <a:schemeClr val="accent1"/>
+          </a:fillRef>
+          <a:effectRef idx="2">
+            <a:schemeClr val="accent1"/>
+          </a:effectRef>
+          <a:fontRef idx="minor">
+            <a:schemeClr val="lt1"/>
+          </a:fontRef>
+        </p:style>
+        <p:txBody>
+          <a:bodyPr rtlCol="0" anchor="ctr"/>
+          <a:lstStyle/>
+          <a:p>
+            <a:pPr algn="ctr"/>
+          </a:p>
+        </p:txBody>
+      </p:sp>
+      <p:sp>
+        <p:nvSpPr>
           <p:cNvPr id="10" name="TextBox 9"/>
           <p:cNvSpPr txBox="1"/>
           <p:nvPr/>
@@ -5247,7 +8103,7 @@
                 </a:solidFill>
                 <a:latin typeface="Calibri"/>
               </a:rPr>
-              <a:t>12 / 12</a:t>
+              <a:t>14 / 14</a:t>
             </a:r>
           </a:p>
         </p:txBody>
@@ -5848,7 +8704,7 @@
                 </a:solidFill>
                 <a:latin typeface="Calibri"/>
               </a:rPr>
-              <a:t>2 / 12</a:t>
+              <a:t>2 / 14</a:t>
             </a:r>
           </a:p>
         </p:txBody>
@@ -6633,7 +9489,7 @@
                 </a:solidFill>
                 <a:latin typeface="Calibri"/>
               </a:rPr>
-              <a:t>3 / 12</a:t>
+              <a:t>3 / 14</a:t>
             </a:r>
           </a:p>
         </p:txBody>
@@ -7815,7 +10671,7 @@
                 </a:solidFill>
                 <a:latin typeface="Calibri"/>
               </a:rPr>
-              <a:t>4 / 12</a:t>
+              <a:t>4 / 14</a:t>
             </a:r>
           </a:p>
         </p:txBody>
@@ -8408,7 +11264,7 @@
                 </a:solidFill>
                 <a:latin typeface="Calibri"/>
               </a:rPr>
-              <a:t>5 / 12</a:t>
+              <a:t>5 / 14</a:t>
             </a:r>
           </a:p>
         </p:txBody>
@@ -10247,7 +13103,7 @@
                 </a:solidFill>
                 <a:latin typeface="Calibri"/>
               </a:rPr>
-              <a:t>6 / 12</a:t>
+              <a:t>6 / 14</a:t>
             </a:r>
           </a:p>
         </p:txBody>
@@ -11735,7 +14591,7 @@
                 </a:solidFill>
                 <a:latin typeface="Calibri"/>
               </a:rPr>
-              <a:t>7 / 12</a:t>
+              <a:t>7 / 14</a:t>
             </a:r>
           </a:p>
         </p:txBody>
@@ -11888,7 +14744,7 @@
         <p:spPr>
           <a:xfrm>
             <a:off x="457200" y="1280160"/>
-            <a:ext cx="3966604" cy="3383280"/>
+            <a:ext cx="3644988" cy="3108960"/>
           </a:xfrm>
           <a:prstGeom prst="rect">
             <a:avLst/>
@@ -11912,7 +14768,7 @@
         <p:spPr>
           <a:xfrm>
             <a:off x="6126480" y="1280160"/>
-            <a:ext cx="3966604" cy="3383280"/>
+            <a:ext cx="3644988" cy="3108960"/>
           </a:xfrm>
           <a:prstGeom prst="rect">
             <a:avLst/>
@@ -11927,8 +14783,8 @@
         </p:nvSpPr>
         <p:spPr>
           <a:xfrm>
-            <a:off x="457200" y="4937760"/>
-            <a:ext cx="11247120" cy="1417320"/>
+            <a:off x="457200" y="4526280"/>
+            <a:ext cx="11247120" cy="1325880"/>
           </a:xfrm>
           <a:prstGeom prst="rect">
             <a:avLst/>
@@ -11970,7 +14826,7 @@
         </p:nvSpPr>
         <p:spPr>
           <a:xfrm>
-            <a:off x="640080" y="5010912"/>
+            <a:off x="640080" y="4599432"/>
             <a:ext cx="10972800" cy="365760"/>
           </a:xfrm>
           <a:prstGeom prst="rect">
@@ -12005,7 +14861,7 @@
         </p:nvSpPr>
         <p:spPr>
           <a:xfrm>
-            <a:off x="640080" y="5394960"/>
+            <a:off x="640080" y="4910328"/>
             <a:ext cx="3657600" cy="365760"/>
           </a:xfrm>
           <a:prstGeom prst="rect">
@@ -12040,7 +14896,7 @@
         </p:nvSpPr>
         <p:spPr>
           <a:xfrm>
-            <a:off x="640080" y="5715000"/>
+            <a:off x="640080" y="5212080"/>
             <a:ext cx="3657600" cy="365760"/>
           </a:xfrm>
           <a:prstGeom prst="rect">
@@ -12056,7 +14912,7 @@
           <a:p>
             <a:pPr algn="l"/>
             <a:r>
-              <a:rPr sz="1800" b="1">
+              <a:rPr sz="1700" b="1">
                 <a:solidFill>
                   <a:srgbClr val="E0A32A"/>
                 </a:solidFill>
@@ -12075,7 +14931,7 @@
         </p:nvSpPr>
         <p:spPr>
           <a:xfrm>
-            <a:off x="640080" y="6035040"/>
+            <a:off x="640080" y="5532120"/>
             <a:ext cx="3657600" cy="274320"/>
           </a:xfrm>
           <a:prstGeom prst="rect">
@@ -12110,7 +14966,7 @@
         </p:nvSpPr>
         <p:spPr>
           <a:xfrm>
-            <a:off x="4343400" y="5394960"/>
+            <a:off x="4343400" y="4910328"/>
             <a:ext cx="3657600" cy="365760"/>
           </a:xfrm>
           <a:prstGeom prst="rect">
@@ -12145,7 +15001,7 @@
         </p:nvSpPr>
         <p:spPr>
           <a:xfrm>
-            <a:off x="4343400" y="5715000"/>
+            <a:off x="4343400" y="5212080"/>
             <a:ext cx="3657600" cy="365760"/>
           </a:xfrm>
           <a:prstGeom prst="rect">
@@ -12161,7 +15017,7 @@
           <a:p>
             <a:pPr algn="l"/>
             <a:r>
-              <a:rPr sz="1800" b="1">
+              <a:rPr sz="1700" b="1">
                 <a:solidFill>
                   <a:srgbClr val="E0A32A"/>
                 </a:solidFill>
@@ -12180,7 +15036,7 @@
         </p:nvSpPr>
         <p:spPr>
           <a:xfrm>
-            <a:off x="4343400" y="6035040"/>
+            <a:off x="4343400" y="5532120"/>
             <a:ext cx="3657600" cy="274320"/>
           </a:xfrm>
           <a:prstGeom prst="rect">
@@ -12215,7 +15071,7 @@
         </p:nvSpPr>
         <p:spPr>
           <a:xfrm>
-            <a:off x="8046719" y="5394960"/>
+            <a:off x="8046719" y="4910328"/>
             <a:ext cx="3657600" cy="365760"/>
           </a:xfrm>
           <a:prstGeom prst="rect">
@@ -12250,7 +15106,7 @@
         </p:nvSpPr>
         <p:spPr>
           <a:xfrm>
-            <a:off x="8046719" y="5715000"/>
+            <a:off x="8046719" y="5212080"/>
             <a:ext cx="3657600" cy="365760"/>
           </a:xfrm>
           <a:prstGeom prst="rect">
@@ -12266,7 +15122,7 @@
           <a:p>
             <a:pPr algn="l"/>
             <a:r>
-              <a:rPr sz="1800" b="1">
+              <a:rPr sz="1700" b="1">
                 <a:solidFill>
                   <a:srgbClr val="E56B5C"/>
                 </a:solidFill>
@@ -12285,7 +15141,7 @@
         </p:nvSpPr>
         <p:spPr>
           <a:xfrm>
-            <a:off x="8046719" y="6035040"/>
+            <a:off x="8046719" y="5532120"/>
             <a:ext cx="3657600" cy="274320"/>
           </a:xfrm>
           <a:prstGeom prst="rect">
@@ -12314,7 +15170,85 @@
       </p:sp>
       <p:sp>
         <p:nvSpPr>
-          <p:cNvPr id="18" name="TextBox 17"/>
+          <p:cNvPr id="18" name="Rectangle 17"/>
+          <p:cNvSpPr/>
+          <p:nvPr/>
+        </p:nvSpPr>
+        <p:spPr>
+          <a:xfrm>
+            <a:off x="457200" y="5943600"/>
+            <a:ext cx="11247120" cy="457200"/>
+          </a:xfrm>
+          <a:prstGeom prst="rect">
+            <a:avLst/>
+          </a:prstGeom>
+          <a:solidFill>
+            <a:srgbClr val="1F2D5C"/>
+          </a:solidFill>
+          <a:ln>
+            <a:noFill/>
+          </a:ln>
+        </p:spPr>
+        <p:style>
+          <a:lnRef idx="1">
+            <a:schemeClr val="accent1"/>
+          </a:lnRef>
+          <a:fillRef idx="3">
+            <a:schemeClr val="accent1"/>
+          </a:fillRef>
+          <a:effectRef idx="2">
+            <a:schemeClr val="accent1"/>
+          </a:effectRef>
+          <a:fontRef idx="minor">
+            <a:schemeClr val="lt1"/>
+          </a:fontRef>
+        </p:style>
+        <p:txBody>
+          <a:bodyPr rtlCol="0" anchor="ctr"/>
+          <a:lstStyle/>
+          <a:p>
+            <a:pPr algn="ctr"/>
+          </a:p>
+        </p:txBody>
+      </p:sp>
+      <p:sp>
+        <p:nvSpPr>
+          <p:cNvPr id="19" name="TextBox 18"/>
+          <p:cNvSpPr txBox="1"/>
+          <p:nvPr/>
+        </p:nvSpPr>
+        <p:spPr>
+          <a:xfrm>
+            <a:off x="640080" y="5989320"/>
+            <a:ext cx="10972800" cy="411480"/>
+          </a:xfrm>
+          <a:prstGeom prst="rect">
+            <a:avLst/>
+          </a:prstGeom>
+          <a:noFill/>
+        </p:spPr>
+        <p:txBody>
+          <a:bodyPr wrap="square" lIns="45720" rIns="45720">
+            <a:spAutoFit/>
+          </a:bodyPr>
+          <a:lstStyle/>
+          <a:p>
+            <a:pPr algn="l"/>
+            <a:r>
+              <a:rPr sz="1300" b="1">
+                <a:solidFill>
+                  <a:srgbClr val="FFFFFF"/>
+                </a:solidFill>
+                <a:latin typeface="Calibri"/>
+              </a:rPr>
+              <a:t>Stacking ensemble  —  RF + LGBM + LR meta  —  AUC 0.841,  Recall 0.773 (highest of any model)</a:t>
+            </a:r>
+          </a:p>
+        </p:txBody>
+      </p:sp>
+      <p:sp>
+        <p:nvSpPr>
+          <p:cNvPr id="20" name="TextBox 19"/>
           <p:cNvSpPr txBox="1"/>
           <p:nvPr/>
         </p:nvSpPr>
@@ -12349,7 +15283,7 @@
       </p:sp>
       <p:sp>
         <p:nvSpPr>
-          <p:cNvPr id="19" name="TextBox 18"/>
+          <p:cNvPr id="21" name="TextBox 20"/>
           <p:cNvSpPr txBox="1"/>
           <p:nvPr/>
         </p:nvSpPr>
@@ -12377,7 +15311,7 @@
                 </a:solidFill>
                 <a:latin typeface="Calibri"/>
               </a:rPr>
-              <a:t>8 / 12</a:t>
+              <a:t>8 / 14</a:t>
             </a:r>
           </a:p>
         </p:txBody>
@@ -12473,7 +15407,7 @@
                 </a:solidFill>
                 <a:latin typeface="Calibri"/>
               </a:rPr>
-              <a:t>What Drives the Predictions?</a:t>
+              <a:t>Clinical Deployment Readiness</a:t>
             </a:r>
           </a:p>
         </p:txBody>
@@ -12508,67 +15442,94 @@
                 </a:solidFill>
                 <a:latin typeface="Calibri"/>
               </a:rPr>
-              <a:t>SHAP feature importance — Random Forest, W6+W7 full model</a:t>
-            </a:r>
-          </a:p>
-        </p:txBody>
-      </p:sp>
-      <p:pic>
-        <p:nvPicPr>
-          <p:cNvPr id="5" name="Picture 4" descr="shap_bar_rf.png"/>
-          <p:cNvPicPr>
-            <a:picLocks noChangeAspect="1"/>
-          </p:cNvPicPr>
-          <p:nvPr/>
-        </p:nvPicPr>
-        <p:blipFill>
-          <a:blip r:embed="rId2"/>
-          <a:stretch>
-            <a:fillRect/>
-          </a:stretch>
-        </p:blipFill>
-        <p:spPr>
-          <a:xfrm>
-            <a:off x="457200" y="1280160"/>
-            <a:ext cx="6003801" cy="4754880"/>
-          </a:xfrm>
-          <a:prstGeom prst="rect">
-            <a:avLst/>
-          </a:prstGeom>
-        </p:spPr>
-      </p:pic>
-      <p:sp>
-        <p:nvSpPr>
-          <p:cNvPr id="6" name="TextBox 5"/>
-          <p:cNvSpPr txBox="1"/>
-          <p:nvPr/>
-        </p:nvSpPr>
-        <p:spPr>
-          <a:xfrm>
-            <a:off x="6858000" y="1280160"/>
-            <a:ext cx="5120640" cy="365760"/>
-          </a:xfrm>
-          <a:prstGeom prst="rect">
-            <a:avLst/>
-          </a:prstGeom>
-          <a:noFill/>
-        </p:spPr>
-        <p:txBody>
-          <a:bodyPr wrap="square" lIns="45720" rIns="45720">
-            <a:spAutoFit/>
-          </a:bodyPr>
-          <a:lstStyle/>
-          <a:p>
-            <a:pPr algn="l"/>
-            <a:r>
-              <a:rPr sz="1800" b="1">
-                <a:solidFill>
-                  <a:srgbClr val="186F82"/>
-                </a:solidFill>
-                <a:latin typeface="Calibri"/>
-              </a:rPr>
-              <a:t>Top predictors (full model)</a:t>
-            </a:r>
+              <a:t>Threshold tuning, calibrated probabilities, and stacking for screening</a:t>
+            </a:r>
+          </a:p>
+        </p:txBody>
+      </p:sp>
+      <p:sp>
+        <p:nvSpPr>
+          <p:cNvPr id="5" name="Rectangle 4"/>
+          <p:cNvSpPr/>
+          <p:nvPr/>
+        </p:nvSpPr>
+        <p:spPr>
+          <a:xfrm>
+            <a:off x="457200" y="1371600"/>
+            <a:ext cx="3657600" cy="4206240"/>
+          </a:xfrm>
+          <a:prstGeom prst="rect">
+            <a:avLst/>
+          </a:prstGeom>
+          <a:solidFill>
+            <a:srgbClr val="F4F5F7"/>
+          </a:solidFill>
+          <a:ln>
+            <a:noFill/>
+          </a:ln>
+        </p:spPr>
+        <p:style>
+          <a:lnRef idx="1">
+            <a:schemeClr val="accent1"/>
+          </a:lnRef>
+          <a:fillRef idx="3">
+            <a:schemeClr val="accent1"/>
+          </a:fillRef>
+          <a:effectRef idx="2">
+            <a:schemeClr val="accent1"/>
+          </a:effectRef>
+          <a:fontRef idx="minor">
+            <a:schemeClr val="lt1"/>
+          </a:fontRef>
+        </p:style>
+        <p:txBody>
+          <a:bodyPr rtlCol="0" anchor="ctr"/>
+          <a:lstStyle/>
+          <a:p>
+            <a:pPr algn="ctr"/>
+          </a:p>
+        </p:txBody>
+      </p:sp>
+      <p:sp>
+        <p:nvSpPr>
+          <p:cNvPr id="6" name="Rectangle 5"/>
+          <p:cNvSpPr/>
+          <p:nvPr/>
+        </p:nvSpPr>
+        <p:spPr>
+          <a:xfrm>
+            <a:off x="457200" y="1371600"/>
+            <a:ext cx="3657600" cy="502920"/>
+          </a:xfrm>
+          <a:prstGeom prst="rect">
+            <a:avLst/>
+          </a:prstGeom>
+          <a:solidFill>
+            <a:srgbClr val="186F82"/>
+          </a:solidFill>
+          <a:ln>
+            <a:noFill/>
+          </a:ln>
+        </p:spPr>
+        <p:style>
+          <a:lnRef idx="1">
+            <a:schemeClr val="accent1"/>
+          </a:lnRef>
+          <a:fillRef idx="3">
+            <a:schemeClr val="accent1"/>
+          </a:fillRef>
+          <a:effectRef idx="2">
+            <a:schemeClr val="accent1"/>
+          </a:effectRef>
+          <a:fontRef idx="minor">
+            <a:schemeClr val="lt1"/>
+          </a:fontRef>
+        </p:style>
+        <p:txBody>
+          <a:bodyPr rtlCol="0" anchor="ctr"/>
+          <a:lstStyle/>
+          <a:p>
+            <a:pPr algn="ctr"/>
           </a:p>
         </p:txBody>
       </p:sp>
@@ -12580,8 +15541,43 @@
         </p:nvSpPr>
         <p:spPr>
           <a:xfrm>
-            <a:off x="6858000" y="1691640"/>
-            <a:ext cx="5120640" cy="2286000"/>
+            <a:off x="457200" y="1463040"/>
+            <a:ext cx="3657600" cy="365760"/>
+          </a:xfrm>
+          <a:prstGeom prst="rect">
+            <a:avLst/>
+          </a:prstGeom>
+          <a:noFill/>
+        </p:spPr>
+        <p:txBody>
+          <a:bodyPr wrap="square" lIns="45720" rIns="45720">
+            <a:spAutoFit/>
+          </a:bodyPr>
+          <a:lstStyle/>
+          <a:p>
+            <a:pPr algn="ctr"/>
+            <a:r>
+              <a:rPr sz="1600" b="1">
+                <a:solidFill>
+                  <a:srgbClr val="FFFFFF"/>
+                </a:solidFill>
+                <a:latin typeface="Calibri"/>
+              </a:rPr>
+              <a:t>Threshold optimisation</a:t>
+            </a:r>
+          </a:p>
+        </p:txBody>
+      </p:sp>
+      <p:sp>
+        <p:nvSpPr>
+          <p:cNvPr id="8" name="TextBox 7"/>
+          <p:cNvSpPr txBox="1"/>
+          <p:nvPr/>
+        </p:nvSpPr>
+        <p:spPr>
+          <a:xfrm>
+            <a:off x="685800" y="2057400"/>
+            <a:ext cx="3200400" cy="3429000"/>
           </a:xfrm>
           <a:prstGeom prst="rect">
             <a:avLst/>
@@ -12596,224 +15592,274 @@
           <a:p>
             <a:pPr algn="l">
               <a:spcAft>
-                <a:spcPts val="500"/>
+                <a:spcPts val="800"/>
               </a:spcAft>
             </a:pPr>
             <a:r>
-              <a:rPr sz="1400" b="1">
-                <a:solidFill>
-                  <a:srgbClr val="1F2D5C"/>
-                </a:solidFill>
-                <a:latin typeface="Calibri"/>
-              </a:rPr>
-              <a:t>Prior CES-D</a:t>
-            </a:r>
-            <a:r>
-              <a:rPr sz="1400" b="0">
-                <a:solidFill>
-                  <a:srgbClr val="1F2D5C"/>
-                </a:solidFill>
-                <a:latin typeface="Calibri"/>
-              </a:rPr>
-              <a:t>  state dependence dominates</a:t>
+              <a:rPr sz="1200">
+                <a:solidFill>
+                  <a:srgbClr val="1F2D5C"/>
+                </a:solidFill>
+                <a:latin typeface="Calibri"/>
+              </a:rPr>
+              <a:t>• Default t = 0.50  →  F1 0.580</a:t>
             </a:r>
           </a:p>
           <a:p>
             <a:pPr algn="l">
               <a:spcAft>
-                <a:spcPts val="500"/>
+                <a:spcPts val="800"/>
               </a:spcAft>
             </a:pPr>
             <a:r>
-              <a:rPr sz="1400" b="1">
-                <a:solidFill>
-                  <a:srgbClr val="1F2D5C"/>
-                </a:solidFill>
-                <a:latin typeface="Calibri"/>
-              </a:rPr>
-              <a:t>Self-rated health</a:t>
-            </a:r>
-            <a:r>
-              <a:rPr sz="1400" b="0">
-                <a:solidFill>
-                  <a:srgbClr val="1F2D5C"/>
-                </a:solidFill>
-                <a:latin typeface="Calibri"/>
-              </a:rPr>
-              <a:t>  subjective vitality</a:t>
+              <a:rPr sz="1200" b="1">
+                <a:solidFill>
+                  <a:srgbClr val="1F2D5C"/>
+                </a:solidFill>
+                <a:latin typeface="Calibri"/>
+              </a:rPr>
+              <a:t>Optimal t ≈ 0.58  →  F1 0.611</a:t>
+            </a:r>
+            <a:r>
+              <a:rPr sz="1200" b="0">
+                <a:solidFill>
+                  <a:srgbClr val="1F2D5C"/>
+                </a:solidFill>
+                <a:latin typeface="Calibri"/>
+              </a:rPr>
+              <a:t> (+5%)</a:t>
             </a:r>
           </a:p>
           <a:p>
             <a:pPr algn="l">
               <a:spcAft>
-                <a:spcPts val="500"/>
+                <a:spcPts val="800"/>
               </a:spcAft>
             </a:pPr>
             <a:r>
-              <a:rPr sz="1400" b="1">
-                <a:solidFill>
-                  <a:srgbClr val="1F2D5C"/>
-                </a:solidFill>
-                <a:latin typeface="Calibri"/>
-              </a:rPr>
-              <a:t>Mobility count</a:t>
-            </a:r>
-            <a:r>
-              <a:rPr sz="1400" b="0">
-                <a:solidFill>
-                  <a:srgbClr val="1F2D5C"/>
-                </a:solidFill>
-                <a:latin typeface="Calibri"/>
-              </a:rPr>
-              <a:t>  physical function decline</a:t>
+              <a:rPr sz="1200">
+                <a:solidFill>
+                  <a:srgbClr val="1F2D5C"/>
+                </a:solidFill>
+                <a:latin typeface="Calibri"/>
+              </a:rPr>
+              <a:t>• Lower t  →  more recall, more false +ve</a:t>
             </a:r>
           </a:p>
           <a:p>
             <a:pPr algn="l">
               <a:spcAft>
-                <a:spcPts val="500"/>
+                <a:spcPts val="800"/>
               </a:spcAft>
             </a:pPr>
             <a:r>
-              <a:rPr sz="1400" b="1">
-                <a:solidFill>
-                  <a:srgbClr val="1F2D5C"/>
-                </a:solidFill>
-                <a:latin typeface="Calibri"/>
-              </a:rPr>
-              <a:t>CES-D change</a:t>
-            </a:r>
-            <a:r>
-              <a:rPr sz="1400" b="0">
-                <a:solidFill>
-                  <a:srgbClr val="1F2D5C"/>
-                </a:solidFill>
-                <a:latin typeface="Calibri"/>
-              </a:rPr>
-              <a:t>  worsening trajectory matters</a:t>
-            </a:r>
-          </a:p>
+              <a:rPr sz="1200" b="1">
+                <a:solidFill>
+                  <a:srgbClr val="1F2D5C"/>
+                </a:solidFill>
+                <a:latin typeface="Calibri"/>
+              </a:rPr>
+              <a:t>Tune t to clinic capacity</a:t>
+            </a:r>
+            <a:r>
+              <a:rPr sz="1200" b="0">
+                <a:solidFill>
+                  <a:srgbClr val="1F2D5C"/>
+                </a:solidFill>
+                <a:latin typeface="Calibri"/>
+              </a:rPr>
+              <a:t>, not 0.5</a:t>
+            </a:r>
+          </a:p>
+        </p:txBody>
+      </p:sp>
+      <p:sp>
+        <p:nvSpPr>
+          <p:cNvPr id="9" name="Rectangle 8"/>
+          <p:cNvSpPr/>
+          <p:nvPr/>
+        </p:nvSpPr>
+        <p:spPr>
+          <a:xfrm>
+            <a:off x="4251960" y="1371600"/>
+            <a:ext cx="3657600" cy="4206240"/>
+          </a:xfrm>
+          <a:prstGeom prst="rect">
+            <a:avLst/>
+          </a:prstGeom>
+          <a:solidFill>
+            <a:srgbClr val="F4F5F7"/>
+          </a:solidFill>
+          <a:ln>
+            <a:noFill/>
+          </a:ln>
+        </p:spPr>
+        <p:style>
+          <a:lnRef idx="1">
+            <a:schemeClr val="accent1"/>
+          </a:lnRef>
+          <a:fillRef idx="3">
+            <a:schemeClr val="accent1"/>
+          </a:fillRef>
+          <a:effectRef idx="2">
+            <a:schemeClr val="accent1"/>
+          </a:effectRef>
+          <a:fontRef idx="minor">
+            <a:schemeClr val="lt1"/>
+          </a:fontRef>
+        </p:style>
+        <p:txBody>
+          <a:bodyPr rtlCol="0" anchor="ctr"/>
+          <a:lstStyle/>
+          <a:p>
+            <a:pPr algn="ctr"/>
+          </a:p>
+        </p:txBody>
+      </p:sp>
+      <p:sp>
+        <p:nvSpPr>
+          <p:cNvPr id="10" name="Rectangle 9"/>
+          <p:cNvSpPr/>
+          <p:nvPr/>
+        </p:nvSpPr>
+        <p:spPr>
+          <a:xfrm>
+            <a:off x="4251960" y="1371600"/>
+            <a:ext cx="3657600" cy="502920"/>
+          </a:xfrm>
+          <a:prstGeom prst="rect">
+            <a:avLst/>
+          </a:prstGeom>
+          <a:solidFill>
+            <a:srgbClr val="E56B5C"/>
+          </a:solidFill>
+          <a:ln>
+            <a:noFill/>
+          </a:ln>
+        </p:spPr>
+        <p:style>
+          <a:lnRef idx="1">
+            <a:schemeClr val="accent1"/>
+          </a:lnRef>
+          <a:fillRef idx="3">
+            <a:schemeClr val="accent1"/>
+          </a:fillRef>
+          <a:effectRef idx="2">
+            <a:schemeClr val="accent1"/>
+          </a:effectRef>
+          <a:fontRef idx="minor">
+            <a:schemeClr val="lt1"/>
+          </a:fontRef>
+        </p:style>
+        <p:txBody>
+          <a:bodyPr rtlCol="0" anchor="ctr"/>
+          <a:lstStyle/>
+          <a:p>
+            <a:pPr algn="ctr"/>
+          </a:p>
+        </p:txBody>
+      </p:sp>
+      <p:sp>
+        <p:nvSpPr>
+          <p:cNvPr id="11" name="TextBox 10"/>
+          <p:cNvSpPr txBox="1"/>
+          <p:nvPr/>
+        </p:nvSpPr>
+        <p:spPr>
+          <a:xfrm>
+            <a:off x="4251960" y="1463040"/>
+            <a:ext cx="3657600" cy="365760"/>
+          </a:xfrm>
+          <a:prstGeom prst="rect">
+            <a:avLst/>
+          </a:prstGeom>
+          <a:noFill/>
+        </p:spPr>
+        <p:txBody>
+          <a:bodyPr wrap="square" lIns="45720" rIns="45720">
+            <a:spAutoFit/>
+          </a:bodyPr>
+          <a:lstStyle/>
+          <a:p>
+            <a:pPr algn="ctr"/>
+            <a:r>
+              <a:rPr sz="1600" b="1">
+                <a:solidFill>
+                  <a:srgbClr val="FFFFFF"/>
+                </a:solidFill>
+                <a:latin typeface="Calibri"/>
+              </a:rPr>
+              <a:t>Calibration</a:t>
+            </a:r>
+          </a:p>
+        </p:txBody>
+      </p:sp>
+      <p:sp>
+        <p:nvSpPr>
+          <p:cNvPr id="12" name="TextBox 11"/>
+          <p:cNvSpPr txBox="1"/>
+          <p:nvPr/>
+        </p:nvSpPr>
+        <p:spPr>
+          <a:xfrm>
+            <a:off x="4480560" y="2057400"/>
+            <a:ext cx="3200400" cy="3429000"/>
+          </a:xfrm>
+          <a:prstGeom prst="rect">
+            <a:avLst/>
+          </a:prstGeom>
+          <a:noFill/>
+        </p:spPr>
+        <p:txBody>
+          <a:bodyPr wrap="square">
+            <a:spAutoFit/>
+          </a:bodyPr>
+          <a:lstStyle/>
           <a:p>
             <a:pPr algn="l">
               <a:spcAft>
-                <a:spcPts val="500"/>
+                <a:spcPts val="800"/>
               </a:spcAft>
             </a:pPr>
             <a:r>
-              <a:rPr sz="1400" b="1">
-                <a:solidFill>
-                  <a:srgbClr val="1F2D5C"/>
-                </a:solidFill>
-                <a:latin typeface="Calibri"/>
-              </a:rPr>
-              <a:t>Financial difficulty</a:t>
-            </a:r>
-            <a:r>
-              <a:rPr sz="1400" b="0">
-                <a:solidFill>
-                  <a:srgbClr val="1F2D5C"/>
-                </a:solidFill>
-                <a:latin typeface="Calibri"/>
-              </a:rPr>
-              <a:t>  socioeconomic strain</a:t>
-            </a:r>
-          </a:p>
-        </p:txBody>
-      </p:sp>
-      <p:sp>
-        <p:nvSpPr>
-          <p:cNvPr id="8" name="TextBox 7"/>
-          <p:cNvSpPr txBox="1"/>
-          <p:nvPr/>
-        </p:nvSpPr>
-        <p:spPr>
-          <a:xfrm>
-            <a:off x="6858000" y="3840480"/>
-            <a:ext cx="5120640" cy="365760"/>
-          </a:xfrm>
-          <a:prstGeom prst="rect">
-            <a:avLst/>
-          </a:prstGeom>
-          <a:noFill/>
-        </p:spPr>
-        <p:txBody>
-          <a:bodyPr wrap="square" lIns="45720" rIns="45720">
-            <a:spAutoFit/>
-          </a:bodyPr>
-          <a:lstStyle/>
-          <a:p>
-            <a:pPr algn="l"/>
-            <a:r>
-              <a:rPr sz="1800" b="1">
-                <a:solidFill>
-                  <a:srgbClr val="E56B5C"/>
-                </a:solidFill>
-                <a:latin typeface="Calibri"/>
-              </a:rPr>
-              <a:t>What this shows</a:t>
-            </a:r>
-          </a:p>
-        </p:txBody>
-      </p:sp>
-      <p:sp>
-        <p:nvSpPr>
-          <p:cNvPr id="9" name="TextBox 8"/>
-          <p:cNvSpPr txBox="1"/>
-          <p:nvPr/>
-        </p:nvSpPr>
-        <p:spPr>
-          <a:xfrm>
-            <a:off x="6858000" y="4251960"/>
-            <a:ext cx="5120640" cy="2286000"/>
-          </a:xfrm>
-          <a:prstGeom prst="rect">
-            <a:avLst/>
-          </a:prstGeom>
-          <a:noFill/>
-        </p:spPr>
-        <p:txBody>
-          <a:bodyPr wrap="square">
-            <a:spAutoFit/>
-          </a:bodyPr>
-          <a:lstStyle/>
+              <a:rPr sz="1200">
+                <a:solidFill>
+                  <a:srgbClr val="1F2D5C"/>
+                </a:solidFill>
+                <a:latin typeface="Calibri"/>
+              </a:rPr>
+              <a:t>• Tree models under-confident at low p</a:t>
+            </a:r>
+          </a:p>
           <a:p>
             <a:pPr algn="l">
               <a:spcAft>
-                <a:spcPts val="400"/>
+                <a:spcPts val="800"/>
               </a:spcAft>
             </a:pPr>
             <a:r>
+              <a:rPr sz="1200" b="1">
+                <a:solidFill>
+                  <a:srgbClr val="1F2D5C"/>
+                </a:solidFill>
+                <a:latin typeface="Calibri"/>
+              </a:rPr>
+              <a:t>Isotonic regression on RF</a:t>
+            </a:r>
+            <a:r>
               <a:rPr sz="1200" b="0">
                 <a:solidFill>
                   <a:srgbClr val="1F2D5C"/>
                 </a:solidFill>
                 <a:latin typeface="Calibri"/>
               </a:rPr>
-              <a:t>Late-life depression has a </a:t>
-            </a:r>
-            <a:r>
-              <a:rPr sz="1200" b="1">
-                <a:solidFill>
-                  <a:srgbClr val="1F2D5C"/>
-                </a:solidFill>
-                <a:latin typeface="Calibri"/>
-              </a:rPr>
-              <a:t>biopsychosocial</a:t>
-            </a:r>
-            <a:r>
-              <a:rPr sz="1200" b="0">
-                <a:solidFill>
-                  <a:srgbClr val="1F2D5C"/>
-                </a:solidFill>
-                <a:latin typeface="Calibri"/>
-              </a:rPr>
-              <a:t> signature</a:t>
+              <a:t> preserves AUC 0.848</a:t>
             </a:r>
           </a:p>
           <a:p>
             <a:pPr algn="l">
               <a:spcAft>
-                <a:spcPts val="400"/>
+                <a:spcPts val="800"/>
               </a:spcAft>
             </a:pPr>
             <a:r>
@@ -12823,13 +15869,13 @@
                 </a:solidFill>
                 <a:latin typeface="Calibri"/>
               </a:rPr>
-              <a:t>• Physical, mental, and social signals all visible 2-4 yrs ahead</a:t>
+              <a:t>• Probabilities now reliable in p∈[0.2, 0.6]</a:t>
             </a:r>
           </a:p>
           <a:p>
             <a:pPr algn="l">
               <a:spcAft>
-                <a:spcPts val="400"/>
+                <a:spcPts val="800"/>
               </a:spcAft>
             </a:pPr>
             <a:r>
@@ -12839,14 +15885,344 @@
                 </a:solidFill>
                 <a:latin typeface="Calibri"/>
               </a:rPr>
-              <a:t>• Aligns with established gerontological depression literature</a:t>
-            </a:r>
-          </a:p>
-        </p:txBody>
-      </p:sp>
-      <p:sp>
-        <p:nvSpPr>
-          <p:cNvPr id="10" name="TextBox 9"/>
+              <a:t>• LR is naturally well-calibrated</a:t>
+            </a:r>
+          </a:p>
+        </p:txBody>
+      </p:sp>
+      <p:sp>
+        <p:nvSpPr>
+          <p:cNvPr id="13" name="Rectangle 12"/>
+          <p:cNvSpPr/>
+          <p:nvPr/>
+        </p:nvSpPr>
+        <p:spPr>
+          <a:xfrm>
+            <a:off x="8046720" y="1371600"/>
+            <a:ext cx="3657600" cy="4206240"/>
+          </a:xfrm>
+          <a:prstGeom prst="rect">
+            <a:avLst/>
+          </a:prstGeom>
+          <a:solidFill>
+            <a:srgbClr val="F4F5F7"/>
+          </a:solidFill>
+          <a:ln>
+            <a:noFill/>
+          </a:ln>
+        </p:spPr>
+        <p:style>
+          <a:lnRef idx="1">
+            <a:schemeClr val="accent1"/>
+          </a:lnRef>
+          <a:fillRef idx="3">
+            <a:schemeClr val="accent1"/>
+          </a:fillRef>
+          <a:effectRef idx="2">
+            <a:schemeClr val="accent1"/>
+          </a:effectRef>
+          <a:fontRef idx="minor">
+            <a:schemeClr val="lt1"/>
+          </a:fontRef>
+        </p:style>
+        <p:txBody>
+          <a:bodyPr rtlCol="0" anchor="ctr"/>
+          <a:lstStyle/>
+          <a:p>
+            <a:pPr algn="ctr"/>
+          </a:p>
+        </p:txBody>
+      </p:sp>
+      <p:sp>
+        <p:nvSpPr>
+          <p:cNvPr id="14" name="Rectangle 13"/>
+          <p:cNvSpPr/>
+          <p:nvPr/>
+        </p:nvSpPr>
+        <p:spPr>
+          <a:xfrm>
+            <a:off x="8046720" y="1371600"/>
+            <a:ext cx="3657600" cy="502920"/>
+          </a:xfrm>
+          <a:prstGeom prst="rect">
+            <a:avLst/>
+          </a:prstGeom>
+          <a:solidFill>
+            <a:srgbClr val="E0A32A"/>
+          </a:solidFill>
+          <a:ln>
+            <a:noFill/>
+          </a:ln>
+        </p:spPr>
+        <p:style>
+          <a:lnRef idx="1">
+            <a:schemeClr val="accent1"/>
+          </a:lnRef>
+          <a:fillRef idx="3">
+            <a:schemeClr val="accent1"/>
+          </a:fillRef>
+          <a:effectRef idx="2">
+            <a:schemeClr val="accent1"/>
+          </a:effectRef>
+          <a:fontRef idx="minor">
+            <a:schemeClr val="lt1"/>
+          </a:fontRef>
+        </p:style>
+        <p:txBody>
+          <a:bodyPr rtlCol="0" anchor="ctr"/>
+          <a:lstStyle/>
+          <a:p>
+            <a:pPr algn="ctr"/>
+          </a:p>
+        </p:txBody>
+      </p:sp>
+      <p:sp>
+        <p:nvSpPr>
+          <p:cNvPr id="15" name="TextBox 14"/>
+          <p:cNvSpPr txBox="1"/>
+          <p:nvPr/>
+        </p:nvSpPr>
+        <p:spPr>
+          <a:xfrm>
+            <a:off x="8046720" y="1463040"/>
+            <a:ext cx="3657600" cy="365760"/>
+          </a:xfrm>
+          <a:prstGeom prst="rect">
+            <a:avLst/>
+          </a:prstGeom>
+          <a:noFill/>
+        </p:spPr>
+        <p:txBody>
+          <a:bodyPr wrap="square" lIns="45720" rIns="45720">
+            <a:spAutoFit/>
+          </a:bodyPr>
+          <a:lstStyle/>
+          <a:p>
+            <a:pPr algn="ctr"/>
+            <a:r>
+              <a:rPr sz="1600" b="1">
+                <a:solidFill>
+                  <a:srgbClr val="FFFFFF"/>
+                </a:solidFill>
+                <a:latin typeface="Calibri"/>
+              </a:rPr>
+              <a:t>Stacking ensemble</a:t>
+            </a:r>
+          </a:p>
+        </p:txBody>
+      </p:sp>
+      <p:sp>
+        <p:nvSpPr>
+          <p:cNvPr id="16" name="TextBox 15"/>
+          <p:cNvSpPr txBox="1"/>
+          <p:nvPr/>
+        </p:nvSpPr>
+        <p:spPr>
+          <a:xfrm>
+            <a:off x="8275320" y="2057400"/>
+            <a:ext cx="3200400" cy="3429000"/>
+          </a:xfrm>
+          <a:prstGeom prst="rect">
+            <a:avLst/>
+          </a:prstGeom>
+          <a:noFill/>
+        </p:spPr>
+        <p:txBody>
+          <a:bodyPr wrap="square">
+            <a:spAutoFit/>
+          </a:bodyPr>
+          <a:lstStyle/>
+          <a:p>
+            <a:pPr algn="l">
+              <a:spcAft>
+                <a:spcPts val="800"/>
+              </a:spcAft>
+            </a:pPr>
+            <a:r>
+              <a:rPr sz="1200">
+                <a:solidFill>
+                  <a:srgbClr val="1F2D5C"/>
+                </a:solidFill>
+                <a:latin typeface="Calibri"/>
+              </a:rPr>
+              <a:t>• RF + LGBM base, LR meta-learner</a:t>
+            </a:r>
+          </a:p>
+          <a:p>
+            <a:pPr algn="l">
+              <a:spcAft>
+                <a:spcPts val="800"/>
+              </a:spcAft>
+            </a:pPr>
+            <a:r>
+              <a:rPr sz="1200" b="0">
+                <a:solidFill>
+                  <a:srgbClr val="1F2D5C"/>
+                </a:solidFill>
+                <a:latin typeface="Calibri"/>
+              </a:rPr>
+              <a:t>AUC 0.841,  </a:t>
+            </a:r>
+            <a:r>
+              <a:rPr sz="1200" b="1">
+                <a:solidFill>
+                  <a:srgbClr val="1F2D5C"/>
+                </a:solidFill>
+                <a:latin typeface="Calibri"/>
+              </a:rPr>
+              <a:t>Recall 0.773 (highest)</a:t>
+            </a:r>
+          </a:p>
+          <a:p>
+            <a:pPr algn="l">
+              <a:spcAft>
+                <a:spcPts val="800"/>
+              </a:spcAft>
+            </a:pPr>
+            <a:r>
+              <a:rPr sz="1200">
+                <a:solidFill>
+                  <a:srgbClr val="1F2D5C"/>
+                </a:solidFill>
+                <a:latin typeface="Calibri"/>
+              </a:rPr>
+              <a:t>• Soft-vote: correlated errors  →  no AUC gain</a:t>
+            </a:r>
+          </a:p>
+          <a:p>
+            <a:pPr algn="l">
+              <a:spcAft>
+                <a:spcPts val="800"/>
+              </a:spcAft>
+            </a:pPr>
+            <a:r>
+              <a:rPr sz="1200" b="1">
+                <a:solidFill>
+                  <a:srgbClr val="1F2D5C"/>
+                </a:solidFill>
+                <a:latin typeface="Calibri"/>
+              </a:rPr>
+              <a:t>For maximum case detection: stacking</a:t>
+            </a:r>
+          </a:p>
+        </p:txBody>
+      </p:sp>
+      <p:sp>
+        <p:nvSpPr>
+          <p:cNvPr id="17" name="Rectangle 16"/>
+          <p:cNvSpPr/>
+          <p:nvPr/>
+        </p:nvSpPr>
+        <p:spPr>
+          <a:xfrm>
+            <a:off x="457200" y="5669280"/>
+            <a:ext cx="11247120" cy="777240"/>
+          </a:xfrm>
+          <a:prstGeom prst="rect">
+            <a:avLst/>
+          </a:prstGeom>
+          <a:solidFill>
+            <a:srgbClr val="F4F5F7"/>
+          </a:solidFill>
+          <a:ln>
+            <a:noFill/>
+          </a:ln>
+        </p:spPr>
+        <p:style>
+          <a:lnRef idx="1">
+            <a:schemeClr val="accent1"/>
+          </a:lnRef>
+          <a:fillRef idx="3">
+            <a:schemeClr val="accent1"/>
+          </a:fillRef>
+          <a:effectRef idx="2">
+            <a:schemeClr val="accent1"/>
+          </a:effectRef>
+          <a:fontRef idx="minor">
+            <a:schemeClr val="lt1"/>
+          </a:fontRef>
+        </p:style>
+        <p:txBody>
+          <a:bodyPr rtlCol="0" anchor="ctr"/>
+          <a:lstStyle/>
+          <a:p>
+            <a:pPr algn="ctr"/>
+          </a:p>
+        </p:txBody>
+      </p:sp>
+      <p:sp>
+        <p:nvSpPr>
+          <p:cNvPr id="18" name="TextBox 17"/>
+          <p:cNvSpPr txBox="1"/>
+          <p:nvPr/>
+        </p:nvSpPr>
+        <p:spPr>
+          <a:xfrm>
+            <a:off x="640080" y="5760720"/>
+            <a:ext cx="10972800" cy="365760"/>
+          </a:xfrm>
+          <a:prstGeom prst="rect">
+            <a:avLst/>
+          </a:prstGeom>
+          <a:noFill/>
+        </p:spPr>
+        <p:txBody>
+          <a:bodyPr wrap="square" lIns="45720" rIns="45720">
+            <a:spAutoFit/>
+          </a:bodyPr>
+          <a:lstStyle/>
+          <a:p>
+            <a:pPr algn="l"/>
+            <a:r>
+              <a:rPr sz="1200" b="1">
+                <a:solidFill>
+                  <a:srgbClr val="1F2D5C"/>
+                </a:solidFill>
+                <a:latin typeface="Calibri"/>
+              </a:rPr>
+              <a:t>Choosing the right model for the right use case</a:t>
+            </a:r>
+          </a:p>
+        </p:txBody>
+      </p:sp>
+      <p:sp>
+        <p:nvSpPr>
+          <p:cNvPr id="19" name="TextBox 18"/>
+          <p:cNvSpPr txBox="1"/>
+          <p:nvPr/>
+        </p:nvSpPr>
+        <p:spPr>
+          <a:xfrm>
+            <a:off x="640080" y="6053328"/>
+            <a:ext cx="10972800" cy="457200"/>
+          </a:xfrm>
+          <a:prstGeom prst="rect">
+            <a:avLst/>
+          </a:prstGeom>
+          <a:noFill/>
+        </p:spPr>
+        <p:txBody>
+          <a:bodyPr wrap="square" lIns="45720" rIns="45720">
+            <a:spAutoFit/>
+          </a:bodyPr>
+          <a:lstStyle/>
+          <a:p>
+            <a:pPr algn="l"/>
+            <a:r>
+              <a:rPr sz="1200" b="0">
+                <a:solidFill>
+                  <a:srgbClr val="555C66"/>
+                </a:solidFill>
+                <a:latin typeface="Calibri"/>
+              </a:rPr>
+              <a:t>Three deployment options match three clinical needs: best discrimination → RF tuned;  reliable probability → calibrated RF;  maximum recall → stacking ensemble.</a:t>
+            </a:r>
+          </a:p>
+        </p:txBody>
+      </p:sp>
+      <p:sp>
+        <p:nvSpPr>
+          <p:cNvPr id="20" name="TextBox 19"/>
           <p:cNvSpPr txBox="1"/>
           <p:nvPr/>
         </p:nvSpPr>
@@ -12881,7 +16257,7 @@
       </p:sp>
       <p:sp>
         <p:nvSpPr>
-          <p:cNvPr id="11" name="TextBox 10"/>
+          <p:cNvPr id="21" name="TextBox 20"/>
           <p:cNvSpPr txBox="1"/>
           <p:nvPr/>
         </p:nvSpPr>
@@ -12909,7 +16285,7 @@
                 </a:solidFill>
                 <a:latin typeface="Calibri"/>
               </a:rPr>
-              <a:t>9 / 12</a:t>
+              <a:t>9 / 14</a:t>
             </a:r>
           </a:p>
         </p:txBody>

--- a/presentation/ELSA_Depression_Prediction.pptx
+++ b/presentation/ELSA_Depression_Prediction.pptx
@@ -5,22 +5,22 @@
     <p:sldMasterId id="2147483648" r:id="rId1"/>
   </p:sldMasterIdLst>
   <p:sldIdLst>
-    <p:sldId id="256" r:id="rId7"/>
-    <p:sldId id="257" r:id="rId8"/>
-    <p:sldId id="258" r:id="rId9"/>
-    <p:sldId id="259" r:id="rId10"/>
-    <p:sldId id="260" r:id="rId11"/>
-    <p:sldId id="261" r:id="rId12"/>
-    <p:sldId id="262" r:id="rId13"/>
-    <p:sldId id="263" r:id="rId14"/>
-    <p:sldId id="264" r:id="rId15"/>
-    <p:sldId id="265" r:id="rId16"/>
-    <p:sldId id="266" r:id="rId17"/>
-    <p:sldId id="267" r:id="rId18"/>
-    <p:sldId id="268" r:id="rId19"/>
-    <p:sldId id="269" r:id="rId20"/>
+    <p:sldId id="256" r:id="rId2"/>
+    <p:sldId id="257" r:id="rId3"/>
+    <p:sldId id="258" r:id="rId4"/>
+    <p:sldId id="259" r:id="rId5"/>
+    <p:sldId id="260" r:id="rId6"/>
+    <p:sldId id="261" r:id="rId7"/>
+    <p:sldId id="262" r:id="rId8"/>
+    <p:sldId id="263" r:id="rId9"/>
+    <p:sldId id="264" r:id="rId10"/>
+    <p:sldId id="265" r:id="rId11"/>
+    <p:sldId id="266" r:id="rId12"/>
+    <p:sldId id="267" r:id="rId13"/>
+    <p:sldId id="268" r:id="rId14"/>
+    <p:sldId id="269" r:id="rId15"/>
   </p:sldIdLst>
-  <p:sldSz cx="12191695" cy="6858000" type="screen4x3"/>
+  <p:sldSz cx="12192000" cy="6858000"/>
   <p:notesSz cx="6858000" cy="9144000"/>
   <p:defaultTextStyle>
     <a:defPPr>
@@ -117,6 +117,22 @@
       </a:defRPr>
     </a:lvl9pPr>
   </p:defaultTextStyle>
+  <p:extLst>
+    <p:ext uri="{EFAFB233-063F-42B5-8137-9DF3F51BA10A}">
+      <p15:sldGuideLst xmlns:p15="http://schemas.microsoft.com/office/powerpoint/2012/main">
+        <p15:guide id="1" orient="horz" pos="2160">
+          <p15:clr>
+            <a:srgbClr val="A4A3A4"/>
+          </p15:clr>
+        </p15:guide>
+        <p15:guide id="2" pos="2880">
+          <p15:clr>
+            <a:srgbClr val="A4A3A4"/>
+          </p15:clr>
+        </p15:guide>
+      </p15:sldGuideLst>
+    </p:ext>
+  </p:extLst>
 </p:presentation>
 </file>
 
@@ -158,10 +174,9 @@
           <a:lstStyle/>
           <a:p>
             <a:r>
-              <a:rPr lang="en-US" smtClean="0"/>
+              <a:rPr lang="en-US"/>
               <a:t>Click to edit Master title style</a:t>
             </a:r>
-            <a:endParaRPr lang="en-US"/>
           </a:p>
         </p:txBody>
       </p:sp>
@@ -277,10 +292,9 @@
           </a:lstStyle>
           <a:p>
             <a:r>
-              <a:rPr lang="en-US" smtClean="0"/>
+              <a:rPr lang="en-US"/>
               <a:t>Click to edit Master subtitle style</a:t>
             </a:r>
-            <a:endParaRPr lang="en-US"/>
           </a:p>
         </p:txBody>
       </p:sp>
@@ -301,7 +315,7 @@
           <a:p>
             <a:fld id="{5BCAD085-E8A6-8845-BD4E-CB4CCA059FC4}" type="datetimeFigureOut">
               <a:rPr lang="en-US" smtClean="0"/>
-              <a:t>1/27/13</a:t>
+              <a:t>5/5/26</a:t>
             </a:fld>
             <a:endParaRPr lang="en-US"/>
           </a:p>
@@ -395,10 +409,9 @@
           <a:lstStyle/>
           <a:p>
             <a:r>
-              <a:rPr lang="en-US" smtClean="0"/>
+              <a:rPr lang="en-US"/>
               <a:t>Click to edit Master title style</a:t>
             </a:r>
-            <a:endParaRPr lang="en-US"/>
           </a:p>
         </p:txBody>
       </p:sp>
@@ -419,38 +432,37 @@
           <a:p>
             <a:pPr lvl="0"/>
             <a:r>
-              <a:rPr lang="en-US" smtClean="0"/>
+              <a:rPr lang="en-US"/>
               <a:t>Click to edit Master text styles</a:t>
             </a:r>
           </a:p>
           <a:p>
             <a:pPr lvl="1"/>
             <a:r>
-              <a:rPr lang="en-US" smtClean="0"/>
+              <a:rPr lang="en-US"/>
               <a:t>Second level</a:t>
             </a:r>
           </a:p>
           <a:p>
             <a:pPr lvl="2"/>
             <a:r>
-              <a:rPr lang="en-US" smtClean="0"/>
+              <a:rPr lang="en-US"/>
               <a:t>Third level</a:t>
             </a:r>
           </a:p>
           <a:p>
             <a:pPr lvl="3"/>
             <a:r>
-              <a:rPr lang="en-US" smtClean="0"/>
+              <a:rPr lang="en-US"/>
               <a:t>Fourth level</a:t>
             </a:r>
           </a:p>
           <a:p>
             <a:pPr lvl="4"/>
             <a:r>
-              <a:rPr lang="en-US" smtClean="0"/>
+              <a:rPr lang="en-US"/>
               <a:t>Fifth level</a:t>
             </a:r>
-            <a:endParaRPr lang="en-US"/>
           </a:p>
         </p:txBody>
       </p:sp>
@@ -471,7 +483,7 @@
           <a:p>
             <a:fld id="{5BCAD085-E8A6-8845-BD4E-CB4CCA059FC4}" type="datetimeFigureOut">
               <a:rPr lang="en-US" smtClean="0"/>
-              <a:t>1/27/13</a:t>
+              <a:t>5/5/26</a:t>
             </a:fld>
             <a:endParaRPr lang="en-US"/>
           </a:p>
@@ -570,10 +582,9 @@
           <a:lstStyle/>
           <a:p>
             <a:r>
-              <a:rPr lang="en-US" smtClean="0"/>
+              <a:rPr lang="en-US"/>
               <a:t>Click to edit Master title style</a:t>
             </a:r>
-            <a:endParaRPr lang="en-US"/>
           </a:p>
         </p:txBody>
       </p:sp>
@@ -599,38 +610,37 @@
           <a:p>
             <a:pPr lvl="0"/>
             <a:r>
-              <a:rPr lang="en-US" smtClean="0"/>
+              <a:rPr lang="en-US"/>
               <a:t>Click to edit Master text styles</a:t>
             </a:r>
           </a:p>
           <a:p>
             <a:pPr lvl="1"/>
             <a:r>
-              <a:rPr lang="en-US" smtClean="0"/>
+              <a:rPr lang="en-US"/>
               <a:t>Second level</a:t>
             </a:r>
           </a:p>
           <a:p>
             <a:pPr lvl="2"/>
             <a:r>
-              <a:rPr lang="en-US" smtClean="0"/>
+              <a:rPr lang="en-US"/>
               <a:t>Third level</a:t>
             </a:r>
           </a:p>
           <a:p>
             <a:pPr lvl="3"/>
             <a:r>
-              <a:rPr lang="en-US" smtClean="0"/>
+              <a:rPr lang="en-US"/>
               <a:t>Fourth level</a:t>
             </a:r>
           </a:p>
           <a:p>
             <a:pPr lvl="4"/>
             <a:r>
-              <a:rPr lang="en-US" smtClean="0"/>
+              <a:rPr lang="en-US"/>
               <a:t>Fifth level</a:t>
             </a:r>
-            <a:endParaRPr lang="en-US"/>
           </a:p>
         </p:txBody>
       </p:sp>
@@ -651,7 +661,7 @@
           <a:p>
             <a:fld id="{5BCAD085-E8A6-8845-BD4E-CB4CCA059FC4}" type="datetimeFigureOut">
               <a:rPr lang="en-US" smtClean="0"/>
-              <a:t>1/27/13</a:t>
+              <a:t>5/5/26</a:t>
             </a:fld>
             <a:endParaRPr lang="en-US"/>
           </a:p>
@@ -745,10 +755,9 @@
           <a:lstStyle/>
           <a:p>
             <a:r>
-              <a:rPr lang="en-US" smtClean="0"/>
+              <a:rPr lang="en-US"/>
               <a:t>Click to edit Master title style</a:t>
             </a:r>
-            <a:endParaRPr lang="en-US"/>
           </a:p>
         </p:txBody>
       </p:sp>
@@ -769,38 +778,37 @@
           <a:p>
             <a:pPr lvl="0"/>
             <a:r>
-              <a:rPr lang="en-US" smtClean="0"/>
+              <a:rPr lang="en-US"/>
               <a:t>Click to edit Master text styles</a:t>
             </a:r>
           </a:p>
           <a:p>
             <a:pPr lvl="1"/>
             <a:r>
-              <a:rPr lang="en-US" smtClean="0"/>
+              <a:rPr lang="en-US"/>
               <a:t>Second level</a:t>
             </a:r>
           </a:p>
           <a:p>
             <a:pPr lvl="2"/>
             <a:r>
-              <a:rPr lang="en-US" smtClean="0"/>
+              <a:rPr lang="en-US"/>
               <a:t>Third level</a:t>
             </a:r>
           </a:p>
           <a:p>
             <a:pPr lvl="3"/>
             <a:r>
-              <a:rPr lang="en-US" smtClean="0"/>
+              <a:rPr lang="en-US"/>
               <a:t>Fourth level</a:t>
             </a:r>
           </a:p>
           <a:p>
             <a:pPr lvl="4"/>
             <a:r>
-              <a:rPr lang="en-US" smtClean="0"/>
+              <a:rPr lang="en-US"/>
               <a:t>Fifth level</a:t>
             </a:r>
-            <a:endParaRPr lang="en-US"/>
           </a:p>
         </p:txBody>
       </p:sp>
@@ -821,7 +829,7 @@
           <a:p>
             <a:fld id="{5BCAD085-E8A6-8845-BD4E-CB4CCA059FC4}" type="datetimeFigureOut">
               <a:rPr lang="en-US" smtClean="0"/>
-              <a:t>1/27/13</a:t>
+              <a:t>5/5/26</a:t>
             </a:fld>
             <a:endParaRPr lang="en-US"/>
           </a:p>
@@ -924,10 +932,9 @@
           </a:lstStyle>
           <a:p>
             <a:r>
-              <a:rPr lang="en-US" smtClean="0"/>
+              <a:rPr lang="en-US"/>
               <a:t>Click to edit Master title style</a:t>
             </a:r>
-            <a:endParaRPr lang="en-US"/>
           </a:p>
         </p:txBody>
       </p:sp>
@@ -1044,7 +1051,7 @@
           <a:p>
             <a:pPr lvl="0"/>
             <a:r>
-              <a:rPr lang="en-US" smtClean="0"/>
+              <a:rPr lang="en-US"/>
               <a:t>Click to edit Master text styles</a:t>
             </a:r>
           </a:p>
@@ -1067,7 +1074,7 @@
           <a:p>
             <a:fld id="{5BCAD085-E8A6-8845-BD4E-CB4CCA059FC4}" type="datetimeFigureOut">
               <a:rPr lang="en-US" smtClean="0"/>
-              <a:t>1/27/13</a:t>
+              <a:t>5/5/26</a:t>
             </a:fld>
             <a:endParaRPr lang="en-US"/>
           </a:p>
@@ -1161,10 +1168,9 @@
           <a:lstStyle/>
           <a:p>
             <a:r>
-              <a:rPr lang="en-US" smtClean="0"/>
+              <a:rPr lang="en-US"/>
               <a:t>Click to edit Master title style</a:t>
             </a:r>
-            <a:endParaRPr lang="en-US"/>
           </a:p>
         </p:txBody>
       </p:sp>
@@ -1218,38 +1224,37 @@
           <a:p>
             <a:pPr lvl="0"/>
             <a:r>
-              <a:rPr lang="en-US" smtClean="0"/>
+              <a:rPr lang="en-US"/>
               <a:t>Click to edit Master text styles</a:t>
             </a:r>
           </a:p>
           <a:p>
             <a:pPr lvl="1"/>
             <a:r>
-              <a:rPr lang="en-US" smtClean="0"/>
+              <a:rPr lang="en-US"/>
               <a:t>Second level</a:t>
             </a:r>
           </a:p>
           <a:p>
             <a:pPr lvl="2"/>
             <a:r>
-              <a:rPr lang="en-US" smtClean="0"/>
+              <a:rPr lang="en-US"/>
               <a:t>Third level</a:t>
             </a:r>
           </a:p>
           <a:p>
             <a:pPr lvl="3"/>
             <a:r>
-              <a:rPr lang="en-US" smtClean="0"/>
+              <a:rPr lang="en-US"/>
               <a:t>Fourth level</a:t>
             </a:r>
           </a:p>
           <a:p>
             <a:pPr lvl="4"/>
             <a:r>
-              <a:rPr lang="en-US" smtClean="0"/>
+              <a:rPr lang="en-US"/>
               <a:t>Fifth level</a:t>
             </a:r>
-            <a:endParaRPr lang="en-US"/>
           </a:p>
         </p:txBody>
       </p:sp>
@@ -1303,38 +1308,37 @@
           <a:p>
             <a:pPr lvl="0"/>
             <a:r>
-              <a:rPr lang="en-US" smtClean="0"/>
+              <a:rPr lang="en-US"/>
               <a:t>Click to edit Master text styles</a:t>
             </a:r>
           </a:p>
           <a:p>
             <a:pPr lvl="1"/>
             <a:r>
-              <a:rPr lang="en-US" smtClean="0"/>
+              <a:rPr lang="en-US"/>
               <a:t>Second level</a:t>
             </a:r>
           </a:p>
           <a:p>
             <a:pPr lvl="2"/>
             <a:r>
-              <a:rPr lang="en-US" smtClean="0"/>
+              <a:rPr lang="en-US"/>
               <a:t>Third level</a:t>
             </a:r>
           </a:p>
           <a:p>
             <a:pPr lvl="3"/>
             <a:r>
-              <a:rPr lang="en-US" smtClean="0"/>
+              <a:rPr lang="en-US"/>
               <a:t>Fourth level</a:t>
             </a:r>
           </a:p>
           <a:p>
             <a:pPr lvl="4"/>
             <a:r>
-              <a:rPr lang="en-US" smtClean="0"/>
+              <a:rPr lang="en-US"/>
               <a:t>Fifth level</a:t>
             </a:r>
-            <a:endParaRPr lang="en-US"/>
           </a:p>
         </p:txBody>
       </p:sp>
@@ -1355,7 +1359,7 @@
           <a:p>
             <a:fld id="{5BCAD085-E8A6-8845-BD4E-CB4CCA059FC4}" type="datetimeFigureOut">
               <a:rPr lang="en-US" smtClean="0"/>
-              <a:t>1/27/13</a:t>
+              <a:t>5/5/26</a:t>
             </a:fld>
             <a:endParaRPr lang="en-US"/>
           </a:p>
@@ -1453,10 +1457,9 @@
           </a:lstStyle>
           <a:p>
             <a:r>
-              <a:rPr lang="en-US" smtClean="0"/>
+              <a:rPr lang="en-US"/>
               <a:t>Click to edit Master title style</a:t>
             </a:r>
-            <a:endParaRPr lang="en-US"/>
           </a:p>
         </p:txBody>
       </p:sp>
@@ -1519,7 +1522,7 @@
           <a:p>
             <a:pPr lvl="0"/>
             <a:r>
-              <a:rPr lang="en-US" smtClean="0"/>
+              <a:rPr lang="en-US"/>
               <a:t>Click to edit Master text styles</a:t>
             </a:r>
           </a:p>
@@ -1575,38 +1578,37 @@
           <a:p>
             <a:pPr lvl="0"/>
             <a:r>
-              <a:rPr lang="en-US" smtClean="0"/>
+              <a:rPr lang="en-US"/>
               <a:t>Click to edit Master text styles</a:t>
             </a:r>
           </a:p>
           <a:p>
             <a:pPr lvl="1"/>
             <a:r>
-              <a:rPr lang="en-US" smtClean="0"/>
+              <a:rPr lang="en-US"/>
               <a:t>Second level</a:t>
             </a:r>
           </a:p>
           <a:p>
             <a:pPr lvl="2"/>
             <a:r>
-              <a:rPr lang="en-US" smtClean="0"/>
+              <a:rPr lang="en-US"/>
               <a:t>Third level</a:t>
             </a:r>
           </a:p>
           <a:p>
             <a:pPr lvl="3"/>
             <a:r>
-              <a:rPr lang="en-US" smtClean="0"/>
+              <a:rPr lang="en-US"/>
               <a:t>Fourth level</a:t>
             </a:r>
           </a:p>
           <a:p>
             <a:pPr lvl="4"/>
             <a:r>
-              <a:rPr lang="en-US" smtClean="0"/>
+              <a:rPr lang="en-US"/>
               <a:t>Fifth level</a:t>
             </a:r>
-            <a:endParaRPr lang="en-US"/>
           </a:p>
         </p:txBody>
       </p:sp>
@@ -1669,7 +1671,7 @@
           <a:p>
             <a:pPr lvl="0"/>
             <a:r>
-              <a:rPr lang="en-US" smtClean="0"/>
+              <a:rPr lang="en-US"/>
               <a:t>Click to edit Master text styles</a:t>
             </a:r>
           </a:p>
@@ -1725,38 +1727,37 @@
           <a:p>
             <a:pPr lvl="0"/>
             <a:r>
-              <a:rPr lang="en-US" smtClean="0"/>
+              <a:rPr lang="en-US"/>
               <a:t>Click to edit Master text styles</a:t>
             </a:r>
           </a:p>
           <a:p>
             <a:pPr lvl="1"/>
             <a:r>
-              <a:rPr lang="en-US" smtClean="0"/>
+              <a:rPr lang="en-US"/>
               <a:t>Second level</a:t>
             </a:r>
           </a:p>
           <a:p>
             <a:pPr lvl="2"/>
             <a:r>
-              <a:rPr lang="en-US" smtClean="0"/>
+              <a:rPr lang="en-US"/>
               <a:t>Third level</a:t>
             </a:r>
           </a:p>
           <a:p>
             <a:pPr lvl="3"/>
             <a:r>
-              <a:rPr lang="en-US" smtClean="0"/>
+              <a:rPr lang="en-US"/>
               <a:t>Fourth level</a:t>
             </a:r>
           </a:p>
           <a:p>
             <a:pPr lvl="4"/>
             <a:r>
-              <a:rPr lang="en-US" smtClean="0"/>
+              <a:rPr lang="en-US"/>
               <a:t>Fifth level</a:t>
             </a:r>
-            <a:endParaRPr lang="en-US"/>
           </a:p>
         </p:txBody>
       </p:sp>
@@ -1777,7 +1778,7 @@
           <a:p>
             <a:fld id="{5BCAD085-E8A6-8845-BD4E-CB4CCA059FC4}" type="datetimeFigureOut">
               <a:rPr lang="en-US" smtClean="0"/>
-              <a:t>1/27/13</a:t>
+              <a:t>5/5/26</a:t>
             </a:fld>
             <a:endParaRPr lang="en-US"/>
           </a:p>
@@ -1871,10 +1872,9 @@
           <a:lstStyle/>
           <a:p>
             <a:r>
-              <a:rPr lang="en-US" smtClean="0"/>
+              <a:rPr lang="en-US"/>
               <a:t>Click to edit Master title style</a:t>
             </a:r>
-            <a:endParaRPr lang="en-US"/>
           </a:p>
         </p:txBody>
       </p:sp>
@@ -1895,7 +1895,7 @@
           <a:p>
             <a:fld id="{5BCAD085-E8A6-8845-BD4E-CB4CCA059FC4}" type="datetimeFigureOut">
               <a:rPr lang="en-US" smtClean="0"/>
-              <a:t>1/27/13</a:t>
+              <a:t>5/5/26</a:t>
             </a:fld>
             <a:endParaRPr lang="en-US"/>
           </a:p>
@@ -1990,7 +1990,7 @@
           <a:p>
             <a:fld id="{5BCAD085-E8A6-8845-BD4E-CB4CCA059FC4}" type="datetimeFigureOut">
               <a:rPr lang="en-US" smtClean="0"/>
-              <a:t>1/27/13</a:t>
+              <a:t>5/5/26</a:t>
             </a:fld>
             <a:endParaRPr lang="en-US"/>
           </a:p>
@@ -2093,10 +2093,9 @@
           </a:lstStyle>
           <a:p>
             <a:r>
-              <a:rPr lang="en-US" smtClean="0"/>
+              <a:rPr lang="en-US"/>
               <a:t>Click to edit Master title style</a:t>
             </a:r>
-            <a:endParaRPr lang="en-US"/>
           </a:p>
         </p:txBody>
       </p:sp>
@@ -2150,38 +2149,37 @@
           <a:p>
             <a:pPr lvl="0"/>
             <a:r>
-              <a:rPr lang="en-US" smtClean="0"/>
+              <a:rPr lang="en-US"/>
               <a:t>Click to edit Master text styles</a:t>
             </a:r>
           </a:p>
           <a:p>
             <a:pPr lvl="1"/>
             <a:r>
-              <a:rPr lang="en-US" smtClean="0"/>
+              <a:rPr lang="en-US"/>
               <a:t>Second level</a:t>
             </a:r>
           </a:p>
           <a:p>
             <a:pPr lvl="2"/>
             <a:r>
-              <a:rPr lang="en-US" smtClean="0"/>
+              <a:rPr lang="en-US"/>
               <a:t>Third level</a:t>
             </a:r>
           </a:p>
           <a:p>
             <a:pPr lvl="3"/>
             <a:r>
-              <a:rPr lang="en-US" smtClean="0"/>
+              <a:rPr lang="en-US"/>
               <a:t>Fourth level</a:t>
             </a:r>
           </a:p>
           <a:p>
             <a:pPr lvl="4"/>
             <a:r>
-              <a:rPr lang="en-US" smtClean="0"/>
+              <a:rPr lang="en-US"/>
               <a:t>Fifth level</a:t>
             </a:r>
-            <a:endParaRPr lang="en-US"/>
           </a:p>
         </p:txBody>
       </p:sp>
@@ -2244,7 +2242,7 @@
           <a:p>
             <a:pPr lvl="0"/>
             <a:r>
-              <a:rPr lang="en-US" smtClean="0"/>
+              <a:rPr lang="en-US"/>
               <a:t>Click to edit Master text styles</a:t>
             </a:r>
           </a:p>
@@ -2267,7 +2265,7 @@
           <a:p>
             <a:fld id="{5BCAD085-E8A6-8845-BD4E-CB4CCA059FC4}" type="datetimeFigureOut">
               <a:rPr lang="en-US" smtClean="0"/>
-              <a:t>1/27/13</a:t>
+              <a:t>5/5/26</a:t>
             </a:fld>
             <a:endParaRPr lang="en-US"/>
           </a:p>
@@ -2370,10 +2368,9 @@
           </a:lstStyle>
           <a:p>
             <a:r>
-              <a:rPr lang="en-US" smtClean="0"/>
+              <a:rPr lang="en-US"/>
               <a:t>Click to edit Master title style</a:t>
             </a:r>
-            <a:endParaRPr lang="en-US"/>
           </a:p>
         </p:txBody>
       </p:sp>
@@ -2497,7 +2494,7 @@
           <a:p>
             <a:pPr lvl="0"/>
             <a:r>
-              <a:rPr lang="en-US" smtClean="0"/>
+              <a:rPr lang="en-US"/>
               <a:t>Click to edit Master text styles</a:t>
             </a:r>
           </a:p>
@@ -2520,7 +2517,7 @@
           <a:p>
             <a:fld id="{5BCAD085-E8A6-8845-BD4E-CB4CCA059FC4}" type="datetimeFigureOut">
               <a:rPr lang="en-US" smtClean="0"/>
-              <a:t>1/27/13</a:t>
+              <a:t>5/5/26</a:t>
             </a:fld>
             <a:endParaRPr lang="en-US"/>
           </a:p>
@@ -2629,10 +2626,9 @@
           <a:lstStyle/>
           <a:p>
             <a:r>
-              <a:rPr lang="en-US" smtClean="0"/>
+              <a:rPr lang="en-US"/>
               <a:t>Click to edit Master title style</a:t>
             </a:r>
-            <a:endParaRPr lang="en-US"/>
           </a:p>
         </p:txBody>
       </p:sp>
@@ -2663,38 +2659,37 @@
           <a:p>
             <a:pPr lvl="0"/>
             <a:r>
-              <a:rPr lang="en-US" smtClean="0"/>
+              <a:rPr lang="en-US"/>
               <a:t>Click to edit Master text styles</a:t>
             </a:r>
           </a:p>
           <a:p>
             <a:pPr lvl="1"/>
             <a:r>
-              <a:rPr lang="en-US" smtClean="0"/>
+              <a:rPr lang="en-US"/>
               <a:t>Second level</a:t>
             </a:r>
           </a:p>
           <a:p>
             <a:pPr lvl="2"/>
             <a:r>
-              <a:rPr lang="en-US" smtClean="0"/>
+              <a:rPr lang="en-US"/>
               <a:t>Third level</a:t>
             </a:r>
           </a:p>
           <a:p>
             <a:pPr lvl="3"/>
             <a:r>
-              <a:rPr lang="en-US" smtClean="0"/>
+              <a:rPr lang="en-US"/>
               <a:t>Fourth level</a:t>
             </a:r>
           </a:p>
           <a:p>
             <a:pPr lvl="4"/>
             <a:r>
-              <a:rPr lang="en-US" smtClean="0"/>
+              <a:rPr lang="en-US"/>
               <a:t>Fifth level</a:t>
             </a:r>
-            <a:endParaRPr lang="en-US"/>
           </a:p>
         </p:txBody>
       </p:sp>
@@ -2733,7 +2728,7 @@
           <a:p>
             <a:fld id="{5BCAD085-E8A6-8845-BD4E-CB4CCA059FC4}" type="datetimeFigureOut">
               <a:rPr lang="en-US" smtClean="0"/>
-              <a:t>1/27/13</a:t>
+              <a:t>5/5/26</a:t>
             </a:fld>
             <a:endParaRPr lang="en-US"/>
           </a:p>
@@ -3092,7 +3087,7 @@
 </file>
 
 <file path=ppt/slides/slide1.xml><?xml version="1.0" encoding="utf-8"?>
-<p:sld xmlns:a="http://schemas.openxmlformats.org/drawingml/2006/main" xmlns:p="http://schemas.openxmlformats.org/presentationml/2006/main" xmlns:r="http://schemas.openxmlformats.org/officeDocument/2006/relationships">
+<p:sld xmlns:a="http://schemas.openxmlformats.org/drawingml/2006/main" xmlns:r="http://schemas.openxmlformats.org/officeDocument/2006/relationships" xmlns:p="http://schemas.openxmlformats.org/presentationml/2006/main">
   <p:cSld>
     <p:spTree>
       <p:nvGrpSpPr>
@@ -3100,7 +3095,14 @@
         <p:cNvGrpSpPr/>
         <p:nvPr/>
       </p:nvGrpSpPr>
-      <p:grpSpPr/>
+      <p:grpSpPr>
+        <a:xfrm>
+          <a:off x="0" y="0"/>
+          <a:ext cx="0" cy="0"/>
+          <a:chOff x="0" y="0"/>
+          <a:chExt cx="0" cy="0"/>
+        </a:xfrm>
+      </p:grpSpPr>
       <p:sp>
         <p:nvSpPr>
           <p:cNvPr id="2" name="Rectangle 1"/>
@@ -3141,6 +3143,7 @@
           <a:lstStyle/>
           <a:p>
             <a:pPr algn="ctr"/>
+            <a:endParaRPr/>
           </a:p>
         </p:txBody>
       </p:sp>
@@ -3184,6 +3187,7 @@
           <a:lstStyle/>
           <a:p>
             <a:pPr algn="ctr"/>
+            <a:endParaRPr/>
           </a:p>
         </p:txBody>
       </p:sp>
@@ -3371,7 +3375,7 @@
 </file>
 
 <file path=ppt/slides/slide10.xml><?xml version="1.0" encoding="utf-8"?>
-<p:sld xmlns:a="http://schemas.openxmlformats.org/drawingml/2006/main" xmlns:p="http://schemas.openxmlformats.org/presentationml/2006/main" xmlns:r="http://schemas.openxmlformats.org/officeDocument/2006/relationships">
+<p:sld xmlns:a="http://schemas.openxmlformats.org/drawingml/2006/main" xmlns:r="http://schemas.openxmlformats.org/officeDocument/2006/relationships" xmlns:p="http://schemas.openxmlformats.org/presentationml/2006/main">
   <p:cSld>
     <p:spTree>
       <p:nvGrpSpPr>
@@ -3379,7 +3383,14 @@
         <p:cNvGrpSpPr/>
         <p:nvPr/>
       </p:nvGrpSpPr>
-      <p:grpSpPr/>
+      <p:grpSpPr>
+        <a:xfrm>
+          <a:off x="0" y="0"/>
+          <a:ext cx="0" cy="0"/>
+          <a:chOff x="0" y="0"/>
+          <a:chExt cx="0" cy="0"/>
+        </a:xfrm>
+      </p:grpSpPr>
       <p:sp>
         <p:nvSpPr>
           <p:cNvPr id="2" name="Rectangle 1"/>
@@ -3420,6 +3431,7 @@
           <a:lstStyle/>
           <a:p>
             <a:pPr algn="ctr"/>
+            <a:endParaRPr/>
           </a:p>
         </p:txBody>
       </p:sp>
@@ -3903,7 +3915,7 @@
 </file>
 
 <file path=ppt/slides/slide11.xml><?xml version="1.0" encoding="utf-8"?>
-<p:sld xmlns:a="http://schemas.openxmlformats.org/drawingml/2006/main" xmlns:p="http://schemas.openxmlformats.org/presentationml/2006/main" xmlns:r="http://schemas.openxmlformats.org/officeDocument/2006/relationships">
+<p:sld xmlns:a="http://schemas.openxmlformats.org/drawingml/2006/main" xmlns:r="http://schemas.openxmlformats.org/officeDocument/2006/relationships" xmlns:p="http://schemas.openxmlformats.org/presentationml/2006/main">
   <p:cSld>
     <p:spTree>
       <p:nvGrpSpPr>
@@ -3911,7 +3923,14 @@
         <p:cNvGrpSpPr/>
         <p:nvPr/>
       </p:nvGrpSpPr>
-      <p:grpSpPr/>
+      <p:grpSpPr>
+        <a:xfrm>
+          <a:off x="0" y="0"/>
+          <a:ext cx="0" cy="0"/>
+          <a:chOff x="0" y="0"/>
+          <a:chExt cx="0" cy="0"/>
+        </a:xfrm>
+      </p:grpSpPr>
       <p:sp>
         <p:nvSpPr>
           <p:cNvPr id="2" name="Rectangle 1"/>
@@ -3952,6 +3971,7 @@
           <a:lstStyle/>
           <a:p>
             <a:pPr algn="ctr"/>
+            <a:endParaRPr/>
           </a:p>
         </p:txBody>
       </p:sp>
@@ -4100,6 +4120,7 @@
           <a:lstStyle/>
           <a:p>
             <a:pPr algn="ctr"/>
+            <a:endParaRPr/>
           </a:p>
         </p:txBody>
       </p:sp>
@@ -4283,6 +4304,7 @@
           <a:lstStyle/>
           <a:p>
             <a:pPr algn="ctr"/>
+            <a:endParaRPr/>
           </a:p>
         </p:txBody>
       </p:sp>
@@ -4466,6 +4488,7 @@
           <a:lstStyle/>
           <a:p>
             <a:pPr algn="ctr"/>
+            <a:endParaRPr/>
           </a:p>
         </p:txBody>
       </p:sp>
@@ -4649,6 +4672,7 @@
           <a:lstStyle/>
           <a:p>
             <a:pPr algn="ctr"/>
+            <a:endParaRPr/>
           </a:p>
         </p:txBody>
       </p:sp>
@@ -4832,6 +4856,7 @@
           <a:lstStyle/>
           <a:p>
             <a:pPr algn="ctr"/>
+            <a:endParaRPr/>
           </a:p>
         </p:txBody>
       </p:sp>
@@ -5015,6 +5040,7 @@
           <a:lstStyle/>
           <a:p>
             <a:pPr algn="ctr"/>
+            <a:endParaRPr/>
           </a:p>
         </p:txBody>
       </p:sp>
@@ -5198,6 +5224,7 @@
           <a:lstStyle/>
           <a:p>
             <a:pPr algn="ctr"/>
+            <a:endParaRPr/>
           </a:p>
         </p:txBody>
       </p:sp>
@@ -5451,6 +5478,7 @@
           <a:lstStyle/>
           <a:p>
             <a:pPr algn="ctr"/>
+            <a:endParaRPr/>
           </a:p>
         </p:txBody>
       </p:sp>
@@ -6108,6 +6136,7 @@
           <a:lstStyle/>
           <a:p>
             <a:pPr algn="ctr"/>
+            <a:endParaRPr/>
           </a:p>
         </p:txBody>
       </p:sp>
@@ -6225,7 +6254,7 @@
 </file>
 
 <file path=ppt/slides/slide12.xml><?xml version="1.0" encoding="utf-8"?>
-<p:sld xmlns:a="http://schemas.openxmlformats.org/drawingml/2006/main" xmlns:p="http://schemas.openxmlformats.org/presentationml/2006/main" xmlns:r="http://schemas.openxmlformats.org/officeDocument/2006/relationships">
+<p:sld xmlns:a="http://schemas.openxmlformats.org/drawingml/2006/main" xmlns:r="http://schemas.openxmlformats.org/officeDocument/2006/relationships" xmlns:p="http://schemas.openxmlformats.org/presentationml/2006/main">
   <p:cSld>
     <p:spTree>
       <p:nvGrpSpPr>
@@ -6233,7 +6262,14 @@
         <p:cNvGrpSpPr/>
         <p:nvPr/>
       </p:nvGrpSpPr>
-      <p:grpSpPr/>
+      <p:grpSpPr>
+        <a:xfrm>
+          <a:off x="0" y="0"/>
+          <a:ext cx="0" cy="0"/>
+          <a:chOff x="0" y="0"/>
+          <a:chExt cx="0" cy="0"/>
+        </a:xfrm>
+      </p:grpSpPr>
       <p:sp>
         <p:nvSpPr>
           <p:cNvPr id="2" name="Rectangle 1"/>
@@ -6274,6 +6310,7 @@
           <a:lstStyle/>
           <a:p>
             <a:pPr algn="ctr"/>
+            <a:endParaRPr/>
           </a:p>
         </p:txBody>
       </p:sp>
@@ -6363,8 +6400,8 @@
         </p:blipFill>
         <p:spPr>
           <a:xfrm>
-            <a:off x="457200" y="1280160"/>
-            <a:ext cx="9179859" cy="3657600"/>
+            <a:off x="457201" y="1451025"/>
+            <a:ext cx="7381248" cy="2940966"/>
           </a:xfrm>
           <a:prstGeom prst="rect">
             <a:avLst/>
@@ -6379,7 +6416,7 @@
         </p:nvSpPr>
         <p:spPr>
           <a:xfrm>
-            <a:off x="6858000" y="1280160"/>
+            <a:off x="8696123" y="1249432"/>
             <a:ext cx="5120640" cy="365760"/>
           </a:xfrm>
           <a:prstGeom prst="rect">
@@ -6395,7 +6432,7 @@
           <a:p>
             <a:pPr algn="l"/>
             <a:r>
-              <a:rPr sz="1800" b="1">
+              <a:rPr sz="1800" b="1" dirty="0">
                 <a:solidFill>
                   <a:srgbClr val="186F82"/>
                 </a:solidFill>
@@ -6414,8 +6451,8 @@
         </p:nvSpPr>
         <p:spPr>
           <a:xfrm>
-            <a:off x="6858000" y="1691640"/>
-            <a:ext cx="5120640" cy="1828800"/>
+            <a:off x="7838449" y="1692584"/>
+            <a:ext cx="4586886" cy="802784"/>
           </a:xfrm>
           <a:prstGeom prst="rect">
             <a:avLst/>
@@ -6434,7 +6471,7 @@
               </a:spcAft>
             </a:pPr>
             <a:r>
-              <a:rPr sz="1400">
+              <a:rPr sz="1400" dirty="0">
                 <a:solidFill>
                   <a:srgbClr val="1F2D5C"/>
                 </a:solidFill>
@@ -6450,7 +6487,7 @@
               </a:spcAft>
             </a:pPr>
             <a:r>
-              <a:rPr sz="1400">
+              <a:rPr sz="1400" dirty="0">
                 <a:solidFill>
                   <a:srgbClr val="1F2D5C"/>
                 </a:solidFill>
@@ -6469,7 +6506,7 @@
         </p:nvSpPr>
         <p:spPr>
           <a:xfrm>
-            <a:off x="6858000" y="3108960"/>
+            <a:off x="7955280" y="2724912"/>
             <a:ext cx="5120640" cy="365760"/>
           </a:xfrm>
           <a:prstGeom prst="rect">
@@ -6485,7 +6522,7 @@
           <a:p>
             <a:pPr algn="l"/>
             <a:r>
-              <a:rPr sz="1800" b="1">
+              <a:rPr sz="1800" b="1" dirty="0">
                 <a:solidFill>
                   <a:srgbClr val="E56B5C"/>
                 </a:solidFill>
@@ -6504,7 +6541,7 @@
         </p:nvSpPr>
         <p:spPr>
           <a:xfrm>
-            <a:off x="6858000" y="3520440"/>
+            <a:off x="7911440" y="3168396"/>
             <a:ext cx="5120640" cy="2286000"/>
           </a:xfrm>
           <a:prstGeom prst="rect">
@@ -6524,7 +6561,7 @@
               </a:spcAft>
             </a:pPr>
             <a:r>
-              <a:rPr sz="1300" b="1">
+              <a:rPr sz="1300" b="1" dirty="0">
                 <a:solidFill>
                   <a:srgbClr val="1F2D5C"/>
                 </a:solidFill>
@@ -6533,7 +6570,7 @@
               <a:t>AUC 0.848 → 0.773</a:t>
             </a:r>
             <a:r>
-              <a:rPr sz="1300" b="0">
+              <a:rPr sz="1300" b="0" dirty="0">
                 <a:solidFill>
                   <a:srgbClr val="1F2D5C"/>
                 </a:solidFill>
@@ -6549,7 +6586,7 @@
               </a:spcAft>
             </a:pPr>
             <a:r>
-              <a:rPr sz="1300">
+              <a:rPr sz="1300" dirty="0">
                 <a:solidFill>
                   <a:srgbClr val="1F2D5C"/>
                 </a:solidFill>
@@ -6565,7 +6602,7 @@
               </a:spcAft>
             </a:pPr>
             <a:r>
-              <a:rPr sz="1300">
+              <a:rPr sz="1300" dirty="0">
                 <a:solidFill>
                   <a:srgbClr val="1F2D5C"/>
                 </a:solidFill>
@@ -6581,7 +6618,7 @@
               </a:spcAft>
             </a:pPr>
             <a:r>
-              <a:rPr sz="1300" b="0">
+              <a:rPr sz="1300" b="0" dirty="0">
                 <a:solidFill>
                   <a:srgbClr val="1F2D5C"/>
                 </a:solidFill>
@@ -6590,7 +6627,7 @@
               <a:t>Achieved with </a:t>
             </a:r>
             <a:r>
-              <a:rPr sz="1300" b="1">
+              <a:rPr sz="1300" b="1" dirty="0">
                 <a:solidFill>
                   <a:srgbClr val="1F2D5C"/>
                 </a:solidFill>
@@ -6641,6 +6678,7 @@
           <a:lstStyle/>
           <a:p>
             <a:pPr algn="ctr"/>
+            <a:endParaRPr/>
           </a:p>
         </p:txBody>
       </p:sp>
@@ -6793,7 +6831,7 @@
 </file>
 
 <file path=ppt/slides/slide13.xml><?xml version="1.0" encoding="utf-8"?>
-<p:sld xmlns:a="http://schemas.openxmlformats.org/drawingml/2006/main" xmlns:p="http://schemas.openxmlformats.org/presentationml/2006/main" xmlns:r="http://schemas.openxmlformats.org/officeDocument/2006/relationships">
+<p:sld xmlns:a="http://schemas.openxmlformats.org/drawingml/2006/main" xmlns:r="http://schemas.openxmlformats.org/officeDocument/2006/relationships" xmlns:p="http://schemas.openxmlformats.org/presentationml/2006/main">
   <p:cSld>
     <p:spTree>
       <p:nvGrpSpPr>
@@ -6801,7 +6839,14 @@
         <p:cNvGrpSpPr/>
         <p:nvPr/>
       </p:nvGrpSpPr>
-      <p:grpSpPr/>
+      <p:grpSpPr>
+        <a:xfrm>
+          <a:off x="0" y="0"/>
+          <a:ext cx="0" cy="0"/>
+          <a:chOff x="0" y="0"/>
+          <a:chExt cx="0" cy="0"/>
+        </a:xfrm>
+      </p:grpSpPr>
       <p:sp>
         <p:nvSpPr>
           <p:cNvPr id="2" name="Rectangle 1"/>
@@ -6842,6 +6887,7 @@
           <a:lstStyle/>
           <a:p>
             <a:pPr algn="ctr"/>
+            <a:endParaRPr/>
           </a:p>
         </p:txBody>
       </p:sp>
@@ -7294,6 +7340,7 @@
           <a:lstStyle/>
           <a:p>
             <a:pPr algn="ctr"/>
+            <a:endParaRPr/>
           </a:p>
         </p:txBody>
       </p:sp>
@@ -7446,7 +7493,7 @@
 </file>
 
 <file path=ppt/slides/slide14.xml><?xml version="1.0" encoding="utf-8"?>
-<p:sld xmlns:a="http://schemas.openxmlformats.org/drawingml/2006/main" xmlns:p="http://schemas.openxmlformats.org/presentationml/2006/main" xmlns:r="http://schemas.openxmlformats.org/officeDocument/2006/relationships">
+<p:sld xmlns:a="http://schemas.openxmlformats.org/drawingml/2006/main" xmlns:r="http://schemas.openxmlformats.org/officeDocument/2006/relationships" xmlns:p="http://schemas.openxmlformats.org/presentationml/2006/main">
   <p:cSld>
     <p:spTree>
       <p:nvGrpSpPr>
@@ -7454,7 +7501,14 @@
         <p:cNvGrpSpPr/>
         <p:nvPr/>
       </p:nvGrpSpPr>
-      <p:grpSpPr/>
+      <p:grpSpPr>
+        <a:xfrm>
+          <a:off x="0" y="0"/>
+          <a:ext cx="0" cy="0"/>
+          <a:chOff x="0" y="0"/>
+          <a:chExt cx="0" cy="0"/>
+        </a:xfrm>
+      </p:grpSpPr>
       <p:sp>
         <p:nvSpPr>
           <p:cNvPr id="2" name="Rectangle 1"/>
@@ -7495,6 +7549,7 @@
           <a:lstStyle/>
           <a:p>
             <a:pPr algn="ctr"/>
+            <a:endParaRPr/>
           </a:p>
         </p:txBody>
       </p:sp>
@@ -7965,6 +8020,7 @@
           <a:lstStyle/>
           <a:p>
             <a:pPr algn="ctr"/>
+            <a:endParaRPr/>
           </a:p>
         </p:txBody>
       </p:sp>
@@ -8117,7 +8173,7 @@
 </file>
 
 <file path=ppt/slides/slide2.xml><?xml version="1.0" encoding="utf-8"?>
-<p:sld xmlns:a="http://schemas.openxmlformats.org/drawingml/2006/main" xmlns:p="http://schemas.openxmlformats.org/presentationml/2006/main" xmlns:r="http://schemas.openxmlformats.org/officeDocument/2006/relationships">
+<p:sld xmlns:a="http://schemas.openxmlformats.org/drawingml/2006/main" xmlns:r="http://schemas.openxmlformats.org/officeDocument/2006/relationships" xmlns:p="http://schemas.openxmlformats.org/presentationml/2006/main">
   <p:cSld>
     <p:spTree>
       <p:nvGrpSpPr>
@@ -8125,7 +8181,14 @@
         <p:cNvGrpSpPr/>
         <p:nvPr/>
       </p:nvGrpSpPr>
-      <p:grpSpPr/>
+      <p:grpSpPr>
+        <a:xfrm>
+          <a:off x="0" y="0"/>
+          <a:ext cx="0" cy="0"/>
+          <a:chOff x="0" y="0"/>
+          <a:chExt cx="0" cy="0"/>
+        </a:xfrm>
+      </p:grpSpPr>
       <p:sp>
         <p:nvSpPr>
           <p:cNvPr id="2" name="Rectangle 1"/>
@@ -8166,6 +8229,7 @@
           <a:lstStyle/>
           <a:p>
             <a:pPr algn="ctr"/>
+            <a:endParaRPr/>
           </a:p>
         </p:txBody>
       </p:sp>
@@ -8566,6 +8630,7 @@
           <a:lstStyle/>
           <a:p>
             <a:pPr algn="ctr"/>
+            <a:endParaRPr/>
           </a:p>
         </p:txBody>
       </p:sp>
@@ -8718,7 +8783,7 @@
 </file>
 
 <file path=ppt/slides/slide3.xml><?xml version="1.0" encoding="utf-8"?>
-<p:sld xmlns:a="http://schemas.openxmlformats.org/drawingml/2006/main" xmlns:p="http://schemas.openxmlformats.org/presentationml/2006/main" xmlns:r="http://schemas.openxmlformats.org/officeDocument/2006/relationships">
+<p:sld xmlns:a="http://schemas.openxmlformats.org/drawingml/2006/main" xmlns:r="http://schemas.openxmlformats.org/officeDocument/2006/relationships" xmlns:p="http://schemas.openxmlformats.org/presentationml/2006/main">
   <p:cSld>
     <p:spTree>
       <p:nvGrpSpPr>
@@ -8726,7 +8791,14 @@
         <p:cNvGrpSpPr/>
         <p:nvPr/>
       </p:nvGrpSpPr>
-      <p:grpSpPr/>
+      <p:grpSpPr>
+        <a:xfrm>
+          <a:off x="0" y="0"/>
+          <a:ext cx="0" cy="0"/>
+          <a:chOff x="0" y="0"/>
+          <a:chExt cx="0" cy="0"/>
+        </a:xfrm>
+      </p:grpSpPr>
       <p:sp>
         <p:nvSpPr>
           <p:cNvPr id="2" name="Rectangle 1"/>
@@ -8767,6 +8839,7 @@
           <a:lstStyle/>
           <a:p>
             <a:pPr algn="ctr"/>
+            <a:endParaRPr/>
           </a:p>
         </p:txBody>
       </p:sp>
@@ -8880,6 +8953,7 @@
           <a:lstStyle/>
           <a:p>
             <a:pPr algn="ctr"/>
+            <a:endParaRPr/>
           </a:p>
         </p:txBody>
       </p:sp>
@@ -8923,6 +8997,7 @@
           <a:lstStyle/>
           <a:p>
             <a:pPr algn="ctr"/>
+            <a:endParaRPr/>
           </a:p>
         </p:txBody>
       </p:sp>
@@ -9037,6 +9112,7 @@
           <a:lstStyle/>
           <a:p>
             <a:pPr algn="ctr"/>
+            <a:endParaRPr/>
           </a:p>
         </p:txBody>
       </p:sp>
@@ -9080,6 +9156,7 @@
           <a:lstStyle/>
           <a:p>
             <a:pPr algn="ctr"/>
+            <a:endParaRPr/>
           </a:p>
         </p:txBody>
       </p:sp>
@@ -9194,6 +9271,7 @@
           <a:lstStyle/>
           <a:p>
             <a:pPr algn="ctr"/>
+            <a:endParaRPr/>
           </a:p>
         </p:txBody>
       </p:sp>
@@ -9237,6 +9315,7 @@
           <a:lstStyle/>
           <a:p>
             <a:pPr algn="ctr"/>
+            <a:endParaRPr/>
           </a:p>
         </p:txBody>
       </p:sp>
@@ -9351,6 +9430,7 @@
           <a:lstStyle/>
           <a:p>
             <a:pPr algn="ctr"/>
+            <a:endParaRPr/>
           </a:p>
         </p:txBody>
       </p:sp>
@@ -9503,7 +9583,7 @@
 </file>
 
 <file path=ppt/slides/slide4.xml><?xml version="1.0" encoding="utf-8"?>
-<p:sld xmlns:a="http://schemas.openxmlformats.org/drawingml/2006/main" xmlns:p="http://schemas.openxmlformats.org/presentationml/2006/main" xmlns:r="http://schemas.openxmlformats.org/officeDocument/2006/relationships">
+<p:sld xmlns:a="http://schemas.openxmlformats.org/drawingml/2006/main" xmlns:r="http://schemas.openxmlformats.org/officeDocument/2006/relationships" xmlns:p="http://schemas.openxmlformats.org/presentationml/2006/main">
   <p:cSld>
     <p:spTree>
       <p:nvGrpSpPr>
@@ -9511,7 +9591,14 @@
         <p:cNvGrpSpPr/>
         <p:nvPr/>
       </p:nvGrpSpPr>
-      <p:grpSpPr/>
+      <p:grpSpPr>
+        <a:xfrm>
+          <a:off x="0" y="0"/>
+          <a:ext cx="0" cy="0"/>
+          <a:chOff x="0" y="0"/>
+          <a:chExt cx="0" cy="0"/>
+        </a:xfrm>
+      </p:grpSpPr>
       <p:sp>
         <p:nvSpPr>
           <p:cNvPr id="2" name="Rectangle 1"/>
@@ -9552,6 +9639,7 @@
           <a:lstStyle/>
           <a:p>
             <a:pPr algn="ctr"/>
+            <a:endParaRPr/>
           </a:p>
         </p:txBody>
       </p:sp>
@@ -9936,6 +10024,7 @@
           <a:lstStyle/>
           <a:p>
             <a:pPr algn="ctr"/>
+            <a:endParaRPr/>
           </a:p>
         </p:txBody>
       </p:sp>
@@ -10085,6 +10174,7 @@
           <a:lstStyle/>
           <a:p>
             <a:pPr algn="ctr"/>
+            <a:endParaRPr/>
           </a:p>
         </p:txBody>
       </p:sp>
@@ -10234,6 +10324,7 @@
           <a:lstStyle/>
           <a:p>
             <a:pPr algn="ctr"/>
+            <a:endParaRPr/>
           </a:p>
         </p:txBody>
       </p:sp>
@@ -10383,6 +10474,7 @@
           <a:lstStyle/>
           <a:p>
             <a:pPr algn="ctr"/>
+            <a:endParaRPr/>
           </a:p>
         </p:txBody>
       </p:sp>
@@ -10532,6 +10624,7 @@
           <a:lstStyle/>
           <a:p>
             <a:pPr algn="ctr"/>
+            <a:endParaRPr/>
           </a:p>
         </p:txBody>
       </p:sp>
@@ -10685,7 +10778,7 @@
 </file>
 
 <file path=ppt/slides/slide5.xml><?xml version="1.0" encoding="utf-8"?>
-<p:sld xmlns:a="http://schemas.openxmlformats.org/drawingml/2006/main" xmlns:p="http://schemas.openxmlformats.org/presentationml/2006/main" xmlns:r="http://schemas.openxmlformats.org/officeDocument/2006/relationships">
+<p:sld xmlns:a="http://schemas.openxmlformats.org/drawingml/2006/main" xmlns:r="http://schemas.openxmlformats.org/officeDocument/2006/relationships" xmlns:p="http://schemas.openxmlformats.org/presentationml/2006/main">
   <p:cSld>
     <p:spTree>
       <p:nvGrpSpPr>
@@ -10693,7 +10786,14 @@
         <p:cNvGrpSpPr/>
         <p:nvPr/>
       </p:nvGrpSpPr>
-      <p:grpSpPr/>
+      <p:grpSpPr>
+        <a:xfrm>
+          <a:off x="0" y="0"/>
+          <a:ext cx="0" cy="0"/>
+          <a:chOff x="0" y="0"/>
+          <a:chExt cx="0" cy="0"/>
+        </a:xfrm>
+      </p:grpSpPr>
       <p:sp>
         <p:nvSpPr>
           <p:cNvPr id="2" name="Rectangle 1"/>
@@ -10734,6 +10834,7 @@
           <a:lstStyle/>
           <a:p>
             <a:pPr algn="ctr"/>
+            <a:endParaRPr/>
           </a:p>
         </p:txBody>
       </p:sp>
@@ -11126,6 +11227,7 @@
           <a:lstStyle/>
           <a:p>
             <a:pPr algn="ctr"/>
+            <a:endParaRPr/>
           </a:p>
         </p:txBody>
       </p:sp>
@@ -11278,7 +11380,7 @@
 </file>
 
 <file path=ppt/slides/slide6.xml><?xml version="1.0" encoding="utf-8"?>
-<p:sld xmlns:a="http://schemas.openxmlformats.org/drawingml/2006/main" xmlns:p="http://schemas.openxmlformats.org/presentationml/2006/main" xmlns:r="http://schemas.openxmlformats.org/officeDocument/2006/relationships">
+<p:sld xmlns:a="http://schemas.openxmlformats.org/drawingml/2006/main" xmlns:r="http://schemas.openxmlformats.org/officeDocument/2006/relationships" xmlns:p="http://schemas.openxmlformats.org/presentationml/2006/main">
   <p:cSld>
     <p:spTree>
       <p:nvGrpSpPr>
@@ -11286,7 +11388,14 @@
         <p:cNvGrpSpPr/>
         <p:nvPr/>
       </p:nvGrpSpPr>
-      <p:grpSpPr/>
+      <p:grpSpPr>
+        <a:xfrm>
+          <a:off x="0" y="0"/>
+          <a:ext cx="0" cy="0"/>
+          <a:chOff x="0" y="0"/>
+          <a:chExt cx="0" cy="0"/>
+        </a:xfrm>
+      </p:grpSpPr>
       <p:sp>
         <p:nvSpPr>
           <p:cNvPr id="2" name="Rectangle 1"/>
@@ -11327,6 +11436,7 @@
           <a:lstStyle/>
           <a:p>
             <a:pPr algn="ctr"/>
+            <a:endParaRPr/>
           </a:p>
         </p:txBody>
       </p:sp>
@@ -11440,6 +11550,7 @@
           <a:lstStyle/>
           <a:p>
             <a:pPr algn="ctr"/>
+            <a:endParaRPr/>
           </a:p>
         </p:txBody>
       </p:sp>
@@ -11483,6 +11594,7 @@
           <a:lstStyle/>
           <a:p>
             <a:pPr algn="ctr"/>
+            <a:endParaRPr/>
           </a:p>
         </p:txBody>
       </p:sp>
@@ -11597,6 +11709,7 @@
           <a:lstStyle/>
           <a:p>
             <a:pPr algn="ctr"/>
+            <a:endParaRPr/>
           </a:p>
         </p:txBody>
       </p:sp>
@@ -11640,6 +11753,7 @@
           <a:lstStyle/>
           <a:p>
             <a:pPr algn="ctr"/>
+            <a:endParaRPr/>
           </a:p>
         </p:txBody>
       </p:sp>
@@ -11755,6 +11869,7 @@
           <a:lstStyle/>
           <a:p>
             <a:pPr algn="ctr"/>
+            <a:endParaRPr/>
           </a:p>
         </p:txBody>
       </p:sp>
@@ -11798,6 +11913,7 @@
           <a:lstStyle/>
           <a:p>
             <a:pPr algn="ctr"/>
+            <a:endParaRPr/>
           </a:p>
         </p:txBody>
       </p:sp>
@@ -11912,6 +12028,7 @@
           <a:lstStyle/>
           <a:p>
             <a:pPr algn="ctr"/>
+            <a:endParaRPr/>
           </a:p>
         </p:txBody>
       </p:sp>
@@ -11955,6 +12072,7 @@
           <a:lstStyle/>
           <a:p>
             <a:pPr algn="ctr"/>
+            <a:endParaRPr/>
           </a:p>
         </p:txBody>
       </p:sp>
@@ -12069,6 +12187,7 @@
           <a:lstStyle/>
           <a:p>
             <a:pPr algn="ctr"/>
+            <a:endParaRPr/>
           </a:p>
         </p:txBody>
       </p:sp>
@@ -12112,6 +12231,7 @@
           <a:lstStyle/>
           <a:p>
             <a:pPr algn="ctr"/>
+            <a:endParaRPr/>
           </a:p>
         </p:txBody>
       </p:sp>
@@ -12226,6 +12346,7 @@
           <a:lstStyle/>
           <a:p>
             <a:pPr algn="ctr"/>
+            <a:endParaRPr/>
           </a:p>
         </p:txBody>
       </p:sp>
@@ -12269,6 +12390,7 @@
           <a:lstStyle/>
           <a:p>
             <a:pPr algn="ctr"/>
+            <a:endParaRPr/>
           </a:p>
         </p:txBody>
       </p:sp>
@@ -12419,6 +12541,7 @@
           <a:lstStyle/>
           <a:p>
             <a:pPr algn="ctr"/>
+            <a:endParaRPr/>
           </a:p>
         </p:txBody>
       </p:sp>
@@ -12510,6 +12633,7 @@
           <a:lstStyle/>
           <a:p>
             <a:pPr algn="ctr"/>
+            <a:endParaRPr/>
           </a:p>
         </p:txBody>
       </p:sp>
@@ -12601,6 +12725,7 @@
           <a:lstStyle/>
           <a:p>
             <a:pPr algn="ctr"/>
+            <a:endParaRPr/>
           </a:p>
         </p:txBody>
       </p:sp>
@@ -12692,6 +12817,7 @@
           <a:lstStyle/>
           <a:p>
             <a:pPr algn="ctr"/>
+            <a:endParaRPr/>
           </a:p>
         </p:txBody>
       </p:sp>
@@ -12783,6 +12909,7 @@
           <a:lstStyle/>
           <a:p>
             <a:pPr algn="ctr"/>
+            <a:endParaRPr/>
           </a:p>
         </p:txBody>
       </p:sp>
@@ -12874,6 +13001,7 @@
           <a:lstStyle/>
           <a:p>
             <a:pPr algn="ctr"/>
+            <a:endParaRPr/>
           </a:p>
         </p:txBody>
       </p:sp>
@@ -12965,6 +13093,7 @@
           <a:lstStyle/>
           <a:p>
             <a:pPr algn="ctr"/>
+            <a:endParaRPr/>
           </a:p>
         </p:txBody>
       </p:sp>
@@ -13117,7 +13246,7 @@
 </file>
 
 <file path=ppt/slides/slide7.xml><?xml version="1.0" encoding="utf-8"?>
-<p:sld xmlns:a="http://schemas.openxmlformats.org/drawingml/2006/main" xmlns:p="http://schemas.openxmlformats.org/presentationml/2006/main" xmlns:r="http://schemas.openxmlformats.org/officeDocument/2006/relationships">
+<p:sld xmlns:a="http://schemas.openxmlformats.org/drawingml/2006/main" xmlns:r="http://schemas.openxmlformats.org/officeDocument/2006/relationships" xmlns:p="http://schemas.openxmlformats.org/presentationml/2006/main">
   <p:cSld>
     <p:spTree>
       <p:nvGrpSpPr>
@@ -13125,7 +13254,14 @@
         <p:cNvGrpSpPr/>
         <p:nvPr/>
       </p:nvGrpSpPr>
-      <p:grpSpPr/>
+      <p:grpSpPr>
+        <a:xfrm>
+          <a:off x="0" y="0"/>
+          <a:ext cx="0" cy="0"/>
+          <a:chOff x="0" y="0"/>
+          <a:chExt cx="0" cy="0"/>
+        </a:xfrm>
+      </p:grpSpPr>
       <p:sp>
         <p:nvSpPr>
           <p:cNvPr id="2" name="Rectangle 1"/>
@@ -13166,6 +13302,7 @@
           <a:lstStyle/>
           <a:p>
             <a:pPr algn="ctr"/>
+            <a:endParaRPr/>
           </a:p>
         </p:txBody>
       </p:sp>
@@ -13279,6 +13416,7 @@
           <a:lstStyle/>
           <a:p>
             <a:pPr algn="ctr"/>
+            <a:endParaRPr/>
           </a:p>
         </p:txBody>
       </p:sp>
@@ -13322,6 +13460,7 @@
           <a:lstStyle/>
           <a:p>
             <a:pPr algn="ctr"/>
+            <a:endParaRPr/>
           </a:p>
         </p:txBody>
       </p:sp>
@@ -13470,6 +13609,7 @@
           <a:lstStyle/>
           <a:p>
             <a:pPr algn="ctr"/>
+            <a:endParaRPr/>
           </a:p>
         </p:txBody>
       </p:sp>
@@ -13513,6 +13653,7 @@
           <a:lstStyle/>
           <a:p>
             <a:pPr algn="ctr"/>
+            <a:endParaRPr/>
           </a:p>
         </p:txBody>
       </p:sp>
@@ -13661,6 +13802,7 @@
           <a:lstStyle/>
           <a:p>
             <a:pPr algn="ctr"/>
+            <a:endParaRPr/>
           </a:p>
         </p:txBody>
       </p:sp>
@@ -13704,6 +13846,7 @@
           <a:lstStyle/>
           <a:p>
             <a:pPr algn="ctr"/>
+            <a:endParaRPr/>
           </a:p>
         </p:txBody>
       </p:sp>
@@ -13888,6 +14031,7 @@
           <a:lstStyle/>
           <a:p>
             <a:pPr algn="ctr"/>
+            <a:endParaRPr/>
           </a:p>
         </p:txBody>
       </p:sp>
@@ -14001,6 +14145,7 @@
           <a:lstStyle/>
           <a:p>
             <a:pPr algn="ctr"/>
+            <a:endParaRPr/>
           </a:p>
         </p:txBody>
       </p:sp>
@@ -14114,6 +14259,7 @@
           <a:lstStyle/>
           <a:p>
             <a:pPr algn="ctr"/>
+            <a:endParaRPr/>
           </a:p>
         </p:txBody>
       </p:sp>
@@ -14227,6 +14373,7 @@
           <a:lstStyle/>
           <a:p>
             <a:pPr algn="ctr"/>
+            <a:endParaRPr/>
           </a:p>
         </p:txBody>
       </p:sp>
@@ -14340,6 +14487,7 @@
           <a:lstStyle/>
           <a:p>
             <a:pPr algn="ctr"/>
+            <a:endParaRPr/>
           </a:p>
         </p:txBody>
       </p:sp>
@@ -14453,6 +14601,7 @@
           <a:lstStyle/>
           <a:p>
             <a:pPr algn="ctr"/>
+            <a:endParaRPr/>
           </a:p>
         </p:txBody>
       </p:sp>
@@ -14605,7 +14754,7 @@
 </file>
 
 <file path=ppt/slides/slide8.xml><?xml version="1.0" encoding="utf-8"?>
-<p:sld xmlns:a="http://schemas.openxmlformats.org/drawingml/2006/main" xmlns:p="http://schemas.openxmlformats.org/presentationml/2006/main" xmlns:r="http://schemas.openxmlformats.org/officeDocument/2006/relationships">
+<p:sld xmlns:a="http://schemas.openxmlformats.org/drawingml/2006/main" xmlns:r="http://schemas.openxmlformats.org/officeDocument/2006/relationships" xmlns:p="http://schemas.openxmlformats.org/presentationml/2006/main">
   <p:cSld>
     <p:spTree>
       <p:nvGrpSpPr>
@@ -14613,7 +14762,14 @@
         <p:cNvGrpSpPr/>
         <p:nvPr/>
       </p:nvGrpSpPr>
-      <p:grpSpPr/>
+      <p:grpSpPr>
+        <a:xfrm>
+          <a:off x="0" y="0"/>
+          <a:ext cx="0" cy="0"/>
+          <a:chOff x="0" y="0"/>
+          <a:chExt cx="0" cy="0"/>
+        </a:xfrm>
+      </p:grpSpPr>
       <p:sp>
         <p:nvSpPr>
           <p:cNvPr id="2" name="Rectangle 1"/>
@@ -14654,6 +14810,7 @@
           <a:lstStyle/>
           <a:p>
             <a:pPr algn="ctr"/>
+            <a:endParaRPr/>
           </a:p>
         </p:txBody>
       </p:sp>
@@ -14815,6 +14972,7 @@
           <a:lstStyle/>
           <a:p>
             <a:pPr algn="ctr"/>
+            <a:endParaRPr/>
           </a:p>
         </p:txBody>
       </p:sp>
@@ -15208,6 +15366,7 @@
           <a:lstStyle/>
           <a:p>
             <a:pPr algn="ctr"/>
+            <a:endParaRPr/>
           </a:p>
         </p:txBody>
       </p:sp>
@@ -15325,7 +15484,7 @@
 </file>
 
 <file path=ppt/slides/slide9.xml><?xml version="1.0" encoding="utf-8"?>
-<p:sld xmlns:a="http://schemas.openxmlformats.org/drawingml/2006/main" xmlns:p="http://schemas.openxmlformats.org/presentationml/2006/main" xmlns:r="http://schemas.openxmlformats.org/officeDocument/2006/relationships">
+<p:sld xmlns:a="http://schemas.openxmlformats.org/drawingml/2006/main" xmlns:r="http://schemas.openxmlformats.org/officeDocument/2006/relationships" xmlns:p="http://schemas.openxmlformats.org/presentationml/2006/main">
   <p:cSld>
     <p:spTree>
       <p:nvGrpSpPr>
@@ -15333,7 +15492,14 @@
         <p:cNvGrpSpPr/>
         <p:nvPr/>
       </p:nvGrpSpPr>
-      <p:grpSpPr/>
+      <p:grpSpPr>
+        <a:xfrm>
+          <a:off x="0" y="0"/>
+          <a:ext cx="0" cy="0"/>
+          <a:chOff x="0" y="0"/>
+          <a:chExt cx="0" cy="0"/>
+        </a:xfrm>
+      </p:grpSpPr>
       <p:sp>
         <p:nvSpPr>
           <p:cNvPr id="2" name="Rectangle 1"/>
@@ -15374,6 +15540,7 @@
           <a:lstStyle/>
           <a:p>
             <a:pPr algn="ctr"/>
+            <a:endParaRPr/>
           </a:p>
         </p:txBody>
       </p:sp>
@@ -15487,6 +15654,7 @@
           <a:lstStyle/>
           <a:p>
             <a:pPr algn="ctr"/>
+            <a:endParaRPr/>
           </a:p>
         </p:txBody>
       </p:sp>
@@ -15530,6 +15698,7 @@
           <a:lstStyle/>
           <a:p>
             <a:pPr algn="ctr"/>
+            <a:endParaRPr/>
           </a:p>
         </p:txBody>
       </p:sp>
@@ -15713,6 +15882,7 @@
           <a:lstStyle/>
           <a:p>
             <a:pPr algn="ctr"/>
+            <a:endParaRPr/>
           </a:p>
         </p:txBody>
       </p:sp>
@@ -15756,6 +15926,7 @@
           <a:lstStyle/>
           <a:p>
             <a:pPr algn="ctr"/>
+            <a:endParaRPr/>
           </a:p>
         </p:txBody>
       </p:sp>
@@ -15930,6 +16101,7 @@
           <a:lstStyle/>
           <a:p>
             <a:pPr algn="ctr"/>
+            <a:endParaRPr/>
           </a:p>
         </p:txBody>
       </p:sp>
@@ -15973,6 +16145,7 @@
           <a:lstStyle/>
           <a:p>
             <a:pPr algn="ctr"/>
+            <a:endParaRPr/>
           </a:p>
         </p:txBody>
       </p:sp>
@@ -16147,6 +16320,7 @@
           <a:lstStyle/>
           <a:p>
             <a:pPr algn="ctr"/>
+            <a:endParaRPr/>
           </a:p>
         </p:txBody>
       </p:sp>
